--- a/sesion-02/Sesion_02_Copilot_y_Prompting.pptx
+++ b/sesion-02/Sesion_02_Copilot_y_Prompting.pptx
@@ -15828,7 +15828,7 @@
                 <a:ea typeface="Calibri" pitchFamily="34" charset="-122"/>
                 <a:cs typeface="Calibri" pitchFamily="34" charset="-120"/>
               </a:rPr>
-              <a:t>Ojo: un prompt más largo no es automáticamente mejor. En uno de los cuatro la respuesta correcta es no usar la herramienta.</a:t>
+              <a:t>Ojo: un prompt más largo no es automáticamente mejor. En uno de los cuatro la respuesta correcta es no delegarle la tarea al modelo.</a:t>
             </a:r>
             <a:endParaRPr lang="en-US" sz="1450" dirty="0"/>
           </a:p>

--- a/sesion-02/Sesion_02_Copilot_y_Prompting.pptx
+++ b/sesion-02/Sesion_02_Copilot_y_Prompting.pptx
@@ -8,12 +8,20 @@
     <p:sldId id="256" r:id="rId2"/>
     <p:sldId id="257" r:id="rId3"/>
     <p:sldId id="258" r:id="rId4"/>
+    <p:sldId id="278" r:id="rId29"/>
+    <p:sldId id="279" r:id="rId30"/>
+    <p:sldId id="280" r:id="rId31"/>
+    <p:sldId id="281" r:id="rId32"/>
     <p:sldId id="259" r:id="rId5"/>
     <p:sldId id="260" r:id="rId6"/>
     <p:sldId id="261" r:id="rId7"/>
     <p:sldId id="262" r:id="rId8"/>
     <p:sldId id="263" r:id="rId9"/>
     <p:sldId id="264" r:id="rId10"/>
+    <p:sldId id="282" r:id="rId33"/>
+    <p:sldId id="283" r:id="rId34"/>
+    <p:sldId id="284" r:id="rId35"/>
+    <p:sldId id="285" r:id="rId36"/>
     <p:sldId id="265" r:id="rId11"/>
     <p:sldId id="266" r:id="rId12"/>
     <p:sldId id="267" r:id="rId13"/>
@@ -1227,7 +1235,7 @@
           <a:p>
             <a:r>
               <a:rPr lang="en-US" dirty="0"/>
-              <a:t>El orden es obligatorio: primero corren el prompt, después leen. El hilo tiene seis trampas y la transcripción otras seis. Pregunta quién detectó el acuerdo que desaparece del último mensaje.</a:t>
+              <a:t>El orden es obligatorio: primero corren el prompt, después leen. El hilo tiene seis trampas y la transcripción, que hoy queda de práctica en casa, otras seis. Pregunta quién detectó el acuerdo que desaparece del último mensaje.</a:t>
             </a:r>
             <a:endParaRPr lang="en-US" dirty="0"/>
           </a:p>
@@ -3250,7 +3258,7 @@
                 <a:ea typeface="Calibri" pitchFamily="34" charset="-122"/>
                 <a:cs typeface="Calibri" pitchFamily="34" charset="-120"/>
               </a:rPr>
-              <a:t>10:00 a 10:20</a:t>
+              <a:t>10:25 a 10:47</a:t>
             </a:r>
             <a:endParaRPr lang="en-US" sz="1200" dirty="0"/>
           </a:p>
@@ -4009,7 +4017,7 @@
                 <a:ea typeface="Arial" pitchFamily="34" charset="-122"/>
                 <a:cs typeface="Arial" pitchFamily="34" charset="-120"/>
               </a:rPr>
-              <a:t>20 minutos</a:t>
+              <a:t>15 minutos</a:t>
             </a:r>
             <a:endParaRPr lang="en-US" sz="1300" dirty="0"/>
           </a:p>
@@ -4886,7 +4894,7 @@
                 <a:ea typeface="Calibri" pitchFamily="34" charset="-122"/>
                 <a:cs typeface="Calibri" pitchFamily="34" charset="-120"/>
               </a:rPr>
-              <a:t>10:30 a 10:55</a:t>
+              <a:t>10:47 a 11:11</a:t>
             </a:r>
             <a:endParaRPr lang="en-US" sz="1200" dirty="0"/>
           </a:p>
@@ -5810,7 +5818,7 @@
                 <a:ea typeface="Arial" pitchFamily="34" charset="-122"/>
                 <a:cs typeface="Arial" pitchFamily="34" charset="-120"/>
               </a:rPr>
-              <a:t>25 minutos</a:t>
+              <a:t>15 minutos</a:t>
             </a:r>
             <a:endParaRPr lang="en-US" sz="1300" dirty="0"/>
           </a:p>
@@ -6248,7 +6256,7 @@
                 <a:ea typeface="Calibri" pitchFamily="34" charset="-122"/>
                 <a:cs typeface="Calibri" pitchFamily="34" charset="-120"/>
               </a:rPr>
-              <a:t>Repite con la transcripción de la reunión. Fíjate sobre todo en las fechas límite y en las tareas que quedaron sin dueño.</a:t>
+              <a:t>La transcripción te la llevas de práctica en casa hoy: repite ahí el ejercicio y fíjate en fechas límite y tareas sin dueño.</a:t>
             </a:r>
             <a:endParaRPr lang="en-US" sz="1450" dirty="0"/>
           </a:p>
@@ -7222,7 +7230,7 @@
                 <a:ea typeface="Calibri" pitchFamily="34" charset="-122"/>
                 <a:cs typeface="Calibri" pitchFamily="34" charset="-120"/>
               </a:rPr>
-              <a:t>10:55 a 11:20</a:t>
+              <a:t>11:11 a 11:24</a:t>
             </a:r>
             <a:endParaRPr lang="en-US" sz="1200" dirty="0"/>
           </a:p>
@@ -7460,7 +7468,7 @@
                 <a:ea typeface="Calibri" pitchFamily="34" charset="-122"/>
                 <a:cs typeface="Calibri" pitchFamily="34" charset="-120"/>
               </a:rPr>
-              <a:t>Repaso: las tres lecciones de ayer</a:t>
+              <a:t>Repaso, el mapa completo y lo pendiente de ayer</a:t>
             </a:r>
             <a:endParaRPr lang="en-US" sz="1350" dirty="0"/>
           </a:p>
@@ -7526,7 +7534,7 @@
                 <a:ea typeface="Arial" pitchFamily="34" charset="-122"/>
                 <a:cs typeface="Arial" pitchFamily="34" charset="-120"/>
               </a:rPr>
-              <a:t>9:10</a:t>
+              <a:t>9:27</a:t>
             </a:r>
             <a:endParaRPr lang="en-US" sz="1300" dirty="0"/>
           </a:p>
@@ -7634,7 +7642,7 @@
                 <a:ea typeface="Arial" pitchFamily="34" charset="-122"/>
                 <a:cs typeface="Arial" pitchFamily="34" charset="-120"/>
               </a:rPr>
-              <a:t>9:35</a:t>
+              <a:t>9:40</a:t>
             </a:r>
             <a:endParaRPr lang="en-US" sz="1300" dirty="0"/>
           </a:p>
@@ -7691,6 +7699,114 @@
         <p:spPr>
           <a:xfrm>
             <a:off x="566928" y="5090922"/>
+            <a:ext cx="5364328" cy="1081278"/>
+          </a:xfrm>
+          <a:prstGeom prst="roundRect">
+            <a:avLst>
+              <a:gd name="adj" fmla="val 5920"/>
+            </a:avLst>
+          </a:prstGeom>
+          <a:solidFill>
+            <a:srgbClr val="F7E4D8"/>
+          </a:solidFill>
+          <a:ln w="12700">
+            <a:solidFill>
+              <a:srgbClr val="F7E4D8"/>
+            </a:solidFill>
+            <a:prstDash val="solid"/>
+          </a:ln>
+        </p:spPr>
+      </p:sp>
+      <p:sp>
+        <p:nvSpPr>
+          <p:cNvPr id="15" name="Text 13"/>
+          <p:cNvSpPr txBox="1"/>
+          <p:nvPr/>
+        </p:nvSpPr>
+        <p:spPr>
+          <a:xfrm>
+            <a:off x="786384" y="5090922"/>
+            <a:ext cx="1371600" cy="1081278"/>
+          </a:xfrm>
+          <a:prstGeom prst="rect">
+            <a:avLst/>
+          </a:prstGeom>
+          <a:noFill/>
+          <a:ln/>
+        </p:spPr>
+        <p:txBody>
+          <a:bodyPr wrap="square" lIns="0" tIns="0" rIns="0" bIns="0" rtlCol="0" anchor="ctr"/>
+          <a:lstStyle/>
+          <a:p>
+            <a:pPr indent="0" marL="0">
+              <a:buNone/>
+            </a:pPr>
+            <a:r>
+              <a:rPr lang="en-US" sz="1300" b="1" dirty="0">
+                <a:solidFill>
+                  <a:srgbClr val="C85A28"/>
+                </a:solidFill>
+                <a:latin typeface="Arial" pitchFamily="34" charset="0"/>
+                <a:ea typeface="Arial" pitchFamily="34" charset="-122"/>
+                <a:cs typeface="Arial" pitchFamily="34" charset="-120"/>
+              </a:rPr>
+              <a:t>10:15</a:t>
+            </a:r>
+            <a:endParaRPr lang="en-US" sz="1300" dirty="0"/>
+          </a:p>
+        </p:txBody>
+      </p:sp>
+      <p:sp>
+        <p:nvSpPr>
+          <p:cNvPr id="16" name="Text 14"/>
+          <p:cNvSpPr txBox="1"/>
+          <p:nvPr/>
+        </p:nvSpPr>
+        <p:spPr>
+          <a:xfrm>
+            <a:off x="2194560" y="5145786"/>
+            <a:ext cx="3517240" cy="971550"/>
+          </a:xfrm>
+          <a:prstGeom prst="rect">
+            <a:avLst/>
+          </a:prstGeom>
+          <a:noFill/>
+          <a:ln/>
+        </p:spPr>
+        <p:txBody>
+          <a:bodyPr wrap="square" lIns="0" tIns="0" rIns="0" bIns="0" rtlCol="0" anchor="ctr"/>
+          <a:lstStyle/>
+          <a:p>
+            <a:pPr indent="0" marL="0">
+              <a:lnSpc>
+                <a:spcPct val="105000"/>
+              </a:lnSpc>
+              <a:buNone/>
+            </a:pPr>
+            <a:r>
+              <a:rPr lang="en-US" sz="1350" dirty="0">
+                <a:solidFill>
+                  <a:srgbClr val="16262E"/>
+                </a:solidFill>
+                <a:latin typeface="Calibri" pitchFamily="34" charset="0"/>
+                <a:ea typeface="Calibri" pitchFamily="34" charset="-122"/>
+                <a:cs typeface="Calibri" pitchFamily="34" charset="-120"/>
+              </a:rPr>
+              <a:t>Receso. Quien quiera el mapa con más detalle, se queda</a:t>
+            </a:r>
+            <a:endParaRPr lang="en-US" sz="1350" dirty="0"/>
+          </a:p>
+        </p:txBody>
+      </p:sp>
+      <p:sp>
+        <p:nvSpPr>
+          <p:cNvPr id="17" name="Shape 15"/>
+          <p:cNvSpPr/>
+          <p:nvPr/>
+        </p:nvSpPr>
+        <p:spPr>
+          <a:xfrm>
+            <a:off x="6260440" y="1408176"/>
             <a:ext cx="5364328" cy="1081278"/>
           </a:xfrm>
           <a:prstGeom prst="roundRect">
@@ -7711,13 +7827,13 @@
       </p:sp>
       <p:sp>
         <p:nvSpPr>
-          <p:cNvPr id="15" name="Text 13"/>
-          <p:cNvSpPr txBox="1"/>
-          <p:nvPr/>
-        </p:nvSpPr>
-        <p:spPr>
-          <a:xfrm>
-            <a:off x="786384" y="5090922"/>
+          <p:cNvPr id="18" name="Text 16"/>
+          <p:cNvSpPr txBox="1"/>
+          <p:nvPr/>
+        </p:nvSpPr>
+        <p:spPr>
+          <a:xfrm>
+            <a:off x="6479896" y="1408176"/>
             <a:ext cx="1371600" cy="1081278"/>
           </a:xfrm>
           <a:prstGeom prst="rect">
@@ -7742,7 +7858,7 @@
                 <a:ea typeface="Arial" pitchFamily="34" charset="-122"/>
                 <a:cs typeface="Arial" pitchFamily="34" charset="-120"/>
               </a:rPr>
-              <a:t>10:00</a:t>
+              <a:t>10:25</a:t>
             </a:r>
             <a:endParaRPr lang="en-US" sz="1300" dirty="0"/>
           </a:p>
@@ -7750,13 +7866,13 @@
       </p:sp>
       <p:sp>
         <p:nvSpPr>
-          <p:cNvPr id="16" name="Text 14"/>
-          <p:cNvSpPr txBox="1"/>
-          <p:nvPr/>
-        </p:nvSpPr>
-        <p:spPr>
-          <a:xfrm>
-            <a:off x="2194560" y="5145786"/>
+          <p:cNvPr id="19" name="Text 17"/>
+          <p:cNvSpPr txBox="1"/>
+          <p:nvPr/>
+        </p:nvSpPr>
+        <p:spPr>
+          <a:xfrm>
+            <a:off x="7888072" y="1463040"/>
             <a:ext cx="3517240" cy="971550"/>
           </a:xfrm>
           <a:prstGeom prst="rect">
@@ -7785,114 +7901,6 @@
                 <a:cs typeface="Calibri" pitchFamily="34" charset="-120"/>
               </a:rPr>
               <a:t>Haz que trabaje sobre tu documento</a:t>
-            </a:r>
-            <a:endParaRPr lang="en-US" sz="1350" dirty="0"/>
-          </a:p>
-        </p:txBody>
-      </p:sp>
-      <p:sp>
-        <p:nvSpPr>
-          <p:cNvPr id="17" name="Shape 15"/>
-          <p:cNvSpPr/>
-          <p:nvPr/>
-        </p:nvSpPr>
-        <p:spPr>
-          <a:xfrm>
-            <a:off x="6260440" y="1408176"/>
-            <a:ext cx="5364328" cy="1081278"/>
-          </a:xfrm>
-          <a:prstGeom prst="roundRect">
-            <a:avLst>
-              <a:gd name="adj" fmla="val 5920"/>
-            </a:avLst>
-          </a:prstGeom>
-          <a:solidFill>
-            <a:srgbClr val="F7E4D8"/>
-          </a:solidFill>
-          <a:ln w="12700">
-            <a:solidFill>
-              <a:srgbClr val="F7E4D8"/>
-            </a:solidFill>
-            <a:prstDash val="solid"/>
-          </a:ln>
-        </p:spPr>
-      </p:sp>
-      <p:sp>
-        <p:nvSpPr>
-          <p:cNvPr id="18" name="Text 16"/>
-          <p:cNvSpPr txBox="1"/>
-          <p:nvPr/>
-        </p:nvSpPr>
-        <p:spPr>
-          <a:xfrm>
-            <a:off x="6479896" y="1408176"/>
-            <a:ext cx="1371600" cy="1081278"/>
-          </a:xfrm>
-          <a:prstGeom prst="rect">
-            <a:avLst/>
-          </a:prstGeom>
-          <a:noFill/>
-          <a:ln/>
-        </p:spPr>
-        <p:txBody>
-          <a:bodyPr wrap="square" lIns="0" tIns="0" rIns="0" bIns="0" rtlCol="0" anchor="ctr"/>
-          <a:lstStyle/>
-          <a:p>
-            <a:pPr indent="0" marL="0">
-              <a:buNone/>
-            </a:pPr>
-            <a:r>
-              <a:rPr lang="en-US" sz="1300" b="1" dirty="0">
-                <a:solidFill>
-                  <a:srgbClr val="C85A28"/>
-                </a:solidFill>
-                <a:latin typeface="Arial" pitchFamily="34" charset="0"/>
-                <a:ea typeface="Arial" pitchFamily="34" charset="-122"/>
-                <a:cs typeface="Arial" pitchFamily="34" charset="-120"/>
-              </a:rPr>
-              <a:t>10:20</a:t>
-            </a:r>
-            <a:endParaRPr lang="en-US" sz="1300" dirty="0"/>
-          </a:p>
-        </p:txBody>
-      </p:sp>
-      <p:sp>
-        <p:nvSpPr>
-          <p:cNvPr id="19" name="Text 17"/>
-          <p:cNvSpPr txBox="1"/>
-          <p:nvPr/>
-        </p:nvSpPr>
-        <p:spPr>
-          <a:xfrm>
-            <a:off x="7888072" y="1463040"/>
-            <a:ext cx="3517240" cy="971550"/>
-          </a:xfrm>
-          <a:prstGeom prst="rect">
-            <a:avLst/>
-          </a:prstGeom>
-          <a:noFill/>
-          <a:ln/>
-        </p:spPr>
-        <p:txBody>
-          <a:bodyPr wrap="square" lIns="0" tIns="0" rIns="0" bIns="0" rtlCol="0" anchor="ctr"/>
-          <a:lstStyle/>
-          <a:p>
-            <a:pPr indent="0" marL="0">
-              <a:lnSpc>
-                <a:spcPct val="105000"/>
-              </a:lnSpc>
-              <a:buNone/>
-            </a:pPr>
-            <a:r>
-              <a:rPr lang="en-US" sz="1350" dirty="0">
-                <a:solidFill>
-                  <a:srgbClr val="16262E"/>
-                </a:solidFill>
-                <a:latin typeface="Calibri" pitchFamily="34" charset="0"/>
-                <a:ea typeface="Calibri" pitchFamily="34" charset="-122"/>
-                <a:cs typeface="Calibri" pitchFamily="34" charset="-120"/>
-              </a:rPr>
-              <a:t>Receso de diez minutos</a:t>
             </a:r>
             <a:endParaRPr lang="en-US" sz="1350" dirty="0"/>
           </a:p>
@@ -7958,7 +7966,7 @@
                 <a:ea typeface="Arial" pitchFamily="34" charset="-122"/>
                 <a:cs typeface="Arial" pitchFamily="34" charset="-120"/>
               </a:rPr>
-              <a:t>10:30</a:t>
+              <a:t>10:47</a:t>
             </a:r>
             <a:endParaRPr lang="en-US" sz="1300" dirty="0"/>
           </a:p>
@@ -8066,7 +8074,7 @@
                 <a:ea typeface="Arial" pitchFamily="34" charset="-122"/>
                 <a:cs typeface="Arial" pitchFamily="34" charset="-120"/>
               </a:rPr>
-              <a:t>10:55</a:t>
+              <a:t>11:11</a:t>
             </a:r>
             <a:endParaRPr lang="en-US" sz="1300" dirty="0"/>
           </a:p>
@@ -8174,7 +8182,7 @@
                 <a:ea typeface="Arial" pitchFamily="34" charset="-122"/>
                 <a:cs typeface="Arial" pitchFamily="34" charset="-120"/>
               </a:rPr>
-              <a:t>11:20</a:t>
+              <a:t>11:24</a:t>
             </a:r>
             <a:endParaRPr lang="en-US" sz="1300" dirty="0"/>
           </a:p>
@@ -8216,7 +8224,7 @@
                 <a:ea typeface="Calibri" pitchFamily="34" charset="-122"/>
                 <a:cs typeface="Calibri" pitchFamily="34" charset="-120"/>
               </a:rPr>
-              <a:t>Cierre y tarea</a:t>
+              <a:t>Cierre: equipos, entregas y tarea</a:t>
             </a:r>
             <a:endParaRPr lang="en-US" sz="1350" dirty="0"/>
           </a:p>
@@ -8255,7 +8263,7 @@
                 <a:ea typeface="Calibri" pitchFamily="34" charset="-122"/>
                 <a:cs typeface="Calibri" pitchFamily="34" charset="-120"/>
               </a:rPr>
-              <a:t>Hoy trabajas 80 minutos con las manos en el teclado. Ten abierto desde ahora el documento que bajaste.</a:t>
+              <a:t>Hoy trabajas unos 70 minutos con las manos en el teclado. Ten abierto desde ahora el documento que bajaste.</a:t>
             </a:r>
             <a:endParaRPr lang="en-US" sz="1000" dirty="0"/>
           </a:p>
@@ -9210,7 +9218,7 @@
                 <a:ea typeface="Arial" pitchFamily="34" charset="-122"/>
                 <a:cs typeface="Arial" pitchFamily="34" charset="-120"/>
               </a:rPr>
-              <a:t>25 minutos</a:t>
+              <a:t>10 minutos</a:t>
             </a:r>
             <a:endParaRPr lang="en-US" sz="1300" dirty="0"/>
           </a:p>
@@ -9515,7 +9523,7 @@
                 <a:ea typeface="Calibri" pitchFamily="34" charset="-122"/>
                 <a:cs typeface="Calibri" pitchFamily="34" charset="-120"/>
               </a:rPr>
-              <a:t>Escribe un prompt para cada una con las seis casillas. Pruébalo.</a:t>
+              <a:t>Escribe el prompt de la primera con las seis casillas y pruébalo en Copilot.</a:t>
             </a:r>
             <a:endParaRPr lang="en-US" sz="1450" dirty="0"/>
           </a:p>
@@ -9648,7 +9656,7 @@
                 <a:ea typeface="Calibri" pitchFamily="34" charset="-122"/>
                 <a:cs typeface="Calibri" pitchFamily="34" charset="-120"/>
               </a:rPr>
-              <a:t>Corrígelo al menos una vez, siguiendo el ciclo de la lámina anterior.</a:t>
+              <a:t>Corrígelo al menos una vez con el ciclo de la lámina anterior y guarda las dos versiones.</a:t>
             </a:r>
             <a:endParaRPr lang="en-US" sz="1450" dirty="0"/>
           </a:p>
@@ -9781,7 +9789,7 @@
                 <a:ea typeface="Calibri" pitchFamily="34" charset="-122"/>
                 <a:cs typeface="Calibri" pitchFamily="34" charset="-120"/>
               </a:rPr>
-              <a:t>Guárdalo en tu biblioteca con las dos versiones y una nota de qué cambiaste.</a:t>
+              <a:t>Los otros dos prompts los terminas hoy en casa, igual. Los tres se entregan con su versión inicial, su corrección y qué cambiaste.</a:t>
             </a:r>
             <a:endParaRPr lang="en-US" sz="1450" dirty="0"/>
           </a:p>
@@ -9873,6 +9881,880 @@
     </p:bg>
     <p:spTree>
       <p:nvGrpSpPr>
+        <p:cNvPr id="2" name=""/>
+        <p:cNvGrpSpPr/>
+        <p:nvPr/>
+      </p:nvGrpSpPr>
+      <p:grpSpPr>
+        <a:xfrm>
+          <a:off x="0" y="0"/>
+          <a:ext cx="0" cy="0"/>
+          <a:chOff x="0" y="0"/>
+          <a:chExt cx="0" cy="0"/>
+        </a:xfrm>
+      </p:grpSpPr>
+      <p:sp>
+        <p:nvSpPr>
+          <p:cNvPr id="3" name="Text 1"/>
+          <p:cNvSpPr txBox="1"/>
+          <p:nvPr/>
+        </p:nvSpPr>
+        <p:spPr>
+          <a:xfrm>
+            <a:off x="566928" y="685800"/>
+            <a:ext cx="10424160" cy="365760"/>
+          </a:xfrm>
+          <a:prstGeom prst="rect">
+            <a:avLst/>
+          </a:prstGeom>
+          <a:noFill/>
+          <a:ln/>
+        </p:spPr>
+        <p:txBody>
+          <a:bodyPr wrap="square" lIns="0" tIns="0" rIns="0" bIns="0" rtlCol="0" anchor="ctr"/>
+          <a:lstStyle/>
+          <a:p>
+            <a:pPr indent="0" marL="0">
+              <a:buNone/>
+            </a:pPr>
+            <a:r>
+              <a:rPr lang="en-US" sz="1400" b="1" spc="200" kern="0" dirty="0">
+                <a:solidFill>
+                  <a:srgbClr val="C85A28"/>
+                </a:solidFill>
+                <a:latin typeface="Calibri" pitchFamily="34" charset="0"/>
+                <a:ea typeface="Calibri" pitchFamily="34" charset="-122"/>
+                <a:cs typeface="Calibri" pitchFamily="34" charset="-120"/>
+              </a:rPr>
+              <a:t>AL SALIR DE HOY</a:t>
+            </a:r>
+            <a:endParaRPr lang="en-US" sz="1400" dirty="0"/>
+          </a:p>
+        </p:txBody>
+      </p:sp>
+      <p:sp>
+        <p:nvSpPr>
+          <p:cNvPr id="4" name="Text 2"/>
+          <p:cNvSpPr txBox="1"/>
+          <p:nvPr/>
+        </p:nvSpPr>
+        <p:spPr>
+          <a:xfrm>
+            <a:off x="566928" y="1097280"/>
+            <a:ext cx="10607040" cy="731520"/>
+          </a:xfrm>
+          <a:prstGeom prst="rect">
+            <a:avLst/>
+          </a:prstGeom>
+          <a:noFill/>
+          <a:ln/>
+        </p:spPr>
+        <p:txBody>
+          <a:bodyPr wrap="square" lIns="0" tIns="0" rIns="0" bIns="0" rtlCol="0" anchor="ctr"/>
+          <a:lstStyle/>
+          <a:p>
+            <a:pPr indent="0" marL="0">
+              <a:buNone/>
+            </a:pPr>
+            <a:r>
+              <a:rPr lang="en-US" sz="3000" b="1" dirty="0">
+                <a:solidFill>
+                  <a:srgbClr val="FFFFFF"/>
+                </a:solidFill>
+                <a:latin typeface="Arial" pitchFamily="34" charset="0"/>
+                <a:ea typeface="Arial" pitchFamily="34" charset="-122"/>
+                <a:cs typeface="Arial" pitchFamily="34" charset="-120"/>
+              </a:rPr>
+              <a:t>Lo que entregas y lo que sigue</a:t>
+            </a:r>
+            <a:endParaRPr lang="en-US" sz="3000" dirty="0"/>
+          </a:p>
+        </p:txBody>
+      </p:sp>
+      <p:sp>
+        <p:nvSpPr>
+          <p:cNvPr id="5" name="Shape 3"/>
+          <p:cNvSpPr/>
+          <p:nvPr/>
+        </p:nvSpPr>
+        <p:spPr>
+          <a:xfrm>
+            <a:off x="566928" y="1885950"/>
+            <a:ext cx="11057839" cy="630000"/>
+          </a:xfrm>
+          <a:prstGeom prst="roundRect">
+            <a:avLst>
+              <a:gd name="adj" fmla="val 9859"/>
+            </a:avLst>
+          </a:prstGeom>
+          <a:solidFill>
+            <a:srgbClr val="24404E"/>
+          </a:solidFill>
+          <a:ln w="12700">
+            <a:solidFill>
+              <a:srgbClr val="24404E"/>
+            </a:solidFill>
+            <a:prstDash val="solid"/>
+          </a:ln>
+        </p:spPr>
+      </p:sp>
+      <p:sp>
+        <p:nvSpPr>
+          <p:cNvPr id="6" name="Shape 4"/>
+          <p:cNvSpPr/>
+          <p:nvPr/>
+        </p:nvSpPr>
+        <p:spPr>
+          <a:xfrm>
+            <a:off x="804672" y="1999782"/>
+            <a:ext cx="402336" cy="402336"/>
+          </a:xfrm>
+          <a:prstGeom prst="ellipse">
+            <a:avLst/>
+          </a:prstGeom>
+          <a:solidFill>
+            <a:srgbClr val="2E7D7D"/>
+          </a:solidFill>
+          <a:ln w="12700">
+            <a:solidFill>
+              <a:srgbClr val="2E7D7D"/>
+            </a:solidFill>
+            <a:prstDash val="solid"/>
+          </a:ln>
+        </p:spPr>
+      </p:sp>
+      <p:sp>
+        <p:nvSpPr>
+          <p:cNvPr id="7" name="Text 5"/>
+          <p:cNvSpPr txBox="1"/>
+          <p:nvPr/>
+        </p:nvSpPr>
+        <p:spPr>
+          <a:xfrm>
+            <a:off x="804672" y="1999782"/>
+            <a:ext cx="402336" cy="402336"/>
+          </a:xfrm>
+          <a:prstGeom prst="rect">
+            <a:avLst/>
+          </a:prstGeom>
+          <a:noFill/>
+          <a:ln/>
+        </p:spPr>
+        <p:txBody>
+          <a:bodyPr wrap="square" lIns="0" tIns="0" rIns="0" bIns="0" rtlCol="0" anchor="ctr"/>
+          <a:lstStyle/>
+          <a:p>
+            <a:pPr algn="ctr" indent="0" marL="0">
+              <a:buNone/>
+            </a:pPr>
+            <a:endParaRPr lang="en-US" sz="1200" dirty="0"/>
+          </a:p>
+        </p:txBody>
+      </p:sp>
+      <p:sp>
+        <p:nvSpPr>
+          <p:cNvPr id="8" name="Text 6"/>
+          <p:cNvSpPr txBox="1"/>
+          <p:nvPr/>
+        </p:nvSpPr>
+        <p:spPr>
+          <a:xfrm>
+            <a:off x="1426464" y="1949490"/>
+            <a:ext cx="9960559" cy="502920"/>
+          </a:xfrm>
+          <a:prstGeom prst="rect">
+            <a:avLst/>
+          </a:prstGeom>
+          <a:noFill/>
+          <a:ln/>
+        </p:spPr>
+        <p:txBody>
+          <a:bodyPr wrap="square" lIns="0" tIns="0" rIns="0" bIns="0" rtlCol="0" anchor="ctr"/>
+          <a:lstStyle/>
+          <a:p>
+            <a:pPr indent="0" marL="0">
+              <a:lnSpc>
+                <a:spcPct val="110000"/>
+              </a:lnSpc>
+              <a:buNone/>
+            </a:pPr>
+            <a:r>
+              <a:rPr lang="en-US" sz="1450" dirty="0">
+                <a:solidFill>
+                  <a:srgbClr val="FFFFFF"/>
+                </a:solidFill>
+                <a:latin typeface="Calibri" pitchFamily="34" charset="0"/>
+                <a:ea typeface="Calibri" pitchFamily="34" charset="-122"/>
+                <a:cs typeface="Calibri" pitchFamily="34" charset="-120"/>
+              </a:rPr>
+              <a:t>La tabla que sacaste de tu documento normativo, con la verificación de las tres celdas marcada. Por correo: S02_ApellidoNombre_Tabla.docx.</a:t>
+            </a:r>
+            <a:endParaRPr lang="en-US" sz="1450" dirty="0"/>
+          </a:p>
+        </p:txBody>
+      </p:sp>
+      <p:sp>
+        <p:nvSpPr>
+          <p:cNvPr id="9" name="Shape 3"/>
+          <p:cNvSpPr/>
+          <p:nvPr/>
+        </p:nvSpPr>
+        <p:spPr>
+          <a:xfrm>
+            <a:off x="566928" y="2600950"/>
+            <a:ext cx="11057839" cy="630000"/>
+          </a:xfrm>
+          <a:prstGeom prst="roundRect">
+            <a:avLst>
+              <a:gd name="adj" fmla="val 9859"/>
+            </a:avLst>
+          </a:prstGeom>
+          <a:solidFill>
+            <a:srgbClr val="24404E"/>
+          </a:solidFill>
+          <a:ln w="12700">
+            <a:solidFill>
+              <a:srgbClr val="24404E"/>
+            </a:solidFill>
+            <a:prstDash val="solid"/>
+          </a:ln>
+        </p:spPr>
+      </p:sp>
+      <p:sp>
+        <p:nvSpPr>
+          <p:cNvPr id="10" name="Shape 4"/>
+          <p:cNvSpPr/>
+          <p:nvPr/>
+        </p:nvSpPr>
+        <p:spPr>
+          <a:xfrm>
+            <a:off x="804672" y="2714782"/>
+            <a:ext cx="402336" cy="402336"/>
+          </a:xfrm>
+          <a:prstGeom prst="ellipse">
+            <a:avLst/>
+          </a:prstGeom>
+          <a:solidFill>
+            <a:srgbClr val="2E7D7D"/>
+          </a:solidFill>
+          <a:ln w="12700">
+            <a:solidFill>
+              <a:srgbClr val="2E7D7D"/>
+            </a:solidFill>
+            <a:prstDash val="solid"/>
+          </a:ln>
+        </p:spPr>
+      </p:sp>
+      <p:sp>
+        <p:nvSpPr>
+          <p:cNvPr id="11" name="Text 5"/>
+          <p:cNvSpPr txBox="1"/>
+          <p:nvPr/>
+        </p:nvSpPr>
+        <p:spPr>
+          <a:xfrm>
+            <a:off x="804672" y="2714782"/>
+            <a:ext cx="402336" cy="402336"/>
+          </a:xfrm>
+          <a:prstGeom prst="rect">
+            <a:avLst/>
+          </a:prstGeom>
+          <a:noFill/>
+          <a:ln/>
+        </p:spPr>
+        <p:txBody>
+          <a:bodyPr wrap="square" lIns="0" tIns="0" rIns="0" bIns="0" rtlCol="0" anchor="ctr"/>
+          <a:lstStyle/>
+          <a:p>
+            <a:pPr algn="ctr" indent="0" marL="0">
+              <a:buNone/>
+            </a:pPr>
+            <a:endParaRPr lang="en-US" sz="1200" dirty="0"/>
+          </a:p>
+        </p:txBody>
+      </p:sp>
+      <p:sp>
+        <p:nvSpPr>
+          <p:cNvPr id="12" name="Text 6"/>
+          <p:cNvSpPr txBox="1"/>
+          <p:nvPr/>
+        </p:nvSpPr>
+        <p:spPr>
+          <a:xfrm>
+            <a:off x="1426464" y="2664490"/>
+            <a:ext cx="9960559" cy="502920"/>
+          </a:xfrm>
+          <a:prstGeom prst="rect">
+            <a:avLst/>
+          </a:prstGeom>
+          <a:noFill/>
+          <a:ln/>
+        </p:spPr>
+        <p:txBody>
+          <a:bodyPr wrap="square" lIns="0" tIns="0" rIns="0" bIns="0" rtlCol="0" anchor="ctr"/>
+          <a:lstStyle/>
+          <a:p>
+            <a:pPr indent="0" marL="0">
+              <a:lnSpc>
+                <a:spcPct val="110000"/>
+              </a:lnSpc>
+              <a:buNone/>
+            </a:pPr>
+            <a:r>
+              <a:rPr lang="en-US" sz="1450" dirty="0">
+                <a:solidFill>
+                  <a:srgbClr val="FFFFFF"/>
+                </a:solidFill>
+                <a:latin typeface="Calibri" pitchFamily="34" charset="0"/>
+                <a:ea typeface="Calibri" pitchFamily="34" charset="-122"/>
+                <a:cs typeface="Calibri" pitchFamily="34" charset="-120"/>
+              </a:rPr>
+              <a:t>Tres prompts en tu biblioteca: el que corregiste en clase y los dos que terminas hoy en casa, cada uno con sus dos versiones.</a:t>
+            </a:r>
+            <a:endParaRPr lang="en-US" sz="1450" dirty="0"/>
+          </a:p>
+        </p:txBody>
+      </p:sp>
+      <p:sp>
+        <p:nvSpPr>
+          <p:cNvPr id="13" name="Shape 3"/>
+          <p:cNvSpPr/>
+          <p:nvPr/>
+        </p:nvSpPr>
+        <p:spPr>
+          <a:xfrm>
+            <a:off x="566928" y="3315950"/>
+            <a:ext cx="11057839" cy="630000"/>
+          </a:xfrm>
+          <a:prstGeom prst="roundRect">
+            <a:avLst>
+              <a:gd name="adj" fmla="val 9859"/>
+            </a:avLst>
+          </a:prstGeom>
+          <a:solidFill>
+            <a:srgbClr val="24404E"/>
+          </a:solidFill>
+          <a:ln w="12700">
+            <a:solidFill>
+              <a:srgbClr val="24404E"/>
+            </a:solidFill>
+            <a:prstDash val="solid"/>
+          </a:ln>
+        </p:spPr>
+      </p:sp>
+      <p:sp>
+        <p:nvSpPr>
+          <p:cNvPr id="14" name="Shape 4"/>
+          <p:cNvSpPr/>
+          <p:nvPr/>
+        </p:nvSpPr>
+        <p:spPr>
+          <a:xfrm>
+            <a:off x="804672" y="3429782"/>
+            <a:ext cx="402336" cy="402336"/>
+          </a:xfrm>
+          <a:prstGeom prst="ellipse">
+            <a:avLst/>
+          </a:prstGeom>
+          <a:solidFill>
+            <a:srgbClr val="2E7D7D"/>
+          </a:solidFill>
+          <a:ln w="12700">
+            <a:solidFill>
+              <a:srgbClr val="2E7D7D"/>
+            </a:solidFill>
+            <a:prstDash val="solid"/>
+          </a:ln>
+        </p:spPr>
+      </p:sp>
+      <p:sp>
+        <p:nvSpPr>
+          <p:cNvPr id="15" name="Text 5"/>
+          <p:cNvSpPr txBox="1"/>
+          <p:nvPr/>
+        </p:nvSpPr>
+        <p:spPr>
+          <a:xfrm>
+            <a:off x="804672" y="3429782"/>
+            <a:ext cx="402336" cy="402336"/>
+          </a:xfrm>
+          <a:prstGeom prst="rect">
+            <a:avLst/>
+          </a:prstGeom>
+          <a:noFill/>
+          <a:ln/>
+        </p:spPr>
+        <p:txBody>
+          <a:bodyPr wrap="square" lIns="0" tIns="0" rIns="0" bIns="0" rtlCol="0" anchor="ctr"/>
+          <a:lstStyle/>
+          <a:p>
+            <a:pPr algn="ctr" indent="0" marL="0">
+              <a:buNone/>
+            </a:pPr>
+            <a:endParaRPr lang="en-US" sz="1200" dirty="0"/>
+          </a:p>
+        </p:txBody>
+      </p:sp>
+      <p:sp>
+        <p:nvSpPr>
+          <p:cNvPr id="16" name="Text 6"/>
+          <p:cNvSpPr txBox="1"/>
+          <p:nvPr/>
+        </p:nvSpPr>
+        <p:spPr>
+          <a:xfrm>
+            <a:off x="1426464" y="3379490"/>
+            <a:ext cx="9960559" cy="502920"/>
+          </a:xfrm>
+          <a:prstGeom prst="rect">
+            <a:avLst/>
+          </a:prstGeom>
+          <a:noFill/>
+          <a:ln/>
+        </p:spPr>
+        <p:txBody>
+          <a:bodyPr wrap="square" lIns="0" tIns="0" rIns="0" bIns="0" rtlCol="0" anchor="ctr"/>
+          <a:lstStyle/>
+          <a:p>
+            <a:pPr indent="0" marL="0">
+              <a:lnSpc>
+                <a:spcPct val="110000"/>
+              </a:lnSpc>
+              <a:buNone/>
+            </a:pPr>
+            <a:r>
+              <a:rPr lang="en-US" sz="1450" dirty="0">
+                <a:solidFill>
+                  <a:srgbClr val="FFFFFF"/>
+                </a:solidFill>
+                <a:latin typeface="Calibri" pitchFamily="34" charset="0"/>
+                <a:ea typeface="Calibri" pitchFamily="34" charset="-122"/>
+                <a:cs typeface="Calibri" pitchFamily="34" charset="-120"/>
+              </a:rPr>
+              <a:t>Tu bitácora al día, con los errores que encontraste en el hilo de correo. La transcripción de la reunión queda de práctica en casa.</a:t>
+            </a:r>
+            <a:endParaRPr lang="en-US" sz="1450" dirty="0"/>
+          </a:p>
+        </p:txBody>
+      </p:sp>
+      <p:sp>
+        <p:nvSpPr>
+          <p:cNvPr id="17" name="Shape 3"/>
+          <p:cNvSpPr/>
+          <p:nvPr/>
+        </p:nvSpPr>
+        <p:spPr>
+          <a:xfrm>
+            <a:off x="566928" y="4030950"/>
+            <a:ext cx="11057839" cy="630000"/>
+          </a:xfrm>
+          <a:prstGeom prst="roundRect">
+            <a:avLst>
+              <a:gd name="adj" fmla="val 9859"/>
+            </a:avLst>
+          </a:prstGeom>
+          <a:solidFill>
+            <a:srgbClr val="24404E"/>
+          </a:solidFill>
+          <a:ln w="12700">
+            <a:solidFill>
+              <a:srgbClr val="24404E"/>
+            </a:solidFill>
+            <a:prstDash val="solid"/>
+          </a:ln>
+        </p:spPr>
+      </p:sp>
+      <p:sp>
+        <p:nvSpPr>
+          <p:cNvPr id="18" name="Shape 4"/>
+          <p:cNvSpPr/>
+          <p:nvPr/>
+        </p:nvSpPr>
+        <p:spPr>
+          <a:xfrm>
+            <a:off x="804672" y="4144782"/>
+            <a:ext cx="402336" cy="402336"/>
+          </a:xfrm>
+          <a:prstGeom prst="ellipse">
+            <a:avLst/>
+          </a:prstGeom>
+          <a:solidFill>
+            <a:srgbClr val="2E7D7D"/>
+          </a:solidFill>
+          <a:ln w="12700">
+            <a:solidFill>
+              <a:srgbClr val="2E7D7D"/>
+            </a:solidFill>
+            <a:prstDash val="solid"/>
+          </a:ln>
+        </p:spPr>
+      </p:sp>
+      <p:sp>
+        <p:nvSpPr>
+          <p:cNvPr id="19" name="Text 5"/>
+          <p:cNvSpPr txBox="1"/>
+          <p:nvPr/>
+        </p:nvSpPr>
+        <p:spPr>
+          <a:xfrm>
+            <a:off x="804672" y="4144782"/>
+            <a:ext cx="402336" cy="402336"/>
+          </a:xfrm>
+          <a:prstGeom prst="rect">
+            <a:avLst/>
+          </a:prstGeom>
+          <a:noFill/>
+          <a:ln/>
+        </p:spPr>
+        <p:txBody>
+          <a:bodyPr wrap="square" lIns="0" tIns="0" rIns="0" bIns="0" rtlCol="0" anchor="ctr"/>
+          <a:lstStyle/>
+          <a:p>
+            <a:pPr algn="ctr" indent="0" marL="0">
+              <a:buNone/>
+            </a:pPr>
+            <a:endParaRPr lang="en-US" sz="1200" dirty="0"/>
+          </a:p>
+        </p:txBody>
+      </p:sp>
+      <p:sp>
+        <p:nvSpPr>
+          <p:cNvPr id="20" name="Text 6"/>
+          <p:cNvSpPr txBox="1"/>
+          <p:nvPr/>
+        </p:nvSpPr>
+        <p:spPr>
+          <a:xfrm>
+            <a:off x="1426464" y="4094490"/>
+            <a:ext cx="9960559" cy="502920"/>
+          </a:xfrm>
+          <a:prstGeom prst="rect">
+            <a:avLst/>
+          </a:prstGeom>
+          <a:noFill/>
+          <a:ln/>
+        </p:spPr>
+        <p:txBody>
+          <a:bodyPr wrap="square" lIns="0" tIns="0" rIns="0" bIns="0" rtlCol="0" anchor="ctr"/>
+          <a:lstStyle/>
+          <a:p>
+            <a:pPr indent="0" marL="0">
+              <a:lnSpc>
+                <a:spcPct val="110000"/>
+              </a:lnSpc>
+              <a:buNone/>
+            </a:pPr>
+            <a:r>
+              <a:rPr lang="en-US" sz="1450" dirty="0">
+                <a:solidFill>
+                  <a:srgbClr val="FFFFFF"/>
+                </a:solidFill>
+                <a:latin typeface="Calibri" pitchFamily="34" charset="0"/>
+                <a:ea typeface="Calibri" pitchFamily="34" charset="-122"/>
+                <a:cs typeface="Calibri" pitchFamily="34" charset="-120"/>
+              </a:rPr>
+              <a:t>Pendiente de ayer: tu ficha de idoneidad se entrega el jueves antes de las 9:00, como S01_ApellidoNombre_FichaIdoneidad.docx.</a:t>
+            </a:r>
+            <a:endParaRPr lang="en-US" sz="1450" dirty="0"/>
+          </a:p>
+        </p:txBody>
+      </p:sp>
+      <p:sp>
+        <p:nvSpPr>
+          <p:cNvPr id="21" name="Shape 3"/>
+          <p:cNvSpPr/>
+          <p:nvPr/>
+        </p:nvSpPr>
+        <p:spPr>
+          <a:xfrm>
+            <a:off x="566928" y="4745950"/>
+            <a:ext cx="11057839" cy="630000"/>
+          </a:xfrm>
+          <a:prstGeom prst="roundRect">
+            <a:avLst>
+              <a:gd name="adj" fmla="val 9859"/>
+            </a:avLst>
+          </a:prstGeom>
+          <a:solidFill>
+            <a:srgbClr val="24404E"/>
+          </a:solidFill>
+          <a:ln w="12700">
+            <a:solidFill>
+              <a:srgbClr val="24404E"/>
+            </a:solidFill>
+            <a:prstDash val="solid"/>
+          </a:ln>
+        </p:spPr>
+      </p:sp>
+      <p:sp>
+        <p:nvSpPr>
+          <p:cNvPr id="22" name="Shape 4"/>
+          <p:cNvSpPr/>
+          <p:nvPr/>
+        </p:nvSpPr>
+        <p:spPr>
+          <a:xfrm>
+            <a:off x="804672" y="4859782"/>
+            <a:ext cx="402336" cy="402336"/>
+          </a:xfrm>
+          <a:prstGeom prst="ellipse">
+            <a:avLst/>
+          </a:prstGeom>
+          <a:solidFill>
+            <a:srgbClr val="2E7D7D"/>
+          </a:solidFill>
+          <a:ln w="12700">
+            <a:solidFill>
+              <a:srgbClr val="2E7D7D"/>
+            </a:solidFill>
+            <a:prstDash val="solid"/>
+          </a:ln>
+        </p:spPr>
+      </p:sp>
+      <p:sp>
+        <p:nvSpPr>
+          <p:cNvPr id="23" name="Text 5"/>
+          <p:cNvSpPr txBox="1"/>
+          <p:nvPr/>
+        </p:nvSpPr>
+        <p:spPr>
+          <a:xfrm>
+            <a:off x="804672" y="4859782"/>
+            <a:ext cx="402336" cy="402336"/>
+          </a:xfrm>
+          <a:prstGeom prst="rect">
+            <a:avLst/>
+          </a:prstGeom>
+          <a:noFill/>
+          <a:ln/>
+        </p:spPr>
+        <p:txBody>
+          <a:bodyPr wrap="square" lIns="0" tIns="0" rIns="0" bIns="0" rtlCol="0" anchor="ctr"/>
+          <a:lstStyle/>
+          <a:p>
+            <a:pPr algn="ctr" indent="0" marL="0">
+              <a:buNone/>
+            </a:pPr>
+            <a:endParaRPr lang="en-US" sz="1200" dirty="0"/>
+          </a:p>
+        </p:txBody>
+      </p:sp>
+      <p:sp>
+        <p:nvSpPr>
+          <p:cNvPr id="24" name="Text 6"/>
+          <p:cNvSpPr txBox="1"/>
+          <p:nvPr/>
+        </p:nvSpPr>
+        <p:spPr>
+          <a:xfrm>
+            <a:off x="1426464" y="4809490"/>
+            <a:ext cx="9960559" cy="502920"/>
+          </a:xfrm>
+          <a:prstGeom prst="rect">
+            <a:avLst/>
+          </a:prstGeom>
+          <a:noFill/>
+          <a:ln/>
+        </p:spPr>
+        <p:txBody>
+          <a:bodyPr wrap="square" lIns="0" tIns="0" rIns="0" bIns="0" rtlCol="0" anchor="ctr"/>
+          <a:lstStyle/>
+          <a:p>
+            <a:pPr indent="0" marL="0">
+              <a:lnSpc>
+                <a:spcPct val="110000"/>
+              </a:lnSpc>
+              <a:buNone/>
+            </a:pPr>
+            <a:r>
+              <a:rPr lang="en-US" sz="1450" dirty="0">
+                <a:solidFill>
+                  <a:srgbClr val="FFFFFF"/>
+                </a:solidFill>
+                <a:latin typeface="Calibri" pitchFamily="34" charset="0"/>
+                <a:ea typeface="Calibri" pitchFamily="34" charset="-122"/>
+                <a:cs typeface="Calibri" pitchFamily="34" charset="-120"/>
+              </a:rPr>
+              <a:t>Los equipos quedaron formados hoy. El jueves se trabaja en equipo desde el primer minuto, así que llega puntual.</a:t>
+            </a:r>
+            <a:endParaRPr lang="en-US" sz="1450" dirty="0"/>
+          </a:p>
+        </p:txBody>
+      </p:sp>
+      <p:sp>
+        <p:nvSpPr>
+          <p:cNvPr id="25" name="Shape 3"/>
+          <p:cNvSpPr/>
+          <p:nvPr/>
+        </p:nvSpPr>
+        <p:spPr>
+          <a:xfrm>
+            <a:off x="566928" y="5460950"/>
+            <a:ext cx="11057839" cy="630000"/>
+          </a:xfrm>
+          <a:prstGeom prst="roundRect">
+            <a:avLst>
+              <a:gd name="adj" fmla="val 9859"/>
+            </a:avLst>
+          </a:prstGeom>
+          <a:solidFill>
+            <a:srgbClr val="24404E"/>
+          </a:solidFill>
+          <a:ln w="12700">
+            <a:solidFill>
+              <a:srgbClr val="24404E"/>
+            </a:solidFill>
+            <a:prstDash val="solid"/>
+          </a:ln>
+        </p:spPr>
+      </p:sp>
+      <p:sp>
+        <p:nvSpPr>
+          <p:cNvPr id="26" name="Shape 4"/>
+          <p:cNvSpPr/>
+          <p:nvPr/>
+        </p:nvSpPr>
+        <p:spPr>
+          <a:xfrm>
+            <a:off x="804672" y="5574782"/>
+            <a:ext cx="402336" cy="402336"/>
+          </a:xfrm>
+          <a:prstGeom prst="ellipse">
+            <a:avLst/>
+          </a:prstGeom>
+          <a:solidFill>
+            <a:srgbClr val="2E7D7D"/>
+          </a:solidFill>
+          <a:ln w="12700">
+            <a:solidFill>
+              <a:srgbClr val="2E7D7D"/>
+            </a:solidFill>
+            <a:prstDash val="solid"/>
+          </a:ln>
+        </p:spPr>
+      </p:sp>
+      <p:sp>
+        <p:nvSpPr>
+          <p:cNvPr id="27" name="Text 5"/>
+          <p:cNvSpPr txBox="1"/>
+          <p:nvPr/>
+        </p:nvSpPr>
+        <p:spPr>
+          <a:xfrm>
+            <a:off x="804672" y="5574782"/>
+            <a:ext cx="402336" cy="402336"/>
+          </a:xfrm>
+          <a:prstGeom prst="rect">
+            <a:avLst/>
+          </a:prstGeom>
+          <a:noFill/>
+          <a:ln/>
+        </p:spPr>
+        <p:txBody>
+          <a:bodyPr wrap="square" lIns="0" tIns="0" rIns="0" bIns="0" rtlCol="0" anchor="ctr"/>
+          <a:lstStyle/>
+          <a:p>
+            <a:pPr algn="ctr" indent="0" marL="0">
+              <a:buNone/>
+            </a:pPr>
+            <a:endParaRPr lang="en-US" sz="1200" dirty="0"/>
+          </a:p>
+        </p:txBody>
+      </p:sp>
+      <p:sp>
+        <p:nvSpPr>
+          <p:cNvPr id="28" name="Text 6"/>
+          <p:cNvSpPr txBox="1"/>
+          <p:nvPr/>
+        </p:nvSpPr>
+        <p:spPr>
+          <a:xfrm>
+            <a:off x="1426464" y="5524490"/>
+            <a:ext cx="9960559" cy="502920"/>
+          </a:xfrm>
+          <a:prstGeom prst="rect">
+            <a:avLst/>
+          </a:prstGeom>
+          <a:noFill/>
+          <a:ln/>
+        </p:spPr>
+        <p:txBody>
+          <a:bodyPr wrap="square" lIns="0" tIns="0" rIns="0" bIns="0" rtlCol="0" anchor="ctr"/>
+          <a:lstStyle/>
+          <a:p>
+            <a:pPr indent="0" marL="0">
+              <a:lnSpc>
+                <a:spcPct val="110000"/>
+              </a:lnSpc>
+              <a:buNone/>
+            </a:pPr>
+            <a:r>
+              <a:rPr lang="en-US" sz="1450" dirty="0">
+                <a:solidFill>
+                  <a:srgbClr val="FFFFFF"/>
+                </a:solidFill>
+                <a:latin typeface="Calibri" pitchFamily="34" charset="0"/>
+                <a:ea typeface="Calibri" pitchFamily="34" charset="-122"/>
+                <a:cs typeface="Calibri" pitchFamily="34" charset="-120"/>
+              </a:rPr>
+              <a:t>El material de cada sesión está en github.com/xuxoramos/curso-inegi-gen-ai. Y no actives todavía la prueba de Elicit: se usa el lunes 21.</a:t>
+            </a:r>
+            <a:endParaRPr lang="en-US" sz="1450" dirty="0"/>
+          </a:p>
+        </p:txBody>
+      </p:sp>
+      <p:sp>
+        <p:nvSpPr>
+          <p:cNvPr id="29" name="Text 23"/>
+          <p:cNvSpPr txBox="1"/>
+          <p:nvPr/>
+        </p:nvSpPr>
+        <p:spPr>
+          <a:xfrm>
+            <a:off x="566928" y="6172200"/>
+            <a:ext cx="11057839" cy="411480"/>
+          </a:xfrm>
+          <a:prstGeom prst="rect">
+            <a:avLst/>
+          </a:prstGeom>
+          <a:noFill/>
+          <a:ln/>
+        </p:spPr>
+        <p:txBody>
+          <a:bodyPr wrap="square" lIns="0" tIns="0" rIns="0" bIns="0" rtlCol="0" anchor="ctr"/>
+          <a:lstStyle/>
+          <a:p>
+            <a:pPr indent="0" marL="0">
+              <a:buNone/>
+            </a:pPr>
+            <a:r>
+              <a:rPr lang="en-US" sz="1300" i="1" dirty="0">
+                <a:solidFill>
+                  <a:srgbClr val="D7E7E7"/>
+                </a:solidFill>
+                <a:latin typeface="Calibri" pitchFamily="34" charset="0"/>
+                <a:ea typeface="Calibri" pitchFamily="34" charset="-122"/>
+                <a:cs typeface="Calibri" pitchFamily="34" charset="-120"/>
+              </a:rPr>
+              <a:t>Sesión 3, jueves 17 de septiembre: cómo detectar errores y el Laboratorio Práctico 1.</a:t>
+            </a:r>
+            <a:endParaRPr lang="en-US" sz="1300" dirty="0"/>
+          </a:p>
+        </p:txBody>
+      </p:sp>
+    </p:spTree>
+  </p:cSld>
+  <p:clrMapOvr>
+    <a:masterClrMapping/>
+  </p:clrMapOvr>
+</p:sld>
+</file>
+
+<file path=ppt/slides/slide23.xml><?xml version="1.0" encoding="utf-8"?>
+<p:sld xmlns:a="http://schemas.openxmlformats.org/drawingml/2006/main" xmlns:r="http://schemas.openxmlformats.org/officeDocument/2006/relationships" xmlns:p="http://schemas.openxmlformats.org/presentationml/2006/main">
+  <p:cSld name="Mapa completo">
+    <p:spTree>
+      <p:nvGrpSpPr>
         <p:cNvPr id="1" name=""/>
         <p:cNvGrpSpPr/>
         <p:nvPr/>
@@ -9887,17 +10769,2897 @@
       </p:grpSpPr>
       <p:sp>
         <p:nvSpPr>
-          <p:cNvPr id="2" name="Shape 0"/>
+          <p:cNvPr id="2" name="Text"/>
+          <p:cNvSpPr txBox="1"/>
+          <p:nvPr/>
+        </p:nvSpPr>
+        <p:spPr>
+          <a:xfrm>
+            <a:off x="566928" y="402336"/>
+            <a:ext cx="11057839" cy="749808"/>
+          </a:xfrm>
+          <a:prstGeom prst="rect">
+            <a:avLst/>
+          </a:prstGeom>
+          <a:noFill/>
+          <a:ln/>
+        </p:spPr>
+        <p:txBody>
+          <a:bodyPr wrap="square" lIns="0" tIns="0" rIns="0" bIns="0" rtlCol="0" anchor="t"/>
+          <a:lstStyle/>
+          <a:p>
+            <a:pPr algn="l" indent="0" marL="0">
+              <a:buNone/>
+            </a:pPr>
+            <a:r>
+              <a:rPr lang="en-US" sz="3200" b="1" dirty="0">
+                <a:solidFill>
+                  <a:srgbClr val="16262E"/>
+                </a:solidFill>
+                <a:latin typeface="Arial" pitchFamily="34" charset="0"/>
+                <a:ea typeface="Arial" pitchFamily="34" charset="-122"/>
+                <a:cs typeface="Arial" pitchFamily="34" charset="-120"/>
+              </a:rPr>
+              <a:t>El mapa de ayer, ahora con apellidos</a:t>
+            </a:r>
+            <a:endParaRPr lang="en-US" sz="3200" dirty="0"/>
+          </a:p>
+        </p:txBody>
+      </p:sp>
+      <p:sp>
+        <p:nvSpPr>
+          <p:cNvPr id="3" name="Text"/>
+          <p:cNvSpPr txBox="1"/>
+          <p:nvPr/>
+        </p:nvSpPr>
+        <p:spPr>
+          <a:xfrm>
+            <a:off x="566928" y="1280160"/>
+            <a:ext cx="11057839" cy="731520"/>
+          </a:xfrm>
+          <a:prstGeom prst="rect">
+            <a:avLst/>
+          </a:prstGeom>
+          <a:noFill/>
+          <a:ln/>
+        </p:spPr>
+        <p:txBody>
+          <a:bodyPr wrap="square" lIns="0" tIns="0" rIns="0" bIns="0" rtlCol="0" anchor="t"/>
+          <a:lstStyle/>
+          <a:p>
+            <a:pPr indent="0" marL="0">
+              <a:buNone/>
+            </a:pPr>
+            <a:r>
+              <a:rPr lang="en-US" sz="1500" dirty="0">
+                <a:solidFill>
+                  <a:srgbClr val="5A6B73"/>
+                </a:solidFill>
+                <a:latin typeface="Calibri" pitchFamily="34" charset="0"/>
+                <a:ea typeface="Calibri" pitchFamily="34" charset="-122"/>
+                <a:cs typeface="Calibri" pitchFamily="34" charset="-120"/>
+              </a:rPr>
+              <a:t>Son subconjuntos, no sinónimos: cada anillo vive dentro del anterior. En el receso de hoy, la versión extendida para quien la quiera.</a:t>
+            </a:r>
+            <a:endParaRPr lang="en-US" sz="1500" dirty="0"/>
+          </a:p>
+        </p:txBody>
+      </p:sp>
+      <p:sp>
+        <p:nvSpPr>
+          <p:cNvPr id="4" name="Shape"/>
           <p:cNvSpPr/>
           <p:nvPr/>
         </p:nvSpPr>
         <p:spPr>
           <a:xfrm>
-            <a:off x="-1737360" y="3931920"/>
-            <a:ext cx="4754880" cy="4754880"/>
+            <a:off x="566928" y="2011680"/>
+            <a:ext cx="2558720" cy="2700000"/>
+          </a:xfrm>
+          <a:prstGeom prst="roundRect">
+            <a:avLst>
+              <a:gd name="adj" fmla="val 2998"/>
+            </a:avLst>
+          </a:prstGeom>
+          <a:solidFill>
+            <a:srgbClr val="F2F5F6"/>
+          </a:solidFill>
+          <a:ln w="12700">
+            <a:solidFill>
+              <a:srgbClr val="F2F5F6"/>
+            </a:solidFill>
+            <a:prstDash val="solid"/>
+          </a:ln>
+        </p:spPr>
+      </p:sp>
+      <p:sp>
+        <p:nvSpPr>
+          <p:cNvPr id="5" name="Text"/>
+          <p:cNvSpPr txBox="1"/>
+          <p:nvPr/>
+        </p:nvSpPr>
+        <p:spPr>
+          <a:xfrm>
+            <a:off x="804672" y="2249424"/>
+            <a:ext cx="2083232" cy="583184"/>
+          </a:xfrm>
+          <a:prstGeom prst="rect">
+            <a:avLst/>
+          </a:prstGeom>
+          <a:noFill/>
+          <a:ln/>
+        </p:spPr>
+        <p:txBody>
+          <a:bodyPr wrap="square" lIns="0" tIns="0" rIns="0" bIns="0" rtlCol="0" anchor="t"/>
+          <a:lstStyle/>
+          <a:p>
+            <a:pPr indent="0" marL="0">
+              <a:buNone/>
+            </a:pPr>
+            <a:r>
+              <a:rPr lang="en-US" sz="1600" b="1" dirty="0">
+                <a:solidFill>
+                  <a:srgbClr val="16262E"/>
+                </a:solidFill>
+                <a:latin typeface="Arial" pitchFamily="34" charset="0"/>
+                <a:ea typeface="Arial" pitchFamily="34" charset="-122"/>
+                <a:cs typeface="Arial" pitchFamily="34" charset="-120"/>
+              </a:rPr>
+              <a:t>Inteligencia artificial</a:t>
+            </a:r>
+            <a:endParaRPr lang="en-US" sz="1600" dirty="0"/>
+          </a:p>
+        </p:txBody>
+      </p:sp>
+      <p:sp>
+        <p:nvSpPr>
+          <p:cNvPr id="6" name="Text"/>
+          <p:cNvSpPr txBox="1"/>
+          <p:nvPr/>
+        </p:nvSpPr>
+        <p:spPr>
+          <a:xfrm>
+            <a:off x="804672" y="2978912"/>
+            <a:ext cx="2083232" cy="1531776"/>
+          </a:xfrm>
+          <a:prstGeom prst="rect">
+            <a:avLst/>
+          </a:prstGeom>
+          <a:noFill/>
+          <a:ln/>
+        </p:spPr>
+        <p:txBody>
+          <a:bodyPr wrap="square" lIns="0" tIns="0" rIns="0" bIns="0" rtlCol="0" anchor="t"/>
+          <a:lstStyle/>
+          <a:p>
+            <a:pPr indent="0" marL="0">
+              <a:lnSpc>
+                <a:spcPct val="110000"/>
+              </a:lnSpc>
+              <a:buNone/>
+            </a:pPr>
+            <a:r>
+              <a:rPr lang="en-US" sz="1300" dirty="0">
+                <a:solidFill>
+                  <a:srgbClr val="16262E"/>
+                </a:solidFill>
+                <a:latin typeface="Calibri" pitchFamily="34" charset="0"/>
+                <a:ea typeface="Calibri" pitchFamily="34" charset="-122"/>
+                <a:cs typeface="Calibri" pitchFamily="34" charset="-120"/>
+              </a:rPr>
+              <a:t>Todo programa que hace algo que creíamos propio de la inteligencia humana. Incluye lo viejo: reglas escritas a mano, búsqueda, sistemas expertos.</a:t>
+            </a:r>
+            <a:endParaRPr lang="en-US" sz="1300" dirty="0"/>
+          </a:p>
+        </p:txBody>
+      </p:sp>
+      <p:sp>
+        <p:nvSpPr>
+          <p:cNvPr id="7" name="Shape"/>
+          <p:cNvSpPr/>
+          <p:nvPr/>
+        </p:nvSpPr>
+        <p:spPr>
+          <a:xfrm>
+            <a:off x="3399968" y="2011680"/>
+            <a:ext cx="2558720" cy="2700000"/>
+          </a:xfrm>
+          <a:prstGeom prst="roundRect">
+            <a:avLst>
+              <a:gd name="adj" fmla="val 2998"/>
+            </a:avLst>
+          </a:prstGeom>
+          <a:solidFill>
+            <a:srgbClr val="F2F5F6"/>
+          </a:solidFill>
+          <a:ln w="12700">
+            <a:solidFill>
+              <a:srgbClr val="F2F5F6"/>
+            </a:solidFill>
+            <a:prstDash val="solid"/>
+          </a:ln>
+        </p:spPr>
+      </p:sp>
+      <p:sp>
+        <p:nvSpPr>
+          <p:cNvPr id="8" name="Text"/>
+          <p:cNvSpPr txBox="1"/>
+          <p:nvPr/>
+        </p:nvSpPr>
+        <p:spPr>
+          <a:xfrm>
+            <a:off x="3637712" y="2249424"/>
+            <a:ext cx="2083232" cy="583184"/>
+          </a:xfrm>
+          <a:prstGeom prst="rect">
+            <a:avLst/>
+          </a:prstGeom>
+          <a:noFill/>
+          <a:ln/>
+        </p:spPr>
+        <p:txBody>
+          <a:bodyPr wrap="square" lIns="0" tIns="0" rIns="0" bIns="0" rtlCol="0" anchor="t"/>
+          <a:lstStyle/>
+          <a:p>
+            <a:pPr indent="0" marL="0">
+              <a:buNone/>
+            </a:pPr>
+            <a:r>
+              <a:rPr lang="en-US" sz="1600" b="1" dirty="0">
+                <a:solidFill>
+                  <a:srgbClr val="16262E"/>
+                </a:solidFill>
+                <a:latin typeface="Arial" pitchFamily="34" charset="0"/>
+                <a:ea typeface="Arial" pitchFamily="34" charset="-122"/>
+                <a:cs typeface="Arial" pitchFamily="34" charset="-120"/>
+              </a:rPr>
+              <a:t>Aprendizaje automático</a:t>
+            </a:r>
+            <a:endParaRPr lang="en-US" sz="1600" dirty="0"/>
+          </a:p>
+        </p:txBody>
+      </p:sp>
+      <p:sp>
+        <p:nvSpPr>
+          <p:cNvPr id="9" name="Text"/>
+          <p:cNvSpPr txBox="1"/>
+          <p:nvPr/>
+        </p:nvSpPr>
+        <p:spPr>
+          <a:xfrm>
+            <a:off x="3637712" y="2978912"/>
+            <a:ext cx="2083232" cy="1531776"/>
+          </a:xfrm>
+          <a:prstGeom prst="rect">
+            <a:avLst/>
+          </a:prstGeom>
+          <a:noFill/>
+          <a:ln/>
+        </p:spPr>
+        <p:txBody>
+          <a:bodyPr wrap="square" lIns="0" tIns="0" rIns="0" bIns="0" rtlCol="0" anchor="t"/>
+          <a:lstStyle/>
+          <a:p>
+            <a:pPr indent="0" marL="0">
+              <a:lnSpc>
+                <a:spcPct val="110000"/>
+              </a:lnSpc>
+              <a:buNone/>
+            </a:pPr>
+            <a:r>
+              <a:rPr lang="en-US" sz="1300" dirty="0">
+                <a:solidFill>
+                  <a:srgbClr val="16262E"/>
+                </a:solidFill>
+                <a:latin typeface="Calibri" pitchFamily="34" charset="0"/>
+                <a:ea typeface="Calibri" pitchFamily="34" charset="-122"/>
+                <a:cs typeface="Calibri" pitchFamily="34" charset="-120"/>
+              </a:rPr>
+              <a:t>Programas que aprenden de los datos en lugar de seguir reglas escritas. Tus regresiones y clasificadores viven aquí. Su teoría viene de la estadística.</a:t>
+            </a:r>
+            <a:endParaRPr lang="en-US" sz="1300" dirty="0"/>
+          </a:p>
+        </p:txBody>
+      </p:sp>
+      <p:sp>
+        <p:nvSpPr>
+          <p:cNvPr id="10" name="Shape"/>
+          <p:cNvSpPr/>
+          <p:nvPr/>
+        </p:nvSpPr>
+        <p:spPr>
+          <a:xfrm>
+            <a:off x="6233008" y="2011680"/>
+            <a:ext cx="2558720" cy="2700000"/>
+          </a:xfrm>
+          <a:prstGeom prst="roundRect">
+            <a:avLst>
+              <a:gd name="adj" fmla="val 2998"/>
+            </a:avLst>
+          </a:prstGeom>
+          <a:solidFill>
+            <a:srgbClr val="F7E4D8"/>
+          </a:solidFill>
+          <a:ln w="12700">
+            <a:solidFill>
+              <a:srgbClr val="F7E4D8"/>
+            </a:solidFill>
+            <a:prstDash val="solid"/>
+          </a:ln>
+        </p:spPr>
+      </p:sp>
+      <p:sp>
+        <p:nvSpPr>
+          <p:cNvPr id="11" name="Text"/>
+          <p:cNvSpPr txBox="1"/>
+          <p:nvPr/>
+        </p:nvSpPr>
+        <p:spPr>
+          <a:xfrm>
+            <a:off x="6470752" y="2249424"/>
+            <a:ext cx="2083232" cy="583184"/>
+          </a:xfrm>
+          <a:prstGeom prst="rect">
+            <a:avLst/>
+          </a:prstGeom>
+          <a:noFill/>
+          <a:ln/>
+        </p:spPr>
+        <p:txBody>
+          <a:bodyPr wrap="square" lIns="0" tIns="0" rIns="0" bIns="0" rtlCol="0" anchor="t"/>
+          <a:lstStyle/>
+          <a:p>
+            <a:pPr indent="0" marL="0">
+              <a:buNone/>
+            </a:pPr>
+            <a:r>
+              <a:rPr lang="en-US" sz="1600" b="1" dirty="0">
+                <a:solidFill>
+                  <a:srgbClr val="16262E"/>
+                </a:solidFill>
+                <a:latin typeface="Arial" pitchFamily="34" charset="0"/>
+                <a:ea typeface="Arial" pitchFamily="34" charset="-122"/>
+                <a:cs typeface="Arial" pitchFamily="34" charset="-120"/>
+              </a:rPr>
+              <a:t>Aprendizaje profundo</a:t>
+            </a:r>
+            <a:endParaRPr lang="en-US" sz="1600" dirty="0"/>
+          </a:p>
+        </p:txBody>
+      </p:sp>
+      <p:sp>
+        <p:nvSpPr>
+          <p:cNvPr id="12" name="Text"/>
+          <p:cNvSpPr txBox="1"/>
+          <p:nvPr/>
+        </p:nvSpPr>
+        <p:spPr>
+          <a:xfrm>
+            <a:off x="6470752" y="2978912"/>
+            <a:ext cx="2083232" cy="1531776"/>
+          </a:xfrm>
+          <a:prstGeom prst="rect">
+            <a:avLst/>
+          </a:prstGeom>
+          <a:noFill/>
+          <a:ln/>
+        </p:spPr>
+        <p:txBody>
+          <a:bodyPr wrap="square" lIns="0" tIns="0" rIns="0" bIns="0" rtlCol="0" anchor="t"/>
+          <a:lstStyle/>
+          <a:p>
+            <a:pPr indent="0" marL="0">
+              <a:lnSpc>
+                <a:spcPct val="110000"/>
+              </a:lnSpc>
+              <a:buNone/>
+            </a:pPr>
+            <a:r>
+              <a:rPr lang="en-US" sz="1300" dirty="0">
+                <a:solidFill>
+                  <a:srgbClr val="16262E"/>
+                </a:solidFill>
+                <a:latin typeface="Calibri" pitchFamily="34" charset="0"/>
+                <a:ea typeface="Calibri" pitchFamily="34" charset="-122"/>
+                <a:cs typeface="Calibri" pitchFamily="34" charset="-120"/>
+              </a:rPr>
+              <a:t>Aprendizaje automático con redes neuronales de muchas capas. Hay una familia por cada forma del dato: tabla, imagen, secuencia, lenguaje.</a:t>
+            </a:r>
+            <a:endParaRPr lang="en-US" sz="1300" dirty="0"/>
+          </a:p>
+        </p:txBody>
+      </p:sp>
+      <p:sp>
+        <p:nvSpPr>
+          <p:cNvPr id="13" name="Shape"/>
+          <p:cNvSpPr/>
+          <p:nvPr/>
+        </p:nvSpPr>
+        <p:spPr>
+          <a:xfrm>
+            <a:off x="9066047" y="2011680"/>
+            <a:ext cx="2558720" cy="2700000"/>
+          </a:xfrm>
+          <a:prstGeom prst="roundRect">
+            <a:avLst>
+              <a:gd name="adj" fmla="val 2998"/>
+            </a:avLst>
+          </a:prstGeom>
+          <a:solidFill>
+            <a:srgbClr val="F7E4D8"/>
+          </a:solidFill>
+          <a:ln w="12700">
+            <a:solidFill>
+              <a:srgbClr val="F7E4D8"/>
+            </a:solidFill>
+            <a:prstDash val="solid"/>
+          </a:ln>
+        </p:spPr>
+      </p:sp>
+      <p:sp>
+        <p:nvSpPr>
+          <p:cNvPr id="14" name="Text"/>
+          <p:cNvSpPr txBox="1"/>
+          <p:nvPr/>
+        </p:nvSpPr>
+        <p:spPr>
+          <a:xfrm>
+            <a:off x="9303791" y="2249424"/>
+            <a:ext cx="2083232" cy="583184"/>
+          </a:xfrm>
+          <a:prstGeom prst="rect">
+            <a:avLst/>
+          </a:prstGeom>
+          <a:noFill/>
+          <a:ln/>
+        </p:spPr>
+        <p:txBody>
+          <a:bodyPr wrap="square" lIns="0" tIns="0" rIns="0" bIns="0" rtlCol="0" anchor="t"/>
+          <a:lstStyle/>
+          <a:p>
+            <a:pPr indent="0" marL="0">
+              <a:buNone/>
+            </a:pPr>
+            <a:r>
+              <a:rPr lang="en-US" sz="1600" b="1" dirty="0">
+                <a:solidFill>
+                  <a:srgbClr val="16262E"/>
+                </a:solidFill>
+                <a:latin typeface="Arial" pitchFamily="34" charset="0"/>
+                <a:ea typeface="Arial" pitchFamily="34" charset="-122"/>
+                <a:cs typeface="Arial" pitchFamily="34" charset="-120"/>
+              </a:rPr>
+              <a:t>IA generativa</a:t>
+            </a:r>
+            <a:endParaRPr lang="en-US" sz="1600" dirty="0"/>
+          </a:p>
+        </p:txBody>
+      </p:sp>
+      <p:sp>
+        <p:nvSpPr>
+          <p:cNvPr id="15" name="Text"/>
+          <p:cNvSpPr txBox="1"/>
+          <p:nvPr/>
+        </p:nvSpPr>
+        <p:spPr>
+          <a:xfrm>
+            <a:off x="9303791" y="2978912"/>
+            <a:ext cx="2083232" cy="1531776"/>
+          </a:xfrm>
+          <a:prstGeom prst="rect">
+            <a:avLst/>
+          </a:prstGeom>
+          <a:noFill/>
+          <a:ln/>
+        </p:spPr>
+        <p:txBody>
+          <a:bodyPr wrap="square" lIns="0" tIns="0" rIns="0" bIns="0" rtlCol="0" anchor="t"/>
+          <a:lstStyle/>
+          <a:p>
+            <a:pPr indent="0" marL="0">
+              <a:lnSpc>
+                <a:spcPct val="110000"/>
+              </a:lnSpc>
+              <a:buNone/>
+            </a:pPr>
+            <a:r>
+              <a:rPr lang="en-US" sz="1300" dirty="0">
+                <a:solidFill>
+                  <a:srgbClr val="16262E"/>
+                </a:solidFill>
+                <a:latin typeface="Calibri" pitchFamily="34" charset="0"/>
+                <a:ea typeface="Calibri" pitchFamily="34" charset="-122"/>
+                <a:cs typeface="Calibri" pitchFamily="34" charset="-120"/>
+              </a:rPr>
+              <a:t>Aprendizaje profundo que produce contenido nuevo. Los modelos de lenguaje son su rama de texto y el transformer es su motor.</a:t>
+            </a:r>
+            <a:endParaRPr lang="en-US" sz="1300" dirty="0"/>
+          </a:p>
+        </p:txBody>
+      </p:sp>
+      <p:sp>
+        <p:nvSpPr>
+          <p:cNvPr id="16" name="Shape"/>
+          <p:cNvSpPr/>
+          <p:nvPr/>
+        </p:nvSpPr>
+        <p:spPr>
+          <a:xfrm>
+            <a:off x="566928" y="5193792"/>
+            <a:ext cx="11057839" cy="777240"/>
+          </a:xfrm>
+          <a:prstGeom prst="roundRect">
+            <a:avLst>
+              <a:gd name="adj" fmla="val 8235"/>
+            </a:avLst>
+          </a:prstGeom>
+          <a:solidFill>
+            <a:srgbClr val="16262E"/>
+          </a:solidFill>
+          <a:ln w="12700">
+            <a:solidFill>
+              <a:srgbClr val="16262E"/>
+            </a:solidFill>
+            <a:prstDash val="solid"/>
+          </a:ln>
+        </p:spPr>
+      </p:sp>
+      <p:sp>
+        <p:nvSpPr>
+          <p:cNvPr id="17" name="Text"/>
+          <p:cNvSpPr txBox="1"/>
+          <p:nvPr/>
+        </p:nvSpPr>
+        <p:spPr>
+          <a:xfrm>
+            <a:off x="841248" y="5193792"/>
+            <a:ext cx="10509199" cy="777240"/>
+          </a:xfrm>
+          <a:prstGeom prst="rect">
+            <a:avLst/>
+          </a:prstGeom>
+          <a:noFill/>
+          <a:ln/>
+        </p:spPr>
+        <p:txBody>
+          <a:bodyPr wrap="square" lIns="0" tIns="0" rIns="0" bIns="0" rtlCol="0" anchor="ctr"/>
+          <a:lstStyle/>
+          <a:p>
+            <a:pPr indent="0" marL="0">
+              <a:buNone/>
+            </a:pPr>
+            <a:r>
+              <a:rPr lang="en-US" sz="1350" dirty="0">
+                <a:solidFill>
+                  <a:srgbClr val="FFFFFF"/>
+                </a:solidFill>
+                <a:latin typeface="Calibri" pitchFamily="34" charset="0"/>
+                <a:ea typeface="Calibri" pitchFamily="34" charset="-122"/>
+                <a:cs typeface="Calibri" pitchFamily="34" charset="-120"/>
+              </a:rPr>
+              <a:t>La charla del receso sigue este mapa hacia adentro. El anexo, con referencias verificables, está en el repositorio: sesion-01/Anexo_De_la_regresion_al_transformer.pptx</a:t>
+            </a:r>
+            <a:endParaRPr lang="en-US" sz="1350" dirty="0"/>
+          </a:p>
+        </p:txBody>
+      </p:sp>
+    </p:spTree>
+  </p:cSld>
+  <p:clrMapOvr>
+    <a:masterClrMapping/>
+  </p:clrMapOvr>
+</p:sld>
+</file>
+
+<file path=ppt/slides/slide24.xml><?xml version="1.0" encoding="utf-8"?>
+<p:sld xmlns:a="http://schemas.openxmlformats.org/drawingml/2006/main" xmlns:r="http://schemas.openxmlformats.org/officeDocument/2006/relationships" xmlns:p="http://schemas.openxmlformats.org/presentationml/2006/main">
+  <p:cSld name="Trazabilidad">
+    <p:spTree>
+      <p:nvGrpSpPr>
+        <p:cNvPr id="1" name=""/>
+        <p:cNvGrpSpPr/>
+        <p:nvPr/>
+      </p:nvGrpSpPr>
+      <p:grpSpPr>
+        <a:xfrm>
+          <a:off x="0" y="0"/>
+          <a:ext cx="0" cy="0"/>
+          <a:chOff x="0" y="0"/>
+          <a:chExt cx="0" cy="0"/>
+        </a:xfrm>
+      </p:grpSpPr>
+      <p:sp>
+        <p:nvSpPr>
+          <p:cNvPr id="2" name="Text"/>
+          <p:cNvSpPr txBox="1"/>
+          <p:nvPr/>
+        </p:nvSpPr>
+        <p:spPr>
+          <a:xfrm>
+            <a:off x="566928" y="402336"/>
+            <a:ext cx="11057839" cy="749808"/>
+          </a:xfrm>
+          <a:prstGeom prst="rect">
+            <a:avLst/>
+          </a:prstGeom>
+          <a:noFill/>
+          <a:ln/>
+        </p:spPr>
+        <p:txBody>
+          <a:bodyPr wrap="square" lIns="0" tIns="0" rIns="0" bIns="0" rtlCol="0" anchor="t"/>
+          <a:lstStyle/>
+          <a:p>
+            <a:pPr algn="l" indent="0" marL="0">
+              <a:buNone/>
+            </a:pPr>
+            <a:r>
+              <a:rPr lang="en-US" sz="3200" b="1" dirty="0">
+                <a:solidFill>
+                  <a:srgbClr val="16262E"/>
+                </a:solidFill>
+                <a:latin typeface="Arial" pitchFamily="34" charset="0"/>
+                <a:ea typeface="Arial" pitchFamily="34" charset="-122"/>
+                <a:cs typeface="Arial" pitchFamily="34" charset="-120"/>
+              </a:rPr>
+              <a:t>Pendiente de ayer: de dónde salió cada cosa</a:t>
+            </a:r>
+            <a:endParaRPr lang="en-US" sz="3200" dirty="0"/>
+          </a:p>
+        </p:txBody>
+      </p:sp>
+      <p:sp>
+        <p:nvSpPr>
+          <p:cNvPr id="3" name="Text"/>
+          <p:cNvSpPr txBox="1"/>
+          <p:nvPr/>
+        </p:nvSpPr>
+        <p:spPr>
+          <a:xfrm>
+            <a:off x="566928" y="1280160"/>
+            <a:ext cx="11057839" cy="731520"/>
+          </a:xfrm>
+          <a:prstGeom prst="rect">
+            <a:avLst/>
+          </a:prstGeom>
+          <a:noFill/>
+          <a:ln/>
+        </p:spPr>
+        <p:txBody>
+          <a:bodyPr wrap="square" lIns="0" tIns="0" rIns="0" bIns="0" rtlCol="0" anchor="t"/>
+          <a:lstStyle/>
+          <a:p>
+            <a:pPr indent="0" marL="0">
+              <a:buNone/>
+            </a:pPr>
+            <a:r>
+              <a:rPr lang="en-US" sz="1500" dirty="0">
+                <a:solidFill>
+                  <a:srgbClr val="5A6B73"/>
+                </a:solidFill>
+                <a:latin typeface="Calibri" pitchFamily="34" charset="0"/>
+                <a:ea typeface="Calibri" pitchFamily="34" charset="-122"/>
+                <a:cs typeface="Calibri" pitchFamily="34" charset="-120"/>
+              </a:rPr>
+              <a:t>El marco de trazabilidad son tres piezas. Las dos primeras ya las empezaste ayer sin saberlo.</a:t>
+            </a:r>
+            <a:endParaRPr lang="en-US" sz="1500" dirty="0"/>
+          </a:p>
+        </p:txBody>
+      </p:sp>
+      <p:sp>
+        <p:nvSpPr>
+          <p:cNvPr id="4" name="Shape"/>
+          <p:cNvSpPr/>
+          <p:nvPr/>
+        </p:nvSpPr>
+        <p:spPr>
+          <a:xfrm>
+            <a:off x="566928" y="2011680"/>
+            <a:ext cx="3503066" cy="2750000"/>
+          </a:xfrm>
+          <a:prstGeom prst="roundRect">
+            <a:avLst>
+              <a:gd name="adj" fmla="val 2933"/>
+            </a:avLst>
+          </a:prstGeom>
+          <a:solidFill>
+            <a:srgbClr val="F2F5F6"/>
+          </a:solidFill>
+          <a:ln w="12700">
+            <a:solidFill>
+              <a:srgbClr val="F2F5F6"/>
+            </a:solidFill>
+            <a:prstDash val="solid"/>
+          </a:ln>
+        </p:spPr>
+      </p:sp>
+      <p:sp>
+        <p:nvSpPr>
+          <p:cNvPr id="5" name="Shape"/>
+          <p:cNvSpPr/>
+          <p:nvPr/>
+        </p:nvSpPr>
+        <p:spPr>
+          <a:xfrm>
+            <a:off x="804672" y="2231136"/>
+            <a:ext cx="420624" cy="420624"/>
           </a:xfrm>
           <a:prstGeom prst="ellipse">
             <a:avLst/>
+          </a:prstGeom>
+          <a:solidFill>
+            <a:srgbClr val="2E7D7D"/>
+          </a:solidFill>
+          <a:ln w="12700">
+            <a:solidFill>
+              <a:srgbClr val="2E7D7D"/>
+            </a:solidFill>
+            <a:prstDash val="solid"/>
+          </a:ln>
+        </p:spPr>
+      </p:sp>
+      <p:sp>
+        <p:nvSpPr>
+          <p:cNvPr id="6" name="Text"/>
+          <p:cNvSpPr txBox="1"/>
+          <p:nvPr/>
+        </p:nvSpPr>
+        <p:spPr>
+          <a:xfrm>
+            <a:off x="804672" y="2231136"/>
+            <a:ext cx="420624" cy="420624"/>
+          </a:xfrm>
+          <a:prstGeom prst="rect">
+            <a:avLst/>
+          </a:prstGeom>
+          <a:noFill/>
+          <a:ln/>
+        </p:spPr>
+        <p:txBody>
+          <a:bodyPr wrap="square" lIns="0" tIns="0" rIns="0" bIns="0" rtlCol="0" anchor="ctr"/>
+          <a:lstStyle/>
+          <a:p>
+            <a:pPr algn="ctr" indent="0" marL="0">
+              <a:buNone/>
+            </a:pPr>
+            <a:r>
+              <a:rPr lang="en-US" sz="1400" b="1" dirty="0">
+                <a:solidFill>
+                  <a:srgbClr val="FFFFFF"/>
+                </a:solidFill>
+                <a:latin typeface="Arial" pitchFamily="34" charset="0"/>
+                <a:ea typeface="Arial" pitchFamily="34" charset="-122"/>
+                <a:cs typeface="Arial" pitchFamily="34" charset="-120"/>
+              </a:rPr>
+              <a:t>1</a:t>
+            </a:r>
+            <a:endParaRPr lang="en-US" sz="1400" dirty="0"/>
+          </a:p>
+        </p:txBody>
+      </p:sp>
+      <p:sp>
+        <p:nvSpPr>
+          <p:cNvPr id="7" name="Text"/>
+          <p:cNvSpPr txBox="1"/>
+          <p:nvPr/>
+        </p:nvSpPr>
+        <p:spPr>
+          <a:xfrm>
+            <a:off x="804672" y="2798064"/>
+            <a:ext cx="3027578" cy="583184"/>
+          </a:xfrm>
+          <a:prstGeom prst="rect">
+            <a:avLst/>
+          </a:prstGeom>
+          <a:noFill/>
+          <a:ln/>
+        </p:spPr>
+        <p:txBody>
+          <a:bodyPr wrap="square" lIns="0" tIns="0" rIns="0" bIns="0" rtlCol="0" anchor="t"/>
+          <a:lstStyle/>
+          <a:p>
+            <a:pPr indent="0" marL="0">
+              <a:buNone/>
+            </a:pPr>
+            <a:r>
+              <a:rPr lang="en-US" sz="1600" b="1" dirty="0">
+                <a:solidFill>
+                  <a:srgbClr val="16262E"/>
+                </a:solidFill>
+                <a:latin typeface="Arial" pitchFamily="34" charset="0"/>
+                <a:ea typeface="Arial" pitchFamily="34" charset="-122"/>
+                <a:cs typeface="Arial" pitchFamily="34" charset="-120"/>
+              </a:rPr>
+              <a:t>Registro de lo que pediste</a:t>
+            </a:r>
+            <a:endParaRPr lang="en-US" sz="1600" dirty="0"/>
+          </a:p>
+        </p:txBody>
+      </p:sp>
+      <p:sp>
+        <p:nvSpPr>
+          <p:cNvPr id="8" name="Text"/>
+          <p:cNvSpPr txBox="1"/>
+          <p:nvPr/>
+        </p:nvSpPr>
+        <p:spPr>
+          <a:xfrm>
+            <a:off x="804672" y="3455000"/>
+            <a:ext cx="3027578" cy="1260000"/>
+          </a:xfrm>
+          <a:prstGeom prst="rect">
+            <a:avLst/>
+          </a:prstGeom>
+          <a:noFill/>
+          <a:ln/>
+        </p:spPr>
+        <p:txBody>
+          <a:bodyPr wrap="square" lIns="0" tIns="0" rIns="0" bIns="0" rtlCol="0" anchor="t"/>
+          <a:lstStyle/>
+          <a:p>
+            <a:pPr indent="0" marL="0">
+              <a:lnSpc>
+                <a:spcPct val="110000"/>
+              </a:lnSpc>
+              <a:buNone/>
+            </a:pPr>
+            <a:r>
+              <a:rPr lang="en-US" sz="1300" dirty="0">
+                <a:solidFill>
+                  <a:srgbClr val="16262E"/>
+                </a:solidFill>
+                <a:latin typeface="Calibri" pitchFamily="34" charset="0"/>
+                <a:ea typeface="Calibri" pitchFamily="34" charset="-122"/>
+                <a:cs typeface="Calibri" pitchFamily="34" charset="-120"/>
+              </a:rPr>
+              <a:t>Tu bitácora: qué le pediste al modelo y qué te contestó. Como el modelo no repite, sin bitácora no puedes reconstruir nada.</a:t>
+            </a:r>
+            <a:endParaRPr lang="en-US" sz="1300" dirty="0"/>
+          </a:p>
+        </p:txBody>
+      </p:sp>
+      <p:sp>
+        <p:nvSpPr>
+          <p:cNvPr id="9" name="Shape"/>
+          <p:cNvSpPr/>
+          <p:nvPr/>
+        </p:nvSpPr>
+        <p:spPr>
+          <a:xfrm>
+            <a:off x="4344314" y="2011680"/>
+            <a:ext cx="3503066" cy="2750000"/>
+          </a:xfrm>
+          <a:prstGeom prst="roundRect">
+            <a:avLst>
+              <a:gd name="adj" fmla="val 2933"/>
+            </a:avLst>
+          </a:prstGeom>
+          <a:solidFill>
+            <a:srgbClr val="F2F5F6"/>
+          </a:solidFill>
+          <a:ln w="12700">
+            <a:solidFill>
+              <a:srgbClr val="F2F5F6"/>
+            </a:solidFill>
+            <a:prstDash val="solid"/>
+          </a:ln>
+        </p:spPr>
+      </p:sp>
+      <p:sp>
+        <p:nvSpPr>
+          <p:cNvPr id="10" name="Shape"/>
+          <p:cNvSpPr/>
+          <p:nvPr/>
+        </p:nvSpPr>
+        <p:spPr>
+          <a:xfrm>
+            <a:off x="4582058" y="2231136"/>
+            <a:ext cx="420624" cy="420624"/>
+          </a:xfrm>
+          <a:prstGeom prst="ellipse">
+            <a:avLst/>
+          </a:prstGeom>
+          <a:solidFill>
+            <a:srgbClr val="2E7D7D"/>
+          </a:solidFill>
+          <a:ln w="12700">
+            <a:solidFill>
+              <a:srgbClr val="2E7D7D"/>
+            </a:solidFill>
+            <a:prstDash val="solid"/>
+          </a:ln>
+        </p:spPr>
+      </p:sp>
+      <p:sp>
+        <p:nvSpPr>
+          <p:cNvPr id="11" name="Text"/>
+          <p:cNvSpPr txBox="1"/>
+          <p:nvPr/>
+        </p:nvSpPr>
+        <p:spPr>
+          <a:xfrm>
+            <a:off x="4582058" y="2231136"/>
+            <a:ext cx="420624" cy="420624"/>
+          </a:xfrm>
+          <a:prstGeom prst="rect">
+            <a:avLst/>
+          </a:prstGeom>
+          <a:noFill/>
+          <a:ln/>
+        </p:spPr>
+        <p:txBody>
+          <a:bodyPr wrap="square" lIns="0" tIns="0" rIns="0" bIns="0" rtlCol="0" anchor="ctr"/>
+          <a:lstStyle/>
+          <a:p>
+            <a:pPr algn="ctr" indent="0" marL="0">
+              <a:buNone/>
+            </a:pPr>
+            <a:r>
+              <a:rPr lang="en-US" sz="1400" b="1" dirty="0">
+                <a:solidFill>
+                  <a:srgbClr val="FFFFFF"/>
+                </a:solidFill>
+                <a:latin typeface="Arial" pitchFamily="34" charset="0"/>
+                <a:ea typeface="Arial" pitchFamily="34" charset="-122"/>
+                <a:cs typeface="Arial" pitchFamily="34" charset="-120"/>
+              </a:rPr>
+              <a:t>2</a:t>
+            </a:r>
+            <a:endParaRPr lang="en-US" sz="1400" dirty="0"/>
+          </a:p>
+        </p:txBody>
+      </p:sp>
+      <p:sp>
+        <p:nvSpPr>
+          <p:cNvPr id="12" name="Text"/>
+          <p:cNvSpPr txBox="1"/>
+          <p:nvPr/>
+        </p:nvSpPr>
+        <p:spPr>
+          <a:xfrm>
+            <a:off x="4582058" y="2798064"/>
+            <a:ext cx="3027578" cy="583184"/>
+          </a:xfrm>
+          <a:prstGeom prst="rect">
+            <a:avLst/>
+          </a:prstGeom>
+          <a:noFill/>
+          <a:ln/>
+        </p:spPr>
+        <p:txBody>
+          <a:bodyPr wrap="square" lIns="0" tIns="0" rIns="0" bIns="0" rtlCol="0" anchor="t"/>
+          <a:lstStyle/>
+          <a:p>
+            <a:pPr indent="0" marL="0">
+              <a:buNone/>
+            </a:pPr>
+            <a:r>
+              <a:rPr lang="en-US" sz="1600" b="1" dirty="0">
+                <a:solidFill>
+                  <a:srgbClr val="16262E"/>
+                </a:solidFill>
+                <a:latin typeface="Arial" pitchFamily="34" charset="0"/>
+                <a:ea typeface="Arial" pitchFamily="34" charset="-122"/>
+                <a:cs typeface="Arial" pitchFamily="34" charset="-120"/>
+              </a:rPr>
+              <a:t>Control de versiones</a:t>
+            </a:r>
+            <a:endParaRPr lang="en-US" sz="1600" dirty="0"/>
+          </a:p>
+        </p:txBody>
+      </p:sp>
+      <p:sp>
+        <p:nvSpPr>
+          <p:cNvPr id="13" name="Text"/>
+          <p:cNvSpPr txBox="1"/>
+          <p:nvPr/>
+        </p:nvSpPr>
+        <p:spPr>
+          <a:xfrm>
+            <a:off x="4582058" y="3455000"/>
+            <a:ext cx="3027578" cy="1260000"/>
+          </a:xfrm>
+          <a:prstGeom prst="rect">
+            <a:avLst/>
+          </a:prstGeom>
+          <a:noFill/>
+          <a:ln/>
+        </p:spPr>
+        <p:txBody>
+          <a:bodyPr wrap="square" lIns="0" tIns="0" rIns="0" bIns="0" rtlCol="0" anchor="t"/>
+          <a:lstStyle/>
+          <a:p>
+            <a:pPr indent="0" marL="0">
+              <a:lnSpc>
+                <a:spcPct val="110000"/>
+              </a:lnSpc>
+              <a:buNone/>
+            </a:pPr>
+            <a:r>
+              <a:rPr lang="en-US" sz="1300" dirty="0">
+                <a:solidFill>
+                  <a:srgbClr val="16262E"/>
+                </a:solidFill>
+                <a:latin typeface="Calibri" pitchFamily="34" charset="0"/>
+                <a:ea typeface="Calibri" pitchFamily="34" charset="-122"/>
+                <a:cs typeface="Calibri" pitchFamily="34" charset="-120"/>
+              </a:rPr>
+              <a:t>Guarda los borradores intermedios. Así ves en qué paso se metió un error y puedes volver al último que estaba bien.</a:t>
+            </a:r>
+            <a:endParaRPr lang="en-US" sz="1300" dirty="0"/>
+          </a:p>
+        </p:txBody>
+      </p:sp>
+      <p:sp>
+        <p:nvSpPr>
+          <p:cNvPr id="14" name="Shape"/>
+          <p:cNvSpPr/>
+          <p:nvPr/>
+        </p:nvSpPr>
+        <p:spPr>
+          <a:xfrm>
+            <a:off x="8121701" y="2011680"/>
+            <a:ext cx="3503066" cy="2750000"/>
+          </a:xfrm>
+          <a:prstGeom prst="roundRect">
+            <a:avLst>
+              <a:gd name="adj" fmla="val 2933"/>
+            </a:avLst>
+          </a:prstGeom>
+          <a:solidFill>
+            <a:srgbClr val="F2F5F6"/>
+          </a:solidFill>
+          <a:ln w="12700">
+            <a:solidFill>
+              <a:srgbClr val="F2F5F6"/>
+            </a:solidFill>
+            <a:prstDash val="solid"/>
+          </a:ln>
+        </p:spPr>
+      </p:sp>
+      <p:sp>
+        <p:nvSpPr>
+          <p:cNvPr id="15" name="Shape"/>
+          <p:cNvSpPr/>
+          <p:nvPr/>
+        </p:nvSpPr>
+        <p:spPr>
+          <a:xfrm>
+            <a:off x="8359445" y="2231136"/>
+            <a:ext cx="420624" cy="420624"/>
+          </a:xfrm>
+          <a:prstGeom prst="ellipse">
+            <a:avLst/>
+          </a:prstGeom>
+          <a:solidFill>
+            <a:srgbClr val="2E7D7D"/>
+          </a:solidFill>
+          <a:ln w="12700">
+            <a:solidFill>
+              <a:srgbClr val="2E7D7D"/>
+            </a:solidFill>
+            <a:prstDash val="solid"/>
+          </a:ln>
+        </p:spPr>
+      </p:sp>
+      <p:sp>
+        <p:nvSpPr>
+          <p:cNvPr id="16" name="Text"/>
+          <p:cNvSpPr txBox="1"/>
+          <p:nvPr/>
+        </p:nvSpPr>
+        <p:spPr>
+          <a:xfrm>
+            <a:off x="8359445" y="2231136"/>
+            <a:ext cx="420624" cy="420624"/>
+          </a:xfrm>
+          <a:prstGeom prst="rect">
+            <a:avLst/>
+          </a:prstGeom>
+          <a:noFill/>
+          <a:ln/>
+        </p:spPr>
+        <p:txBody>
+          <a:bodyPr wrap="square" lIns="0" tIns="0" rIns="0" bIns="0" rtlCol="0" anchor="ctr"/>
+          <a:lstStyle/>
+          <a:p>
+            <a:pPr algn="ctr" indent="0" marL="0">
+              <a:buNone/>
+            </a:pPr>
+            <a:r>
+              <a:rPr lang="en-US" sz="1400" b="1" dirty="0">
+                <a:solidFill>
+                  <a:srgbClr val="FFFFFF"/>
+                </a:solidFill>
+                <a:latin typeface="Arial" pitchFamily="34" charset="0"/>
+                <a:ea typeface="Arial" pitchFamily="34" charset="-122"/>
+                <a:cs typeface="Arial" pitchFamily="34" charset="-120"/>
+              </a:rPr>
+              <a:t>3</a:t>
+            </a:r>
+            <a:endParaRPr lang="en-US" sz="1400" dirty="0"/>
+          </a:p>
+        </p:txBody>
+      </p:sp>
+      <p:sp>
+        <p:nvSpPr>
+          <p:cNvPr id="17" name="Text"/>
+          <p:cNvSpPr txBox="1"/>
+          <p:nvPr/>
+        </p:nvSpPr>
+        <p:spPr>
+          <a:xfrm>
+            <a:off x="8359445" y="2798064"/>
+            <a:ext cx="3027578" cy="583184"/>
+          </a:xfrm>
+          <a:prstGeom prst="rect">
+            <a:avLst/>
+          </a:prstGeom>
+          <a:noFill/>
+          <a:ln/>
+        </p:spPr>
+        <p:txBody>
+          <a:bodyPr wrap="square" lIns="0" tIns="0" rIns="0" bIns="0" rtlCol="0" anchor="t"/>
+          <a:lstStyle/>
+          <a:p>
+            <a:pPr indent="0" marL="0">
+              <a:buNone/>
+            </a:pPr>
+            <a:r>
+              <a:rPr lang="en-US" sz="1600" b="1" dirty="0">
+                <a:solidFill>
+                  <a:srgbClr val="16262E"/>
+                </a:solidFill>
+                <a:latin typeface="Arial" pitchFamily="34" charset="0"/>
+                <a:ea typeface="Arial" pitchFamily="34" charset="-122"/>
+                <a:cs typeface="Arial" pitchFamily="34" charset="-120"/>
+              </a:rPr>
+              <a:t>Linaje del dato</a:t>
+            </a:r>
+            <a:endParaRPr lang="en-US" sz="1600" dirty="0"/>
+          </a:p>
+        </p:txBody>
+      </p:sp>
+      <p:sp>
+        <p:nvSpPr>
+          <p:cNvPr id="18" name="Text"/>
+          <p:cNvSpPr txBox="1"/>
+          <p:nvPr/>
+        </p:nvSpPr>
+        <p:spPr>
+          <a:xfrm>
+            <a:off x="8359445" y="3455000"/>
+            <a:ext cx="3027578" cy="1260000"/>
+          </a:xfrm>
+          <a:prstGeom prst="rect">
+            <a:avLst/>
+          </a:prstGeom>
+          <a:noFill/>
+          <a:ln/>
+        </p:spPr>
+        <p:txBody>
+          <a:bodyPr wrap="square" lIns="0" tIns="0" rIns="0" bIns="0" rtlCol="0" anchor="t"/>
+          <a:lstStyle/>
+          <a:p>
+            <a:pPr indent="0" marL="0">
+              <a:lnSpc>
+                <a:spcPct val="110000"/>
+              </a:lnSpc>
+              <a:buNone/>
+            </a:pPr>
+            <a:r>
+              <a:rPr lang="en-US" sz="1300" dirty="0">
+                <a:solidFill>
+                  <a:srgbClr val="16262E"/>
+                </a:solidFill>
+                <a:latin typeface="Calibri" pitchFamily="34" charset="0"/>
+                <a:ea typeface="Calibri" pitchFamily="34" charset="-122"/>
+                <a:cs typeface="Calibri" pitchFamily="34" charset="-120"/>
+              </a:rPr>
+              <a:t>Qué documento y qué sección sostienen cada afirmación. Hoy lo practicas pidiendo la sección de cada dato; completo lo construyes en la sesión 6.</a:t>
+            </a:r>
+            <a:endParaRPr lang="en-US" sz="1300" dirty="0"/>
+          </a:p>
+        </p:txBody>
+      </p:sp>
+      <p:sp>
+        <p:nvSpPr>
+          <p:cNvPr id="19" name="Shape"/>
+          <p:cNvSpPr/>
+          <p:nvPr/>
+        </p:nvSpPr>
+        <p:spPr>
+          <a:xfrm>
+            <a:off x="566928" y="5193792"/>
+            <a:ext cx="11057839" cy="777240"/>
+          </a:xfrm>
+          <a:prstGeom prst="roundRect">
+            <a:avLst>
+              <a:gd name="adj" fmla="val 8235"/>
+            </a:avLst>
+          </a:prstGeom>
+          <a:solidFill>
+            <a:srgbClr val="16262E"/>
+          </a:solidFill>
+          <a:ln w="12700">
+            <a:solidFill>
+              <a:srgbClr val="16262E"/>
+            </a:solidFill>
+            <a:prstDash val="solid"/>
+          </a:ln>
+        </p:spPr>
+      </p:sp>
+      <p:sp>
+        <p:nvSpPr>
+          <p:cNvPr id="20" name="Text"/>
+          <p:cNvSpPr txBox="1"/>
+          <p:nvPr/>
+        </p:nvSpPr>
+        <p:spPr>
+          <a:xfrm>
+            <a:off x="841248" y="5193792"/>
+            <a:ext cx="10509199" cy="777240"/>
+          </a:xfrm>
+          <a:prstGeom prst="rect">
+            <a:avLst/>
+          </a:prstGeom>
+          <a:noFill/>
+          <a:ln/>
+        </p:spPr>
+        <p:txBody>
+          <a:bodyPr wrap="square" lIns="0" tIns="0" rIns="0" bIns="0" rtlCol="0" anchor="ctr"/>
+          <a:lstStyle/>
+          <a:p>
+            <a:pPr indent="0" marL="0">
+              <a:buNone/>
+            </a:pPr>
+            <a:r>
+              <a:rPr lang="en-US" sz="1350" dirty="0">
+                <a:solidFill>
+                  <a:srgbClr val="FFFFFF"/>
+                </a:solidFill>
+                <a:latin typeface="Calibri" pitchFamily="34" charset="0"/>
+                <a:ea typeface="Calibri" pitchFamily="34" charset="-122"/>
+                <a:cs typeface="Calibri" pitchFamily="34" charset="-120"/>
+              </a:rPr>
+              <a:t>Es la parte de la transparencia que te toca a ti. Si una auditoría pregunta de dónde salió una cifra, la respuesta no puede ser que la escribió la IA.</a:t>
+            </a:r>
+            <a:endParaRPr lang="en-US" sz="1350" dirty="0"/>
+          </a:p>
+        </p:txBody>
+      </p:sp>
+    </p:spTree>
+  </p:cSld>
+  <p:clrMapOvr>
+    <a:masterClrMapping/>
+  </p:clrMapOvr>
+</p:sld>
+</file>
+
+<file path=ppt/slides/slide25.xml><?xml version="1.0" encoding="utf-8"?>
+<p:sld xmlns:a="http://schemas.openxmlformats.org/drawingml/2006/main" xmlns:r="http://schemas.openxmlformats.org/officeDocument/2006/relationships" xmlns:p="http://schemas.openxmlformats.org/presentationml/2006/main">
+  <p:cSld name="Tu turno enmascaramiento">
+    <p:bg>
+      <p:bgPr>
+        <a:solidFill>
+          <a:srgbClr val="D7E7E7"/>
+        </a:solidFill>
+        <a:effectLst/>
+      </p:bgPr>
+    </p:bg>
+    <p:spTree>
+      <p:nvGrpSpPr>
+        <p:cNvPr id="1" name=""/>
+        <p:cNvGrpSpPr/>
+        <p:nvPr/>
+      </p:nvGrpSpPr>
+      <p:grpSpPr>
+        <a:xfrm>
+          <a:off x="0" y="0"/>
+          <a:ext cx="0" cy="0"/>
+          <a:chOff x="0" y="0"/>
+          <a:chExt cx="0" cy="0"/>
+        </a:xfrm>
+      </p:grpSpPr>
+      <p:sp>
+        <p:nvSpPr>
+          <p:cNvPr id="2" name="Shape"/>
+          <p:cNvSpPr/>
+          <p:nvPr/>
+        </p:nvSpPr>
+        <p:spPr>
+          <a:xfrm>
+            <a:off x="566928" y="457200"/>
+            <a:ext cx="2788920" cy="457200"/>
+          </a:xfrm>
+          <a:prstGeom prst="roundRect">
+            <a:avLst>
+              <a:gd name="adj" fmla="val 50000"/>
+            </a:avLst>
+          </a:prstGeom>
+          <a:solidFill>
+            <a:srgbClr val="2E7D7D"/>
+          </a:solidFill>
+          <a:ln w="12700">
+            <a:solidFill>
+              <a:srgbClr val="2E7D7D"/>
+            </a:solidFill>
+            <a:prstDash val="solid"/>
+          </a:ln>
+        </p:spPr>
+      </p:sp>
+      <p:sp>
+        <p:nvSpPr>
+          <p:cNvPr id="3" name="Text"/>
+          <p:cNvSpPr txBox="1"/>
+          <p:nvPr/>
+        </p:nvSpPr>
+        <p:spPr>
+          <a:xfrm>
+            <a:off x="566928" y="457200"/>
+            <a:ext cx="2788920" cy="457200"/>
+          </a:xfrm>
+          <a:prstGeom prst="rect">
+            <a:avLst/>
+          </a:prstGeom>
+          <a:noFill/>
+          <a:ln/>
+        </p:spPr>
+        <p:txBody>
+          <a:bodyPr wrap="square" lIns="0" tIns="0" rIns="0" bIns="0" rtlCol="0" anchor="ctr"/>
+          <a:lstStyle/>
+          <a:p>
+            <a:pPr algn="ctr" indent="0" marL="0">
+              <a:buNone/>
+            </a:pPr>
+            <a:r>
+              <a:rPr lang="en-US" sz="1300" b="1" spc="200" kern="0" dirty="0">
+                <a:solidFill>
+                  <a:srgbClr val="FFFFFF"/>
+                </a:solidFill>
+                <a:latin typeface="Arial" pitchFamily="34" charset="0"/>
+                <a:ea typeface="Arial" pitchFamily="34" charset="-122"/>
+                <a:cs typeface="Arial" pitchFamily="34" charset="-120"/>
+              </a:rPr>
+              <a:t>TU TURNO</a:t>
+            </a:r>
+            <a:endParaRPr lang="en-US" sz="1300" dirty="0"/>
+          </a:p>
+        </p:txBody>
+      </p:sp>
+      <p:sp>
+        <p:nvSpPr>
+          <p:cNvPr id="4" name="Shape"/>
+          <p:cNvSpPr/>
+          <p:nvPr/>
+        </p:nvSpPr>
+        <p:spPr>
+          <a:xfrm>
+            <a:off x="9704527" y="457200"/>
+            <a:ext cx="1920240" cy="457200"/>
+          </a:xfrm>
+          <a:prstGeom prst="roundRect">
+            <a:avLst>
+              <a:gd name="adj" fmla="val 50000"/>
+            </a:avLst>
+          </a:prstGeom>
+          <a:solidFill>
+            <a:srgbClr val="C85A28"/>
+          </a:solidFill>
+          <a:ln w="12700">
+            <a:solidFill>
+              <a:srgbClr val="C85A28"/>
+            </a:solidFill>
+            <a:prstDash val="solid"/>
+          </a:ln>
+        </p:spPr>
+      </p:sp>
+      <p:sp>
+        <p:nvSpPr>
+          <p:cNvPr id="5" name="Text"/>
+          <p:cNvSpPr txBox="1"/>
+          <p:nvPr/>
+        </p:nvSpPr>
+        <p:spPr>
+          <a:xfrm>
+            <a:off x="9704527" y="457200"/>
+            <a:ext cx="1920240" cy="457200"/>
+          </a:xfrm>
+          <a:prstGeom prst="rect">
+            <a:avLst/>
+          </a:prstGeom>
+          <a:noFill/>
+          <a:ln/>
+        </p:spPr>
+        <p:txBody>
+          <a:bodyPr wrap="square" lIns="0" tIns="0" rIns="0" bIns="0" rtlCol="0" anchor="ctr"/>
+          <a:lstStyle/>
+          <a:p>
+            <a:pPr algn="ctr" indent="0" marL="0">
+              <a:buNone/>
+            </a:pPr>
+            <a:r>
+              <a:rPr lang="en-US" sz="1300" b="1" dirty="0">
+                <a:solidFill>
+                  <a:srgbClr val="FFFFFF"/>
+                </a:solidFill>
+                <a:latin typeface="Arial" pitchFamily="34" charset="0"/>
+                <a:ea typeface="Arial" pitchFamily="34" charset="-122"/>
+                <a:cs typeface="Arial" pitchFamily="34" charset="-120"/>
+              </a:rPr>
+              <a:t>7 minutos</a:t>
+            </a:r>
+            <a:endParaRPr lang="en-US" sz="1300" dirty="0"/>
+          </a:p>
+        </p:txBody>
+      </p:sp>
+      <p:sp>
+        <p:nvSpPr>
+          <p:cNvPr id="6" name="Text"/>
+          <p:cNvSpPr txBox="1"/>
+          <p:nvPr/>
+        </p:nvSpPr>
+        <p:spPr>
+          <a:xfrm>
+            <a:off x="566928" y="1078992"/>
+            <a:ext cx="11057839" cy="685800"/>
+          </a:xfrm>
+          <a:prstGeom prst="rect">
+            <a:avLst/>
+          </a:prstGeom>
+          <a:noFill/>
+          <a:ln/>
+        </p:spPr>
+        <p:txBody>
+          <a:bodyPr wrap="square" lIns="0" tIns="0" rIns="0" bIns="0" rtlCol="0" anchor="ctr"/>
+          <a:lstStyle/>
+          <a:p>
+            <a:pPr indent="0" marL="0">
+              <a:buNone/>
+            </a:pPr>
+            <a:r>
+              <a:rPr lang="en-US" sz="2900" b="1" dirty="0">
+                <a:solidFill>
+                  <a:srgbClr val="16262E"/>
+                </a:solidFill>
+                <a:latin typeface="Arial" pitchFamily="34" charset="0"/>
+                <a:ea typeface="Arial" pitchFamily="34" charset="-122"/>
+                <a:cs typeface="Arial" pitchFamily="34" charset="-120"/>
+              </a:rPr>
+              <a:t>Enmascara un archivo con datos personales</a:t>
+            </a:r>
+            <a:endParaRPr lang="en-US" sz="2900" dirty="0"/>
+          </a:p>
+        </p:txBody>
+      </p:sp>
+      <p:sp>
+        <p:nvSpPr>
+          <p:cNvPr id="7" name="Shape"/>
+          <p:cNvSpPr/>
+          <p:nvPr/>
+        </p:nvSpPr>
+        <p:spPr>
+          <a:xfrm>
+            <a:off x="566928" y="1920240"/>
+            <a:ext cx="11057839" cy="628650"/>
+          </a:xfrm>
+          <a:prstGeom prst="roundRect">
+            <a:avLst>
+              <a:gd name="adj" fmla="val 10182"/>
+            </a:avLst>
+          </a:prstGeom>
+          <a:solidFill>
+            <a:srgbClr val="FFFFFF"/>
+          </a:solidFill>
+          <a:ln w="12700">
+            <a:solidFill>
+              <a:srgbClr val="FFFFFF"/>
+            </a:solidFill>
+            <a:prstDash val="solid"/>
+          </a:ln>
+        </p:spPr>
+      </p:sp>
+      <p:sp>
+        <p:nvSpPr>
+          <p:cNvPr id="8" name="Shape"/>
+          <p:cNvSpPr/>
+          <p:nvPr/>
+        </p:nvSpPr>
+        <p:spPr>
+          <a:xfrm>
+            <a:off x="786384" y="2024253"/>
+            <a:ext cx="420624" cy="420624"/>
+          </a:xfrm>
+          <a:prstGeom prst="ellipse">
+            <a:avLst/>
+          </a:prstGeom>
+          <a:solidFill>
+            <a:srgbClr val="2E7D7D"/>
+          </a:solidFill>
+          <a:ln w="12700">
+            <a:solidFill>
+              <a:srgbClr val="2E7D7D"/>
+            </a:solidFill>
+            <a:prstDash val="solid"/>
+          </a:ln>
+        </p:spPr>
+      </p:sp>
+      <p:sp>
+        <p:nvSpPr>
+          <p:cNvPr id="9" name="Text"/>
+          <p:cNvSpPr txBox="1"/>
+          <p:nvPr/>
+        </p:nvSpPr>
+        <p:spPr>
+          <a:xfrm>
+            <a:off x="786384" y="2024253"/>
+            <a:ext cx="420624" cy="420624"/>
+          </a:xfrm>
+          <a:prstGeom prst="rect">
+            <a:avLst/>
+          </a:prstGeom>
+          <a:noFill/>
+          <a:ln/>
+        </p:spPr>
+        <p:txBody>
+          <a:bodyPr wrap="square" lIns="0" tIns="0" rIns="0" bIns="0" rtlCol="0" anchor="ctr"/>
+          <a:lstStyle/>
+          <a:p>
+            <a:pPr algn="ctr" indent="0" marL="0">
+              <a:buNone/>
+            </a:pPr>
+            <a:r>
+              <a:rPr lang="en-US" sz="1400" b="1" dirty="0">
+                <a:solidFill>
+                  <a:srgbClr val="FFFFFF"/>
+                </a:solidFill>
+                <a:latin typeface="Arial" pitchFamily="34" charset="0"/>
+                <a:ea typeface="Arial" pitchFamily="34" charset="-122"/>
+                <a:cs typeface="Arial" pitchFamily="34" charset="-120"/>
+              </a:rPr>
+              <a:t>1</a:t>
+            </a:r>
+            <a:endParaRPr lang="en-US" sz="1400" dirty="0"/>
+          </a:p>
+        </p:txBody>
+      </p:sp>
+      <p:sp>
+        <p:nvSpPr>
+          <p:cNvPr id="10" name="Text"/>
+          <p:cNvSpPr txBox="1"/>
+          <p:nvPr/>
+        </p:nvSpPr>
+        <p:spPr>
+          <a:xfrm>
+            <a:off x="1408176" y="2011680"/>
+            <a:ext cx="9960559" cy="445770"/>
+          </a:xfrm>
+          <a:prstGeom prst="rect">
+            <a:avLst/>
+          </a:prstGeom>
+          <a:noFill/>
+          <a:ln/>
+        </p:spPr>
+        <p:txBody>
+          <a:bodyPr wrap="square" lIns="0" tIns="0" rIns="0" bIns="0" rtlCol="0" anchor="ctr"/>
+          <a:lstStyle/>
+          <a:p>
+            <a:pPr indent="0" marL="0">
+              <a:lnSpc>
+                <a:spcPct val="110000"/>
+              </a:lnSpc>
+              <a:buNone/>
+            </a:pPr>
+            <a:r>
+              <a:rPr lang="en-US" sz="1450" dirty="0">
+                <a:solidFill>
+                  <a:srgbClr val="16262E"/>
+                </a:solidFill>
+                <a:latin typeface="Calibri" pitchFamily="34" charset="0"/>
+                <a:ea typeface="Calibri" pitchFamily="34" charset="-122"/>
+                <a:cs typeface="Calibri" pitchFamily="34" charset="-120"/>
+              </a:rPr>
+              <a:t>Abre la hoja Padron_sintetico del archivo de registros. Tiene nombres, CURP, domicilios, teléfonos y correos.</a:t>
+            </a:r>
+            <a:endParaRPr lang="en-US" sz="1450" dirty="0"/>
+          </a:p>
+        </p:txBody>
+      </p:sp>
+      <p:sp>
+        <p:nvSpPr>
+          <p:cNvPr id="11" name="Shape"/>
+          <p:cNvSpPr/>
+          <p:nvPr/>
+        </p:nvSpPr>
+        <p:spPr>
+          <a:xfrm>
+            <a:off x="566928" y="2731770"/>
+            <a:ext cx="11057839" cy="628650"/>
+          </a:xfrm>
+          <a:prstGeom prst="roundRect">
+            <a:avLst>
+              <a:gd name="adj" fmla="val 10182"/>
+            </a:avLst>
+          </a:prstGeom>
+          <a:solidFill>
+            <a:srgbClr val="FFFFFF"/>
+          </a:solidFill>
+          <a:ln w="12700">
+            <a:solidFill>
+              <a:srgbClr val="FFFFFF"/>
+            </a:solidFill>
+            <a:prstDash val="solid"/>
+          </a:ln>
+        </p:spPr>
+      </p:sp>
+      <p:sp>
+        <p:nvSpPr>
+          <p:cNvPr id="12" name="Shape"/>
+          <p:cNvSpPr/>
+          <p:nvPr/>
+        </p:nvSpPr>
+        <p:spPr>
+          <a:xfrm>
+            <a:off x="786384" y="2835783"/>
+            <a:ext cx="420624" cy="420624"/>
+          </a:xfrm>
+          <a:prstGeom prst="ellipse">
+            <a:avLst/>
+          </a:prstGeom>
+          <a:solidFill>
+            <a:srgbClr val="2E7D7D"/>
+          </a:solidFill>
+          <a:ln w="12700">
+            <a:solidFill>
+              <a:srgbClr val="2E7D7D"/>
+            </a:solidFill>
+            <a:prstDash val="solid"/>
+          </a:ln>
+        </p:spPr>
+      </p:sp>
+      <p:sp>
+        <p:nvSpPr>
+          <p:cNvPr id="13" name="Text"/>
+          <p:cNvSpPr txBox="1"/>
+          <p:nvPr/>
+        </p:nvSpPr>
+        <p:spPr>
+          <a:xfrm>
+            <a:off x="786384" y="2835783"/>
+            <a:ext cx="420624" cy="420624"/>
+          </a:xfrm>
+          <a:prstGeom prst="rect">
+            <a:avLst/>
+          </a:prstGeom>
+          <a:noFill/>
+          <a:ln/>
+        </p:spPr>
+        <p:txBody>
+          <a:bodyPr wrap="square" lIns="0" tIns="0" rIns="0" bIns="0" rtlCol="0" anchor="ctr"/>
+          <a:lstStyle/>
+          <a:p>
+            <a:pPr algn="ctr" indent="0" marL="0">
+              <a:buNone/>
+            </a:pPr>
+            <a:r>
+              <a:rPr lang="en-US" sz="1400" b="1" dirty="0">
+                <a:solidFill>
+                  <a:srgbClr val="FFFFFF"/>
+                </a:solidFill>
+                <a:latin typeface="Arial" pitchFamily="34" charset="0"/>
+                <a:ea typeface="Arial" pitchFamily="34" charset="-122"/>
+                <a:cs typeface="Arial" pitchFamily="34" charset="-120"/>
+              </a:rPr>
+              <a:t>2</a:t>
+            </a:r>
+            <a:endParaRPr lang="en-US" sz="1400" dirty="0"/>
+          </a:p>
+        </p:txBody>
+      </p:sp>
+      <p:sp>
+        <p:nvSpPr>
+          <p:cNvPr id="14" name="Text"/>
+          <p:cNvSpPr txBox="1"/>
+          <p:nvPr/>
+        </p:nvSpPr>
+        <p:spPr>
+          <a:xfrm>
+            <a:off x="1408176" y="2823210"/>
+            <a:ext cx="9960559" cy="445770"/>
+          </a:xfrm>
+          <a:prstGeom prst="rect">
+            <a:avLst/>
+          </a:prstGeom>
+          <a:noFill/>
+          <a:ln/>
+        </p:spPr>
+        <p:txBody>
+          <a:bodyPr wrap="square" lIns="0" tIns="0" rIns="0" bIns="0" rtlCol="0" anchor="ctr"/>
+          <a:lstStyle/>
+          <a:p>
+            <a:pPr indent="0" marL="0">
+              <a:lnSpc>
+                <a:spcPct val="110000"/>
+              </a:lnSpc>
+              <a:buNone/>
+            </a:pPr>
+            <a:r>
+              <a:rPr lang="en-US" sz="1450" dirty="0">
+                <a:solidFill>
+                  <a:srgbClr val="16262E"/>
+                </a:solidFill>
+                <a:latin typeface="Calibri" pitchFamily="34" charset="0"/>
+                <a:ea typeface="Calibri" pitchFamily="34" charset="-122"/>
+                <a:cs typeface="Calibri" pitchFamily="34" charset="-120"/>
+              </a:rPr>
+              <a:t>Cambia la columna de nombre por un número secuencial. La equivalencia se queda en un archivo aparte que nunca sube a ninguna herramienta.</a:t>
+            </a:r>
+            <a:endParaRPr lang="en-US" sz="1450" dirty="0"/>
+          </a:p>
+        </p:txBody>
+      </p:sp>
+      <p:sp>
+        <p:nvSpPr>
+          <p:cNvPr id="15" name="Shape"/>
+          <p:cNvSpPr/>
+          <p:nvPr/>
+        </p:nvSpPr>
+        <p:spPr>
+          <a:xfrm>
+            <a:off x="566928" y="3543300"/>
+            <a:ext cx="11057839" cy="628650"/>
+          </a:xfrm>
+          <a:prstGeom prst="roundRect">
+            <a:avLst>
+              <a:gd name="adj" fmla="val 10182"/>
+            </a:avLst>
+          </a:prstGeom>
+          <a:solidFill>
+            <a:srgbClr val="FFFFFF"/>
+          </a:solidFill>
+          <a:ln w="12700">
+            <a:solidFill>
+              <a:srgbClr val="FFFFFF"/>
+            </a:solidFill>
+            <a:prstDash val="solid"/>
+          </a:ln>
+        </p:spPr>
+      </p:sp>
+      <p:sp>
+        <p:nvSpPr>
+          <p:cNvPr id="16" name="Shape"/>
+          <p:cNvSpPr/>
+          <p:nvPr/>
+        </p:nvSpPr>
+        <p:spPr>
+          <a:xfrm>
+            <a:off x="786384" y="3647313"/>
+            <a:ext cx="420624" cy="420624"/>
+          </a:xfrm>
+          <a:prstGeom prst="ellipse">
+            <a:avLst/>
+          </a:prstGeom>
+          <a:solidFill>
+            <a:srgbClr val="2E7D7D"/>
+          </a:solidFill>
+          <a:ln w="12700">
+            <a:solidFill>
+              <a:srgbClr val="2E7D7D"/>
+            </a:solidFill>
+            <a:prstDash val="solid"/>
+          </a:ln>
+        </p:spPr>
+      </p:sp>
+      <p:sp>
+        <p:nvSpPr>
+          <p:cNvPr id="17" name="Text"/>
+          <p:cNvSpPr txBox="1"/>
+          <p:nvPr/>
+        </p:nvSpPr>
+        <p:spPr>
+          <a:xfrm>
+            <a:off x="786384" y="3647313"/>
+            <a:ext cx="420624" cy="420624"/>
+          </a:xfrm>
+          <a:prstGeom prst="rect">
+            <a:avLst/>
+          </a:prstGeom>
+          <a:noFill/>
+          <a:ln/>
+        </p:spPr>
+        <p:txBody>
+          <a:bodyPr wrap="square" lIns="0" tIns="0" rIns="0" bIns="0" rtlCol="0" anchor="ctr"/>
+          <a:lstStyle/>
+          <a:p>
+            <a:pPr algn="ctr" indent="0" marL="0">
+              <a:buNone/>
+            </a:pPr>
+            <a:r>
+              <a:rPr lang="en-US" sz="1400" b="1" dirty="0">
+                <a:solidFill>
+                  <a:srgbClr val="FFFFFF"/>
+                </a:solidFill>
+                <a:latin typeface="Arial" pitchFamily="34" charset="0"/>
+                <a:ea typeface="Arial" pitchFamily="34" charset="-122"/>
+                <a:cs typeface="Arial" pitchFamily="34" charset="-120"/>
+              </a:rPr>
+              <a:t>3</a:t>
+            </a:r>
+            <a:endParaRPr lang="en-US" sz="1400" dirty="0"/>
+          </a:p>
+        </p:txBody>
+      </p:sp>
+      <p:sp>
+        <p:nvSpPr>
+          <p:cNvPr id="18" name="Text"/>
+          <p:cNvSpPr txBox="1"/>
+          <p:nvPr/>
+        </p:nvSpPr>
+        <p:spPr>
+          <a:xfrm>
+            <a:off x="1408176" y="3634740"/>
+            <a:ext cx="9960559" cy="445770"/>
+          </a:xfrm>
+          <a:prstGeom prst="rect">
+            <a:avLst/>
+          </a:prstGeom>
+          <a:noFill/>
+          <a:ln/>
+        </p:spPr>
+        <p:txBody>
+          <a:bodyPr wrap="square" lIns="0" tIns="0" rIns="0" bIns="0" rtlCol="0" anchor="ctr"/>
+          <a:lstStyle/>
+          <a:p>
+            <a:pPr indent="0" marL="0">
+              <a:lnSpc>
+                <a:spcPct val="110000"/>
+              </a:lnSpc>
+              <a:buNone/>
+            </a:pPr>
+            <a:r>
+              <a:rPr lang="en-US" sz="1450" dirty="0">
+                <a:solidFill>
+                  <a:srgbClr val="16262E"/>
+                </a:solidFill>
+                <a:latin typeface="Calibri" pitchFamily="34" charset="0"/>
+                <a:ea typeface="Calibri" pitchFamily="34" charset="-122"/>
+                <a:cs typeface="Calibri" pitchFamily="34" charset="-120"/>
+              </a:rPr>
+              <a:t>Deja solo el año de nacimiento, y solo el municipio y la entidad. Borra CURP, teléfono y correo.</a:t>
+            </a:r>
+            <a:endParaRPr lang="en-US" sz="1450" dirty="0"/>
+          </a:p>
+        </p:txBody>
+      </p:sp>
+      <p:sp>
+        <p:nvSpPr>
+          <p:cNvPr id="19" name="Shape"/>
+          <p:cNvSpPr/>
+          <p:nvPr/>
+        </p:nvSpPr>
+        <p:spPr>
+          <a:xfrm>
+            <a:off x="566928" y="4354830"/>
+            <a:ext cx="11057839" cy="628650"/>
+          </a:xfrm>
+          <a:prstGeom prst="roundRect">
+            <a:avLst>
+              <a:gd name="adj" fmla="val 10182"/>
+            </a:avLst>
+          </a:prstGeom>
+          <a:solidFill>
+            <a:srgbClr val="FFFFFF"/>
+          </a:solidFill>
+          <a:ln w="12700">
+            <a:solidFill>
+              <a:srgbClr val="FFFFFF"/>
+            </a:solidFill>
+            <a:prstDash val="solid"/>
+          </a:ln>
+        </p:spPr>
+      </p:sp>
+      <p:sp>
+        <p:nvSpPr>
+          <p:cNvPr id="20" name="Shape"/>
+          <p:cNvSpPr/>
+          <p:nvPr/>
+        </p:nvSpPr>
+        <p:spPr>
+          <a:xfrm>
+            <a:off x="786384" y="4458843"/>
+            <a:ext cx="420624" cy="420624"/>
+          </a:xfrm>
+          <a:prstGeom prst="ellipse">
+            <a:avLst/>
+          </a:prstGeom>
+          <a:solidFill>
+            <a:srgbClr val="2E7D7D"/>
+          </a:solidFill>
+          <a:ln w="12700">
+            <a:solidFill>
+              <a:srgbClr val="2E7D7D"/>
+            </a:solidFill>
+            <a:prstDash val="solid"/>
+          </a:ln>
+        </p:spPr>
+      </p:sp>
+      <p:sp>
+        <p:nvSpPr>
+          <p:cNvPr id="21" name="Text"/>
+          <p:cNvSpPr txBox="1"/>
+          <p:nvPr/>
+        </p:nvSpPr>
+        <p:spPr>
+          <a:xfrm>
+            <a:off x="786384" y="4458843"/>
+            <a:ext cx="420624" cy="420624"/>
+          </a:xfrm>
+          <a:prstGeom prst="rect">
+            <a:avLst/>
+          </a:prstGeom>
+          <a:noFill/>
+          <a:ln/>
+        </p:spPr>
+        <p:txBody>
+          <a:bodyPr wrap="square" lIns="0" tIns="0" rIns="0" bIns="0" rtlCol="0" anchor="ctr"/>
+          <a:lstStyle/>
+          <a:p>
+            <a:pPr algn="ctr" indent="0" marL="0">
+              <a:buNone/>
+            </a:pPr>
+            <a:r>
+              <a:rPr lang="en-US" sz="1400" b="1" dirty="0">
+                <a:solidFill>
+                  <a:srgbClr val="FFFFFF"/>
+                </a:solidFill>
+                <a:latin typeface="Arial" pitchFamily="34" charset="0"/>
+                <a:ea typeface="Arial" pitchFamily="34" charset="-122"/>
+                <a:cs typeface="Arial" pitchFamily="34" charset="-120"/>
+              </a:rPr>
+              <a:t>4</a:t>
+            </a:r>
+            <a:endParaRPr lang="en-US" sz="1400" dirty="0"/>
+          </a:p>
+        </p:txBody>
+      </p:sp>
+      <p:sp>
+        <p:nvSpPr>
+          <p:cNvPr id="22" name="Text"/>
+          <p:cNvSpPr txBox="1"/>
+          <p:nvPr/>
+        </p:nvSpPr>
+        <p:spPr>
+          <a:xfrm>
+            <a:off x="1408176" y="4446270"/>
+            <a:ext cx="9960559" cy="445770"/>
+          </a:xfrm>
+          <a:prstGeom prst="rect">
+            <a:avLst/>
+          </a:prstGeom>
+          <a:noFill/>
+          <a:ln/>
+        </p:spPr>
+        <p:txBody>
+          <a:bodyPr wrap="square" lIns="0" tIns="0" rIns="0" bIns="0" rtlCol="0" anchor="ctr"/>
+          <a:lstStyle/>
+          <a:p>
+            <a:pPr indent="0" marL="0">
+              <a:lnSpc>
+                <a:spcPct val="110000"/>
+              </a:lnSpc>
+              <a:buNone/>
+            </a:pPr>
+            <a:r>
+              <a:rPr lang="en-US" sz="1450" dirty="0">
+                <a:solidFill>
+                  <a:srgbClr val="16262E"/>
+                </a:solidFill>
+                <a:latin typeface="Calibri" pitchFamily="34" charset="0"/>
+                <a:ea typeface="Calibri" pitchFamily="34" charset="-122"/>
+                <a:cs typeface="Calibri" pitchFamily="34" charset="-120"/>
+              </a:rPr>
+              <a:t>Lo que queda es una versión verde de un archivo rojo. Anota en tu bitácora qué le hiciste: eso es el linaje del dato.</a:t>
+            </a:r>
+            <a:endParaRPr lang="en-US" sz="1450" dirty="0"/>
+          </a:p>
+        </p:txBody>
+      </p:sp>
+      <p:sp>
+        <p:nvSpPr>
+          <p:cNvPr id="23" name="Shape"/>
+          <p:cNvSpPr/>
+          <p:nvPr/>
+        </p:nvSpPr>
+        <p:spPr>
+          <a:xfrm>
+            <a:off x="566928" y="5193792"/>
+            <a:ext cx="11057839" cy="777240"/>
+          </a:xfrm>
+          <a:prstGeom prst="roundRect">
+            <a:avLst>
+              <a:gd name="adj" fmla="val 8235"/>
+            </a:avLst>
+          </a:prstGeom>
+          <a:solidFill>
+            <a:srgbClr val="16262E"/>
+          </a:solidFill>
+          <a:ln w="12700">
+            <a:solidFill>
+              <a:srgbClr val="16262E"/>
+            </a:solidFill>
+            <a:prstDash val="solid"/>
+          </a:ln>
+        </p:spPr>
+      </p:sp>
+      <p:sp>
+        <p:nvSpPr>
+          <p:cNvPr id="24" name="Text"/>
+          <p:cNvSpPr txBox="1"/>
+          <p:nvPr/>
+        </p:nvSpPr>
+        <p:spPr>
+          <a:xfrm>
+            <a:off x="841248" y="5193792"/>
+            <a:ext cx="10509199" cy="777240"/>
+          </a:xfrm>
+          <a:prstGeom prst="rect">
+            <a:avLst/>
+          </a:prstGeom>
+          <a:noFill/>
+          <a:ln/>
+        </p:spPr>
+        <p:txBody>
+          <a:bodyPr wrap="square" lIns="0" tIns="0" rIns="0" bIns="0" rtlCol="0" anchor="ctr"/>
+          <a:lstStyle/>
+          <a:p>
+            <a:pPr indent="0" marL="0">
+              <a:buNone/>
+            </a:pPr>
+            <a:r>
+              <a:rPr lang="en-US" sz="1350" dirty="0">
+                <a:solidFill>
+                  <a:srgbClr val="FFFFFF"/>
+                </a:solidFill>
+                <a:latin typeface="Calibri" pitchFamily="34" charset="0"/>
+                <a:ea typeface="Calibri" pitchFamily="34" charset="-122"/>
+                <a:cs typeface="Calibri" pitchFamily="34" charset="-120"/>
+              </a:rPr>
+              <a:t>Archivo: Registros_atencion_ciudadana_PARTICIPANTE.xlsx, hoja Padron_sintetico. Quedó pendiente ayer y es lo que vuelve trabajable la regla roja del semáforo.</a:t>
+            </a:r>
+            <a:endParaRPr lang="en-US" sz="1350" dirty="0"/>
+          </a:p>
+        </p:txBody>
+      </p:sp>
+    </p:spTree>
+  </p:cSld>
+  <p:clrMapOvr>
+    <a:masterClrMapping/>
+  </p:clrMapOvr>
+</p:sld>
+</file>
+
+<file path=ppt/slides/slide26.xml><?xml version="1.0" encoding="utf-8"?>
+<p:sld xmlns:a="http://schemas.openxmlformats.org/drawingml/2006/main" xmlns:r="http://schemas.openxmlformats.org/officeDocument/2006/relationships" xmlns:p="http://schemas.openxmlformats.org/presentationml/2006/main">
+  <p:cSld name="Justificacion">
+    <p:spTree>
+      <p:nvGrpSpPr>
+        <p:cNvPr id="1" name=""/>
+        <p:cNvGrpSpPr/>
+        <p:nvPr/>
+      </p:nvGrpSpPr>
+      <p:grpSpPr>
+        <a:xfrm>
+          <a:off x="0" y="0"/>
+          <a:ext cx="0" cy="0"/>
+          <a:chOff x="0" y="0"/>
+          <a:chExt cx="0" cy="0"/>
+        </a:xfrm>
+      </p:grpSpPr>
+      <p:sp>
+        <p:nvSpPr>
+          <p:cNvPr id="2" name="Text"/>
+          <p:cNvSpPr txBox="1"/>
+          <p:nvPr/>
+        </p:nvSpPr>
+        <p:spPr>
+          <a:xfrm>
+            <a:off x="566928" y="402336"/>
+            <a:ext cx="11057839" cy="749808"/>
+          </a:xfrm>
+          <a:prstGeom prst="rect">
+            <a:avLst/>
+          </a:prstGeom>
+          <a:noFill/>
+          <a:ln/>
+        </p:spPr>
+        <p:txBody>
+          <a:bodyPr wrap="square" lIns="0" tIns="0" rIns="0" bIns="0" rtlCol="0" anchor="t"/>
+          <a:lstStyle/>
+          <a:p>
+            <a:pPr algn="l" indent="0" marL="0">
+              <a:buNone/>
+            </a:pPr>
+            <a:r>
+              <a:rPr lang="en-US" sz="3200" b="1" dirty="0">
+                <a:solidFill>
+                  <a:srgbClr val="16262E"/>
+                </a:solidFill>
+                <a:latin typeface="Arial" pitchFamily="34" charset="0"/>
+                <a:ea typeface="Arial" pitchFamily="34" charset="-122"/>
+                <a:cs typeface="Arial" pitchFamily="34" charset="-120"/>
+              </a:rPr>
+              <a:t>Las tres preguntas de una auditoría</a:t>
+            </a:r>
+            <a:endParaRPr lang="en-US" sz="3200" dirty="0"/>
+          </a:p>
+        </p:txBody>
+      </p:sp>
+      <p:sp>
+        <p:nvSpPr>
+          <p:cNvPr id="3" name="Text"/>
+          <p:cNvSpPr txBox="1"/>
+          <p:nvPr/>
+        </p:nvSpPr>
+        <p:spPr>
+          <a:xfrm>
+            <a:off x="566928" y="1280160"/>
+            <a:ext cx="11057839" cy="731520"/>
+          </a:xfrm>
+          <a:prstGeom prst="rect">
+            <a:avLst/>
+          </a:prstGeom>
+          <a:noFill/>
+          <a:ln/>
+        </p:spPr>
+        <p:txBody>
+          <a:bodyPr wrap="square" lIns="0" tIns="0" rIns="0" bIns="0" rtlCol="0" anchor="t"/>
+          <a:lstStyle/>
+          <a:p>
+            <a:pPr indent="0" marL="0">
+              <a:buNone/>
+            </a:pPr>
+            <a:r>
+              <a:rPr lang="en-US" sz="1500" dirty="0">
+                <a:solidFill>
+                  <a:srgbClr val="5A6B73"/>
+                </a:solidFill>
+                <a:latin typeface="Calibri" pitchFamily="34" charset="0"/>
+                <a:ea typeface="Calibri" pitchFamily="34" charset="-122"/>
+                <a:cs typeface="Calibri" pitchFamily="34" charset="-120"/>
+              </a:rPr>
+              <a:t>Pendiente de ayer. Te las van a hacer sobre cualquier producto hecho con IA. El detalle está en el handout de ayer, sección 4: léela hoy.</a:t>
+            </a:r>
+            <a:endParaRPr lang="en-US" sz="1500" dirty="0"/>
+          </a:p>
+        </p:txBody>
+      </p:sp>
+      <p:sp>
+        <p:nvSpPr>
+          <p:cNvPr id="4" name="Shape"/>
+          <p:cNvSpPr/>
+          <p:nvPr/>
+        </p:nvSpPr>
+        <p:spPr>
+          <a:xfrm>
+            <a:off x="566928" y="2011680"/>
+            <a:ext cx="2558720" cy="2700000"/>
+          </a:xfrm>
+          <a:prstGeom prst="roundRect">
+            <a:avLst>
+              <a:gd name="adj" fmla="val 2998"/>
+            </a:avLst>
+          </a:prstGeom>
+          <a:solidFill>
+            <a:srgbClr val="F2F5F6"/>
+          </a:solidFill>
+          <a:ln w="12700">
+            <a:solidFill>
+              <a:srgbClr val="F2F5F6"/>
+            </a:solidFill>
+            <a:prstDash val="solid"/>
+          </a:ln>
+        </p:spPr>
+      </p:sp>
+      <p:sp>
+        <p:nvSpPr>
+          <p:cNvPr id="5" name="Text"/>
+          <p:cNvSpPr txBox="1"/>
+          <p:nvPr/>
+        </p:nvSpPr>
+        <p:spPr>
+          <a:xfrm>
+            <a:off x="804672" y="2249424"/>
+            <a:ext cx="2083232" cy="583184"/>
+          </a:xfrm>
+          <a:prstGeom prst="rect">
+            <a:avLst/>
+          </a:prstGeom>
+          <a:noFill/>
+          <a:ln/>
+        </p:spPr>
+        <p:txBody>
+          <a:bodyPr wrap="square" lIns="0" tIns="0" rIns="0" bIns="0" rtlCol="0" anchor="t"/>
+          <a:lstStyle/>
+          <a:p>
+            <a:pPr indent="0" marL="0">
+              <a:buNone/>
+            </a:pPr>
+            <a:r>
+              <a:rPr lang="en-US" sz="1600" b="1" dirty="0">
+                <a:solidFill>
+                  <a:srgbClr val="16262E"/>
+                </a:solidFill>
+                <a:latin typeface="Arial" pitchFamily="34" charset="0"/>
+                <a:ea typeface="Arial" pitchFamily="34" charset="-122"/>
+                <a:cs typeface="Arial" pitchFamily="34" charset="-120"/>
+              </a:rPr>
+              <a:t>¿Se justifica usar IA?</a:t>
+            </a:r>
+            <a:endParaRPr lang="en-US" sz="1600" dirty="0"/>
+          </a:p>
+        </p:txBody>
+      </p:sp>
+      <p:sp>
+        <p:nvSpPr>
+          <p:cNvPr id="6" name="Text"/>
+          <p:cNvSpPr txBox="1"/>
+          <p:nvPr/>
+        </p:nvSpPr>
+        <p:spPr>
+          <a:xfrm>
+            <a:off x="804672" y="2978912"/>
+            <a:ext cx="2083232" cy="1531776"/>
+          </a:xfrm>
+          <a:prstGeom prst="rect">
+            <a:avLst/>
+          </a:prstGeom>
+          <a:noFill/>
+          <a:ln/>
+        </p:spPr>
+        <p:txBody>
+          <a:bodyPr wrap="square" lIns="0" tIns="0" rIns="0" bIns="0" rtlCol="0" anchor="t"/>
+          <a:lstStyle/>
+          <a:p>
+            <a:pPr indent="0" marL="0">
+              <a:lnSpc>
+                <a:spcPct val="110000"/>
+              </a:lnSpc>
+              <a:buNone/>
+            </a:pPr>
+            <a:r>
+              <a:rPr lang="en-US" sz="1300" dirty="0">
+                <a:solidFill>
+                  <a:srgbClr val="16262E"/>
+                </a:solidFill>
+                <a:latin typeface="Calibri" pitchFamily="34" charset="0"/>
+                <a:ea typeface="Calibri" pitchFamily="34" charset="-122"/>
+                <a:cs typeface="Calibri" pitchFamily="34" charset="-120"/>
+              </a:rPr>
+              <a:t>Sí cuando hay más texto del que puedes leer, la tarea es repetitiva y alguien va a revisar. Nunca si hay efectos jurídicos o se necesita un número exacto.</a:t>
+            </a:r>
+            <a:endParaRPr lang="en-US" sz="1300" dirty="0"/>
+          </a:p>
+        </p:txBody>
+      </p:sp>
+      <p:sp>
+        <p:nvSpPr>
+          <p:cNvPr id="7" name="Shape"/>
+          <p:cNvSpPr/>
+          <p:nvPr/>
+        </p:nvSpPr>
+        <p:spPr>
+          <a:xfrm>
+            <a:off x="3399968" y="2011680"/>
+            <a:ext cx="2558720" cy="2700000"/>
+          </a:xfrm>
+          <a:prstGeom prst="roundRect">
+            <a:avLst>
+              <a:gd name="adj" fmla="val 2998"/>
+            </a:avLst>
+          </a:prstGeom>
+          <a:solidFill>
+            <a:srgbClr val="F2F5F6"/>
+          </a:solidFill>
+          <a:ln w="12700">
+            <a:solidFill>
+              <a:srgbClr val="F2F5F6"/>
+            </a:solidFill>
+            <a:prstDash val="solid"/>
+          </a:ln>
+        </p:spPr>
+      </p:sp>
+      <p:sp>
+        <p:nvSpPr>
+          <p:cNvPr id="8" name="Text"/>
+          <p:cNvSpPr txBox="1"/>
+          <p:nvPr/>
+        </p:nvSpPr>
+        <p:spPr>
+          <a:xfrm>
+            <a:off x="3637712" y="2249424"/>
+            <a:ext cx="2083232" cy="583184"/>
+          </a:xfrm>
+          <a:prstGeom prst="rect">
+            <a:avLst/>
+          </a:prstGeom>
+          <a:noFill/>
+          <a:ln/>
+        </p:spPr>
+        <p:txBody>
+          <a:bodyPr wrap="square" lIns="0" tIns="0" rIns="0" bIns="0" rtlCol="0" anchor="t"/>
+          <a:lstStyle/>
+          <a:p>
+            <a:pPr indent="0" marL="0">
+              <a:buNone/>
+            </a:pPr>
+            <a:r>
+              <a:rPr lang="en-US" sz="1600" b="1" dirty="0">
+                <a:solidFill>
+                  <a:srgbClr val="16262E"/>
+                </a:solidFill>
+                <a:latin typeface="Arial" pitchFamily="34" charset="0"/>
+                <a:ea typeface="Arial" pitchFamily="34" charset="-122"/>
+                <a:cs typeface="Arial" pitchFamily="34" charset="-120"/>
+              </a:rPr>
+              <a:t>¿Por qué esta herramienta?</a:t>
+            </a:r>
+            <a:endParaRPr lang="en-US" sz="1600" dirty="0"/>
+          </a:p>
+        </p:txBody>
+      </p:sp>
+      <p:sp>
+        <p:nvSpPr>
+          <p:cNvPr id="9" name="Text"/>
+          <p:cNvSpPr txBox="1"/>
+          <p:nvPr/>
+        </p:nvSpPr>
+        <p:spPr>
+          <a:xfrm>
+            <a:off x="3637712" y="2978912"/>
+            <a:ext cx="2083232" cy="1531776"/>
+          </a:xfrm>
+          <a:prstGeom prst="rect">
+            <a:avLst/>
+          </a:prstGeom>
+          <a:noFill/>
+          <a:ln/>
+        </p:spPr>
+        <p:txBody>
+          <a:bodyPr wrap="square" lIns="0" tIns="0" rIns="0" bIns="0" rtlCol="0" anchor="t"/>
+          <a:lstStyle/>
+          <a:p>
+            <a:pPr indent="0" marL="0">
+              <a:lnSpc>
+                <a:spcPct val="110000"/>
+              </a:lnSpc>
+              <a:buNone/>
+            </a:pPr>
+            <a:r>
+              <a:rPr lang="en-US" sz="1300" dirty="0">
+                <a:solidFill>
+                  <a:srgbClr val="16262E"/>
+                </a:solidFill>
+                <a:latin typeface="Calibri" pitchFamily="34" charset="0"/>
+                <a:ea typeface="Calibri" pitchFamily="34" charset="-122"/>
+                <a:cs typeface="Calibri" pitchFamily="34" charset="-120"/>
+              </a:rPr>
+              <a:t>Dónde se procesa la información y bajo qué contrato, si trabaja donde ya está el documento, y si la tarea es de texto y no de cálculo.</a:t>
+            </a:r>
+            <a:endParaRPr lang="en-US" sz="1300" dirty="0"/>
+          </a:p>
+        </p:txBody>
+      </p:sp>
+      <p:sp>
+        <p:nvSpPr>
+          <p:cNvPr id="10" name="Shape"/>
+          <p:cNvSpPr/>
+          <p:nvPr/>
+        </p:nvSpPr>
+        <p:spPr>
+          <a:xfrm>
+            <a:off x="6233008" y="2011680"/>
+            <a:ext cx="2558720" cy="2700000"/>
+          </a:xfrm>
+          <a:prstGeom prst="roundRect">
+            <a:avLst>
+              <a:gd name="adj" fmla="val 2998"/>
+            </a:avLst>
+          </a:prstGeom>
+          <a:solidFill>
+            <a:srgbClr val="F2F5F6"/>
+          </a:solidFill>
+          <a:ln w="12700">
+            <a:solidFill>
+              <a:srgbClr val="F2F5F6"/>
+            </a:solidFill>
+            <a:prstDash val="solid"/>
+          </a:ln>
+        </p:spPr>
+      </p:sp>
+      <p:sp>
+        <p:nvSpPr>
+          <p:cNvPr id="11" name="Text"/>
+          <p:cNvSpPr txBox="1"/>
+          <p:nvPr/>
+        </p:nvSpPr>
+        <p:spPr>
+          <a:xfrm>
+            <a:off x="6470752" y="2249424"/>
+            <a:ext cx="2083232" cy="583184"/>
+          </a:xfrm>
+          <a:prstGeom prst="rect">
+            <a:avLst/>
+          </a:prstGeom>
+          <a:noFill/>
+          <a:ln/>
+        </p:spPr>
+        <p:txBody>
+          <a:bodyPr wrap="square" lIns="0" tIns="0" rIns="0" bIns="0" rtlCol="0" anchor="t"/>
+          <a:lstStyle/>
+          <a:p>
+            <a:pPr indent="0" marL="0">
+              <a:buNone/>
+            </a:pPr>
+            <a:r>
+              <a:rPr lang="en-US" sz="1600" b="1" dirty="0">
+                <a:solidFill>
+                  <a:srgbClr val="16262E"/>
+                </a:solidFill>
+                <a:latin typeface="Arial" pitchFamily="34" charset="0"/>
+                <a:ea typeface="Arial" pitchFamily="34" charset="-122"/>
+                <a:cs typeface="Arial" pitchFamily="34" charset="-120"/>
+              </a:rPr>
+              <a:t>¿Qué no puede hacer?</a:t>
+            </a:r>
+            <a:endParaRPr lang="en-US" sz="1600" dirty="0"/>
+          </a:p>
+        </p:txBody>
+      </p:sp>
+      <p:sp>
+        <p:nvSpPr>
+          <p:cNvPr id="12" name="Text"/>
+          <p:cNvSpPr txBox="1"/>
+          <p:nvPr/>
+        </p:nvSpPr>
+        <p:spPr>
+          <a:xfrm>
+            <a:off x="6470752" y="2978912"/>
+            <a:ext cx="2083232" cy="1531776"/>
+          </a:xfrm>
+          <a:prstGeom prst="rect">
+            <a:avLst/>
+          </a:prstGeom>
+          <a:noFill/>
+          <a:ln/>
+        </p:spPr>
+        <p:txBody>
+          <a:bodyPr wrap="square" lIns="0" tIns="0" rIns="0" bIns="0" rtlCol="0" anchor="t"/>
+          <a:lstStyle/>
+          <a:p>
+            <a:pPr indent="0" marL="0">
+              <a:lnSpc>
+                <a:spcPct val="110000"/>
+              </a:lnSpc>
+              <a:buNone/>
+            </a:pPr>
+            <a:r>
+              <a:rPr lang="en-US" sz="1300" dirty="0">
+                <a:solidFill>
+                  <a:srgbClr val="16262E"/>
+                </a:solidFill>
+                <a:latin typeface="Calibri" pitchFamily="34" charset="0"/>
+                <a:ea typeface="Calibri" pitchFamily="34" charset="-122"/>
+                <a:cs typeface="Calibri" pitchFamily="34" charset="-120"/>
+              </a:rPr>
+              <a:t>Inventa, trae sesgos, tiene un límite de lectura y no sabe qué importa. Lo declaras por escrito en cada producto que entregues.</a:t>
+            </a:r>
+            <a:endParaRPr lang="en-US" sz="1300" dirty="0"/>
+          </a:p>
+        </p:txBody>
+      </p:sp>
+      <p:sp>
+        <p:nvSpPr>
+          <p:cNvPr id="13" name="Shape"/>
+          <p:cNvSpPr/>
+          <p:nvPr/>
+        </p:nvSpPr>
+        <p:spPr>
+          <a:xfrm>
+            <a:off x="9066047" y="2011680"/>
+            <a:ext cx="2558720" cy="2700000"/>
+          </a:xfrm>
+          <a:prstGeom prst="roundRect">
+            <a:avLst>
+              <a:gd name="adj" fmla="val 2998"/>
+            </a:avLst>
+          </a:prstGeom>
+          <a:solidFill>
+            <a:srgbClr val="F7E4D8"/>
+          </a:solidFill>
+          <a:ln w="12700">
+            <a:solidFill>
+              <a:srgbClr val="F7E4D8"/>
+            </a:solidFill>
+            <a:prstDash val="solid"/>
+          </a:ln>
+        </p:spPr>
+      </p:sp>
+      <p:sp>
+        <p:nvSpPr>
+          <p:cNvPr id="14" name="Text"/>
+          <p:cNvSpPr txBox="1"/>
+          <p:nvPr/>
+        </p:nvSpPr>
+        <p:spPr>
+          <a:xfrm>
+            <a:off x="9303791" y="2249424"/>
+            <a:ext cx="2083232" cy="583184"/>
+          </a:xfrm>
+          <a:prstGeom prst="rect">
+            <a:avLst/>
+          </a:prstGeom>
+          <a:noFill/>
+          <a:ln/>
+        </p:spPr>
+        <p:txBody>
+          <a:bodyPr wrap="square" lIns="0" tIns="0" rIns="0" bIns="0" rtlCol="0" anchor="t"/>
+          <a:lstStyle/>
+          <a:p>
+            <a:pPr indent="0" marL="0">
+              <a:buNone/>
+            </a:pPr>
+            <a:r>
+              <a:rPr lang="en-US" sz="1600" b="1" dirty="0">
+                <a:solidFill>
+                  <a:srgbClr val="16262E"/>
+                </a:solidFill>
+                <a:latin typeface="Arial" pitchFamily="34" charset="0"/>
+                <a:ea typeface="Arial" pitchFamily="34" charset="-122"/>
+                <a:cs typeface="Arial" pitchFamily="34" charset="-120"/>
+              </a:rPr>
+              <a:t>Tu ficha, de tarea</a:t>
+            </a:r>
+            <a:endParaRPr lang="en-US" sz="1600" dirty="0"/>
+          </a:p>
+        </p:txBody>
+      </p:sp>
+      <p:sp>
+        <p:nvSpPr>
+          <p:cNvPr id="15" name="Text"/>
+          <p:cNvSpPr txBox="1"/>
+          <p:nvPr/>
+        </p:nvSpPr>
+        <p:spPr>
+          <a:xfrm>
+            <a:off x="9303791" y="2978912"/>
+            <a:ext cx="2083232" cy="1531776"/>
+          </a:xfrm>
+          <a:prstGeom prst="rect">
+            <a:avLst/>
+          </a:prstGeom>
+          <a:noFill/>
+          <a:ln/>
+        </p:spPr>
+        <p:txBody>
+          <a:bodyPr wrap="square" lIns="0" tIns="0" rIns="0" bIns="0" rtlCol="0" anchor="t"/>
+          <a:lstStyle/>
+          <a:p>
+            <a:pPr indent="0" marL="0">
+              <a:lnSpc>
+                <a:spcPct val="110000"/>
+              </a:lnSpc>
+              <a:buNone/>
+            </a:pPr>
+            <a:r>
+              <a:rPr lang="en-US" sz="1300" dirty="0">
+                <a:solidFill>
+                  <a:srgbClr val="16262E"/>
+                </a:solidFill>
+                <a:latin typeface="Calibri" pitchFamily="34" charset="0"/>
+                <a:ea typeface="Calibri" pitchFamily="34" charset="-122"/>
+                <a:cs typeface="Calibri" pitchFamily="34" charset="-120"/>
+              </a:rPr>
+              <a:t>La llenas con estas tres preguntas y le pides a Copilot que la critique: hoy aprendes a pedirlo bien. Se entrega el jueves antes de las 9:00.</a:t>
+            </a:r>
+            <a:endParaRPr lang="en-US" sz="1300" dirty="0"/>
+          </a:p>
+        </p:txBody>
+      </p:sp>
+      <p:sp>
+        <p:nvSpPr>
+          <p:cNvPr id="16" name="Shape"/>
+          <p:cNvSpPr/>
+          <p:nvPr/>
+        </p:nvSpPr>
+        <p:spPr>
+          <a:xfrm>
+            <a:off x="566928" y="5193792"/>
+            <a:ext cx="11057839" cy="777240"/>
+          </a:xfrm>
+          <a:prstGeom prst="roundRect">
+            <a:avLst>
+              <a:gd name="adj" fmla="val 8235"/>
+            </a:avLst>
+          </a:prstGeom>
+          <a:solidFill>
+            <a:srgbClr val="16262E"/>
+          </a:solidFill>
+          <a:ln w="12700">
+            <a:solidFill>
+              <a:srgbClr val="16262E"/>
+            </a:solidFill>
+            <a:prstDash val="solid"/>
+          </a:ln>
+        </p:spPr>
+      </p:sp>
+      <p:sp>
+        <p:nvSpPr>
+          <p:cNvPr id="17" name="Text"/>
+          <p:cNvSpPr txBox="1"/>
+          <p:nvPr/>
+        </p:nvSpPr>
+        <p:spPr>
+          <a:xfrm>
+            <a:off x="841248" y="5193792"/>
+            <a:ext cx="10509199" cy="777240"/>
+          </a:xfrm>
+          <a:prstGeom prst="rect">
+            <a:avLst/>
+          </a:prstGeom>
+          <a:noFill/>
+          <a:ln/>
+        </p:spPr>
+        <p:txBody>
+          <a:bodyPr wrap="square" lIns="0" tIns="0" rIns="0" bIns="0" rtlCol="0" anchor="ctr"/>
+          <a:lstStyle/>
+          <a:p>
+            <a:pPr indent="0" marL="0">
+              <a:buNone/>
+            </a:pPr>
+            <a:r>
+              <a:rPr lang="en-US" sz="1350" dirty="0">
+                <a:solidFill>
+                  <a:srgbClr val="FFFFFF"/>
+                </a:solidFill>
+                <a:latin typeface="Calibri" pitchFamily="34" charset="0"/>
+                <a:ea typeface="Calibri" pitchFamily="34" charset="-122"/>
+                <a:cs typeface="Calibri" pitchFamily="34" charset="-120"/>
+              </a:rPr>
+              <a:t>S01_ApellidoNombre_FichaIdoneidad.docx, con el asunto del correo igual al nombre del archivo. Es el formato 2 de Formatos_de_trabajo_curso_IA.docx.</a:t>
+            </a:r>
+            <a:endParaRPr lang="en-US" sz="1350" dirty="0"/>
+          </a:p>
+        </p:txBody>
+      </p:sp>
+    </p:spTree>
+  </p:cSld>
+  <p:clrMapOvr>
+    <a:masterClrMapping/>
+  </p:clrMapOvr>
+</p:sld>
+</file>
+
+<file path=ppt/slides/slide27.xml><?xml version="1.0" encoding="utf-8"?>
+<p:sld xmlns:a="http://schemas.openxmlformats.org/drawingml/2006/main" xmlns:r="http://schemas.openxmlformats.org/officeDocument/2006/relationships" xmlns:p="http://schemas.openxmlformats.org/presentationml/2006/main">
+  <p:cSld name="Receso charla">
+    <p:bg>
+      <p:bgPr>
+        <a:solidFill>
+          <a:srgbClr val="16262E"/>
+        </a:solidFill>
+        <a:effectLst/>
+      </p:bgPr>
+    </p:bg>
+    <p:spTree>
+      <p:nvGrpSpPr>
+        <p:cNvPr id="1" name=""/>
+        <p:cNvGrpSpPr/>
+        <p:nvPr/>
+      </p:nvGrpSpPr>
+      <p:grpSpPr>
+        <a:xfrm>
+          <a:off x="0" y="0"/>
+          <a:ext cx="0" cy="0"/>
+          <a:chOff x="0" y="0"/>
+          <a:chExt cx="0" cy="0"/>
+        </a:xfrm>
+      </p:grpSpPr>
+      <p:sp>
+        <p:nvSpPr>
+          <p:cNvPr id="2" name="Shape"/>
+          <p:cNvSpPr/>
+          <p:nvPr/>
+        </p:nvSpPr>
+        <p:spPr>
+          <a:xfrm>
+            <a:off x="566928" y="2331720"/>
+            <a:ext cx="1371600" cy="1371600"/>
+          </a:xfrm>
+          <a:prstGeom prst="ellipse">
+            <a:avLst/>
+          </a:prstGeom>
+          <a:solidFill>
+            <a:srgbClr val="2E7D7D"/>
+          </a:solidFill>
+          <a:ln w="12700">
+            <a:solidFill>
+              <a:srgbClr val="2E7D7D"/>
+            </a:solidFill>
+            <a:prstDash val="solid"/>
+          </a:ln>
+        </p:spPr>
+      </p:sp>
+      <p:sp>
+        <p:nvSpPr>
+          <p:cNvPr id="3" name="Text"/>
+          <p:cNvSpPr txBox="1"/>
+          <p:nvPr/>
+        </p:nvSpPr>
+        <p:spPr>
+          <a:xfrm>
+            <a:off x="566928" y="2331720"/>
+            <a:ext cx="1371600" cy="1371600"/>
+          </a:xfrm>
+          <a:prstGeom prst="rect">
+            <a:avLst/>
+          </a:prstGeom>
+          <a:noFill/>
+          <a:ln/>
+        </p:spPr>
+        <p:txBody>
+          <a:bodyPr wrap="square" lIns="0" tIns="0" rIns="0" bIns="0" rtlCol="0" anchor="ctr"/>
+          <a:lstStyle/>
+          <a:p>
+            <a:pPr algn="ctr" indent="0" marL="0">
+              <a:buNone/>
+            </a:pPr>
+            <a:r>
+              <a:rPr lang="en-US" sz="4400" b="1" dirty="0">
+                <a:solidFill>
+                  <a:srgbClr val="FFFFFF"/>
+                </a:solidFill>
+                <a:latin typeface="Arial" pitchFamily="34" charset="0"/>
+                <a:ea typeface="Arial" pitchFamily="34" charset="-122"/>
+                <a:cs typeface="Arial" pitchFamily="34" charset="-120"/>
+              </a:rPr>
+              <a:t>10</a:t>
+            </a:r>
+            <a:endParaRPr lang="en-US" sz="4400" dirty="0"/>
+          </a:p>
+        </p:txBody>
+      </p:sp>
+      <p:sp>
+        <p:nvSpPr>
+          <p:cNvPr id="4" name="Text"/>
+          <p:cNvSpPr txBox="1"/>
+          <p:nvPr/>
+        </p:nvSpPr>
+        <p:spPr>
+          <a:xfrm>
+            <a:off x="2487168" y="2331720"/>
+            <a:ext cx="8778240" cy="365760"/>
+          </a:xfrm>
+          <a:prstGeom prst="rect">
+            <a:avLst/>
+          </a:prstGeom>
+          <a:noFill/>
+          <a:ln/>
+        </p:spPr>
+        <p:txBody>
+          <a:bodyPr wrap="square" lIns="0" tIns="0" rIns="0" bIns="0" rtlCol="0" anchor="ctr"/>
+          <a:lstStyle/>
+          <a:p>
+            <a:pPr indent="0" marL="0">
+              <a:buNone/>
+            </a:pPr>
+            <a:r>
+              <a:rPr lang="en-US" sz="1400" b="1" spc="200" kern="0" dirty="0">
+                <a:solidFill>
+                  <a:srgbClr val="D7E7E7"/>
+                </a:solidFill>
+                <a:latin typeface="Calibri" pitchFamily="34" charset="0"/>
+                <a:ea typeface="Calibri" pitchFamily="34" charset="-122"/>
+                <a:cs typeface="Calibri" pitchFamily="34" charset="-120"/>
+              </a:rPr>
+              <a:t>MINUTOS DE RECESO</a:t>
+            </a:r>
+            <a:endParaRPr lang="en-US" sz="1400" dirty="0"/>
+          </a:p>
+        </p:txBody>
+      </p:sp>
+      <p:sp>
+        <p:nvSpPr>
+          <p:cNvPr id="5" name="Text"/>
+          <p:cNvSpPr txBox="1"/>
+          <p:nvPr/>
+        </p:nvSpPr>
+        <p:spPr>
+          <a:xfrm>
+            <a:off x="2487168" y="2697480"/>
+            <a:ext cx="8961120" cy="1188720"/>
+          </a:xfrm>
+          <a:prstGeom prst="rect">
+            <a:avLst/>
+          </a:prstGeom>
+          <a:noFill/>
+          <a:ln/>
+        </p:spPr>
+        <p:txBody>
+          <a:bodyPr wrap="square" lIns="0" tIns="0" rIns="0" bIns="0" rtlCol="0" anchor="t"/>
+          <a:lstStyle/>
+          <a:p>
+            <a:pPr indent="0" marL="0">
+              <a:buNone/>
+            </a:pPr>
+            <a:r>
+              <a:rPr lang="en-US" sz="3400" b="1" dirty="0">
+                <a:solidFill>
+                  <a:srgbClr val="FFFFFF"/>
+                </a:solidFill>
+                <a:latin typeface="Arial" pitchFamily="34" charset="0"/>
+                <a:ea typeface="Arial" pitchFamily="34" charset="-122"/>
+                <a:cs typeface="Arial" pitchFamily="34" charset="-120"/>
+              </a:rPr>
+              <a:t>Quien quiera el mapa con más detalle, se queda</a:t>
+            </a:r>
+            <a:endParaRPr lang="en-US" sz="3400" dirty="0"/>
+          </a:p>
+        </p:txBody>
+      </p:sp>
+      <p:sp>
+        <p:nvSpPr>
+          <p:cNvPr id="6" name="Text"/>
+          <p:cNvSpPr txBox="1"/>
+          <p:nvPr/>
+        </p:nvSpPr>
+        <p:spPr>
+          <a:xfrm>
+            <a:off x="2487168" y="3990000"/>
+            <a:ext cx="8961120" cy="365760"/>
+          </a:xfrm>
+          <a:prstGeom prst="rect">
+            <a:avLst/>
+          </a:prstGeom>
+          <a:noFill/>
+          <a:ln/>
+        </p:spPr>
+        <p:txBody>
+          <a:bodyPr wrap="square" lIns="0" tIns="0" rIns="0" bIns="0" rtlCol="0" anchor="t"/>
+          <a:lstStyle/>
+          <a:p>
+            <a:pPr indent="0" marL="0">
+              <a:buNone/>
+            </a:pPr>
+            <a:r>
+              <a:rPr lang="en-US" sz="1500" dirty="0">
+                <a:solidFill>
+                  <a:srgbClr val="D7E7E7"/>
+                </a:solidFill>
+                <a:latin typeface="Calibri" pitchFamily="34" charset="0"/>
+                <a:ea typeface="Calibri" pitchFamily="34" charset="-122"/>
+                <a:cs typeface="Calibri" pitchFamily="34" charset="-120"/>
+              </a:rPr>
+              <a:t>Tres láminas y cero fórmulas. El resto del grupo vuelve a las 10:25 en punto.</a:t>
+            </a:r>
+            <a:endParaRPr lang="en-US" sz="1500" dirty="0"/>
+          </a:p>
+        </p:txBody>
+      </p:sp>
+      <p:sp>
+        <p:nvSpPr>
+          <p:cNvPr id="7" name="Shape"/>
+          <p:cNvSpPr/>
+          <p:nvPr/>
+        </p:nvSpPr>
+        <p:spPr>
+          <a:xfrm>
+            <a:off x="9338767" y="457200"/>
+            <a:ext cx="2286000" cy="347472"/>
+          </a:xfrm>
+          <a:prstGeom prst="roundRect">
+            <a:avLst>
+              <a:gd name="adj" fmla="val 50000"/>
+            </a:avLst>
           </a:prstGeom>
           <a:solidFill>
             <a:srgbClr val="24404E"/>
@@ -9912,14 +13674,14 @@
       </p:sp>
       <p:sp>
         <p:nvSpPr>
-          <p:cNvPr id="3" name="Text 1"/>
-          <p:cNvSpPr txBox="1"/>
-          <p:nvPr/>
-        </p:nvSpPr>
-        <p:spPr>
-          <a:xfrm>
-            <a:off x="566928" y="685800"/>
-            <a:ext cx="10424160" cy="365760"/>
+          <p:cNvPr id="8" name="Text"/>
+          <p:cNvSpPr txBox="1"/>
+          <p:nvPr/>
+        </p:nvSpPr>
+        <p:spPr>
+          <a:xfrm>
+            <a:off x="9338767" y="457200"/>
+            <a:ext cx="2286000" cy="347472"/>
           </a:xfrm>
           <a:prstGeom prst="rect">
             <a:avLst/>
@@ -9931,85 +13693,306 @@
           <a:bodyPr wrap="square" lIns="0" tIns="0" rIns="0" bIns="0" rtlCol="0" anchor="ctr"/>
           <a:lstStyle/>
           <a:p>
-            <a:pPr indent="0" marL="0">
-              <a:buNone/>
-            </a:pPr>
-            <a:r>
-              <a:rPr lang="en-US" sz="1400" b="1" spc="200" kern="0" dirty="0">
-                <a:solidFill>
-                  <a:srgbClr val="C85A28"/>
+            <a:pPr algn="ctr" indent="0" marL="0">
+              <a:buNone/>
+            </a:pPr>
+            <a:r>
+              <a:rPr lang="en-US" sz="1300" b="1" dirty="0">
+                <a:solidFill>
+                  <a:srgbClr val="FFFFFF"/>
+                </a:solidFill>
+                <a:latin typeface="Arial" pitchFamily="34" charset="0"/>
+                <a:ea typeface="Arial" pitchFamily="34" charset="-122"/>
+                <a:cs typeface="Arial" pitchFamily="34" charset="-120"/>
+              </a:rPr>
+              <a:t>10:15 a 10:25</a:t>
+            </a:r>
+            <a:endParaRPr lang="en-US" sz="1300" dirty="0"/>
+          </a:p>
+        </p:txBody>
+      </p:sp>
+    </p:spTree>
+  </p:cSld>
+  <p:clrMapOvr>
+    <a:masterClrMapping/>
+  </p:clrMapOvr>
+</p:sld>
+</file>
+
+<file path=ppt/slides/slide28.xml><?xml version="1.0" encoding="utf-8"?>
+<p:sld xmlns:a="http://schemas.openxmlformats.org/drawingml/2006/main" xmlns:r="http://schemas.openxmlformats.org/officeDocument/2006/relationships" xmlns:p="http://schemas.openxmlformats.org/presentationml/2006/main">
+  <p:cSld name="Estadistica y ML">
+    <p:spTree>
+      <p:nvGrpSpPr>
+        <p:cNvPr id="1" name=""/>
+        <p:cNvGrpSpPr/>
+        <p:nvPr/>
+      </p:nvGrpSpPr>
+      <p:grpSpPr>
+        <a:xfrm>
+          <a:off x="0" y="0"/>
+          <a:ext cx="0" cy="0"/>
+          <a:chOff x="0" y="0"/>
+          <a:chExt cx="0" cy="0"/>
+        </a:xfrm>
+      </p:grpSpPr>
+      <p:sp>
+        <p:nvSpPr>
+          <p:cNvPr id="8" name="Text"/>
+          <p:cNvSpPr txBox="1"/>
+          <p:nvPr/>
+        </p:nvSpPr>
+        <p:spPr>
+          <a:xfrm>
+            <a:off x="566928" y="402336"/>
+            <a:ext cx="11057839" cy="749808"/>
+          </a:xfrm>
+          <a:prstGeom prst="rect">
+            <a:avLst/>
+          </a:prstGeom>
+          <a:noFill/>
+          <a:ln/>
+        </p:spPr>
+        <p:txBody>
+          <a:bodyPr wrap="square" lIns="0" tIns="0" rIns="0" bIns="0" rtlCol="0" anchor="t"/>
+          <a:lstStyle/>
+          <a:p>
+            <a:pPr algn="l" indent="0" marL="0">
+              <a:buNone/>
+            </a:pPr>
+            <a:r>
+              <a:rPr lang="en-US" sz="3200" b="1" dirty="0">
+                <a:solidFill>
+                  <a:srgbClr val="16262E"/>
+                </a:solidFill>
+                <a:latin typeface="Arial" pitchFamily="34" charset="0"/>
+                <a:ea typeface="Arial" pitchFamily="34" charset="-122"/>
+                <a:cs typeface="Arial" pitchFamily="34" charset="-120"/>
+              </a:rPr>
+              <a:t>De la estadística al aprendizaje automático</a:t>
+            </a:r>
+            <a:endParaRPr lang="en-US" sz="3200" dirty="0"/>
+          </a:p>
+        </p:txBody>
+      </p:sp>
+      <p:sp>
+        <p:nvSpPr>
+          <p:cNvPr id="9" name="Text"/>
+          <p:cNvSpPr txBox="1"/>
+          <p:nvPr/>
+        </p:nvSpPr>
+        <p:spPr>
+          <a:xfrm>
+            <a:off x="566928" y="1280160"/>
+            <a:ext cx="11057839" cy="731520"/>
+          </a:xfrm>
+          <a:prstGeom prst="rect">
+            <a:avLst/>
+          </a:prstGeom>
+          <a:noFill/>
+          <a:ln/>
+        </p:spPr>
+        <p:txBody>
+          <a:bodyPr wrap="square" lIns="0" tIns="0" rIns="0" bIns="0" rtlCol="0" anchor="t"/>
+          <a:lstStyle/>
+          <a:p>
+            <a:pPr indent="0" marL="0">
+              <a:buNone/>
+            </a:pPr>
+            <a:r>
+              <a:rPr lang="en-US" sz="1500" dirty="0">
+                <a:solidFill>
+                  <a:srgbClr val="5A6B73"/>
                 </a:solidFill>
                 <a:latin typeface="Calibri" pitchFamily="34" charset="0"/>
                 <a:ea typeface="Calibri" pitchFamily="34" charset="-122"/>
                 <a:cs typeface="Calibri" pitchFamily="34" charset="-120"/>
               </a:rPr>
-              <a:t>AL SALIR DE HOY</a:t>
-            </a:r>
-            <a:endParaRPr lang="en-US" sz="1400" dirty="0"/>
-          </a:p>
-        </p:txBody>
-      </p:sp>
-      <p:sp>
-        <p:nvSpPr>
-          <p:cNvPr id="4" name="Text 2"/>
-          <p:cNvSpPr txBox="1"/>
-          <p:nvPr/>
-        </p:nvSpPr>
-        <p:spPr>
-          <a:xfrm>
-            <a:off x="566928" y="1097280"/>
-            <a:ext cx="10607040" cy="731520"/>
-          </a:xfrm>
-          <a:prstGeom prst="rect">
-            <a:avLst/>
-          </a:prstGeom>
-          <a:noFill/>
-          <a:ln/>
-        </p:spPr>
-        <p:txBody>
-          <a:bodyPr wrap="square" lIns="0" tIns="0" rIns="0" bIns="0" rtlCol="0" anchor="ctr"/>
-          <a:lstStyle/>
-          <a:p>
-            <a:pPr indent="0" marL="0">
-              <a:buNone/>
-            </a:pPr>
-            <a:r>
-              <a:rPr lang="en-US" sz="3000" b="1" dirty="0">
-                <a:solidFill>
-                  <a:srgbClr val="FFFFFF"/>
+              <a:t>Casi todo el aparato es el mismo: minimizar el error. Lo que cambia es la pregunta que le haces al modelo.</a:t>
+            </a:r>
+            <a:endParaRPr lang="en-US" sz="1500" dirty="0"/>
+          </a:p>
+        </p:txBody>
+      </p:sp>
+      <p:sp>
+        <p:nvSpPr>
+          <p:cNvPr id="2" name="Shape"/>
+          <p:cNvSpPr/>
+          <p:nvPr/>
+        </p:nvSpPr>
+        <p:spPr>
+          <a:xfrm>
+            <a:off x="566928" y="1810512"/>
+            <a:ext cx="5460655" cy="3843648"/>
+          </a:xfrm>
+          <a:prstGeom prst="roundRect">
+            <a:avLst>
+              <a:gd name="adj" fmla="val 2933"/>
+            </a:avLst>
+          </a:prstGeom>
+          <a:solidFill>
+            <a:srgbClr val="D7E7E7"/>
+          </a:solidFill>
+          <a:ln w="12700">
+            <a:solidFill>
+              <a:srgbClr val="D7E7E7"/>
+            </a:solidFill>
+            <a:prstDash val="solid"/>
+          </a:ln>
+        </p:spPr>
+      </p:sp>
+      <p:sp>
+        <p:nvSpPr>
+          <p:cNvPr id="3" name="Text"/>
+          <p:cNvSpPr txBox="1"/>
+          <p:nvPr/>
+        </p:nvSpPr>
+        <p:spPr>
+          <a:xfrm>
+            <a:off x="841248" y="2029968"/>
+            <a:ext cx="4912015" cy="365760"/>
+          </a:xfrm>
+          <a:prstGeom prst="rect">
+            <a:avLst/>
+          </a:prstGeom>
+          <a:noFill/>
+          <a:ln/>
+        </p:spPr>
+        <p:txBody>
+          <a:bodyPr wrap="square" lIns="0" tIns="0" rIns="0" bIns="0" rtlCol="0" anchor="t"/>
+          <a:lstStyle/>
+          <a:p>
+            <a:pPr indent="0" marL="0">
+              <a:buNone/>
+            </a:pPr>
+            <a:r>
+              <a:rPr lang="en-US" sz="1700" b="1" dirty="0">
+                <a:solidFill>
+                  <a:srgbClr val="2E7D7D"/>
                 </a:solidFill>
                 <a:latin typeface="Arial" pitchFamily="34" charset="0"/>
                 <a:ea typeface="Arial" pitchFamily="34" charset="-122"/>
                 <a:cs typeface="Arial" pitchFamily="34" charset="-120"/>
               </a:rPr>
-              <a:t>Lo que entregas y lo que sigue</a:t>
-            </a:r>
-            <a:endParaRPr lang="en-US" sz="3000" dirty="0"/>
-          </a:p>
-        </p:txBody>
-      </p:sp>
-      <p:sp>
-        <p:nvSpPr>
-          <p:cNvPr id="5" name="Shape 3"/>
+              <a:t>Explicar: la estadística que ya haces</a:t>
+            </a:r>
+            <a:endParaRPr lang="en-US" sz="1700" dirty="0"/>
+          </a:p>
+        </p:txBody>
+      </p:sp>
+      <p:sp>
+        <p:nvSpPr>
+          <p:cNvPr id="4" name="Text"/>
+          <p:cNvSpPr txBox="1"/>
+          <p:nvPr/>
+        </p:nvSpPr>
+        <p:spPr>
+          <a:xfrm>
+            <a:off x="841248" y="2560320"/>
+            <a:ext cx="4912015" cy="2800000"/>
+          </a:xfrm>
+          <a:prstGeom prst="rect">
+            <a:avLst/>
+          </a:prstGeom>
+          <a:noFill/>
+          <a:ln/>
+        </p:spPr>
+        <p:txBody>
+          <a:bodyPr wrap="square" lIns="0" tIns="0" rIns="0" bIns="0" rtlCol="0" anchor="t"/>
+          <a:lstStyle/>
+          <a:p>
+            <a:pPr indent="0" marL="0">
+              <a:lnSpc>
+                <a:spcPct val="110000"/>
+              </a:lnSpc>
+              <a:spcAft>
+                <a:spcPts val="800"/>
+              </a:spcAft>
+              <a:buNone/>
+            </a:pPr>
+            <a:r>
+              <a:rPr lang="en-US" sz="1300" dirty="0">
+                <a:solidFill>
+                  <a:srgbClr val="16262E"/>
+                </a:solidFill>
+                <a:latin typeface="Calibri" pitchFamily="34" charset="0"/>
+                <a:ea typeface="Calibri" pitchFamily="34" charset="-122"/>
+                <a:cs typeface="Calibri" pitchFamily="34" charset="-120"/>
+              </a:rPr>
+              <a:t>Quieres saber si X causa Y y con cuánta confianza. El coeficiente y su intervalo son la respuesta.</a:t>
+            </a:r>
+            <a:endParaRPr lang="en-US" sz="1300" dirty="0"/>
+          </a:p>
+          <a:p>
+            <a:pPr indent="0" marL="0">
+              <a:lnSpc>
+                <a:spcPct val="110000"/>
+              </a:lnSpc>
+              <a:spcAft>
+                <a:spcPts val="800"/>
+              </a:spcAft>
+              <a:buNone/>
+            </a:pPr>
+            <a:r>
+              <a:rPr lang="en-US" sz="1300" dirty="0">
+                <a:solidFill>
+                  <a:srgbClr val="16262E"/>
+                </a:solidFill>
+                <a:latin typeface="Calibri" pitchFamily="34" charset="0"/>
+                <a:ea typeface="Calibri" pitchFamily="34" charset="-122"/>
+                <a:cs typeface="Calibri" pitchFamily="34" charset="-120"/>
+              </a:rPr>
+              <a:t>El modelo tiene que ser legible: una regresión se audita parámetro por parámetro.</a:t>
+            </a:r>
+            <a:endParaRPr lang="en-US" sz="1300" dirty="0"/>
+          </a:p>
+          <a:p>
+            <a:pPr indent="0" marL="0">
+              <a:lnSpc>
+                <a:spcPct val="110000"/>
+              </a:lnSpc>
+              <a:spcAft>
+                <a:spcPts val="800"/>
+              </a:spcAft>
+              <a:buNone/>
+            </a:pPr>
+            <a:r>
+              <a:rPr lang="en-US" sz="1300" dirty="0">
+                <a:solidFill>
+                  <a:srgbClr val="16262E"/>
+                </a:solidFill>
+                <a:latin typeface="Calibri" pitchFamily="34" charset="0"/>
+                <a:ea typeface="Calibri" pitchFamily="34" charset="-122"/>
+                <a:cs typeface="Calibri" pitchFamily="34" charset="-120"/>
+              </a:rPr>
+              <a:t>El riesgo que se cuida: concluir una relación que no existe.</a:t>
+            </a:r>
+            <a:endParaRPr lang="en-US" sz="1300" dirty="0"/>
+          </a:p>
+        </p:txBody>
+      </p:sp>
+      <p:sp>
+        <p:nvSpPr>
+          <p:cNvPr id="5" name="Shape"/>
           <p:cNvSpPr/>
           <p:nvPr/>
         </p:nvSpPr>
         <p:spPr>
           <a:xfrm>
-            <a:off x="566928" y="2011680"/>
-            <a:ext cx="11057839" cy="649224"/>
+            <a:off x="6164511" y="1810512"/>
+            <a:ext cx="5460655" cy="3843648"/>
           </a:xfrm>
           <a:prstGeom prst="roundRect">
             <a:avLst>
-              <a:gd name="adj" fmla="val 9859"/>
+              <a:gd name="adj" fmla="val 2933"/>
             </a:avLst>
           </a:prstGeom>
           <a:solidFill>
-            <a:srgbClr val="24404E"/>
+            <a:srgbClr val="F2F5F6"/>
           </a:solidFill>
           <a:ln w="12700">
             <a:solidFill>
-              <a:srgbClr val="24404E"/>
+              <a:srgbClr val="F2F5F6"/>
             </a:solidFill>
             <a:prstDash val="solid"/>
           </a:ln>
@@ -10017,24 +14000,156 @@
       </p:sp>
       <p:sp>
         <p:nvSpPr>
-          <p:cNvPr id="6" name="Shape 4"/>
+          <p:cNvPr id="6" name="Text"/>
+          <p:cNvSpPr txBox="1"/>
+          <p:nvPr/>
+        </p:nvSpPr>
+        <p:spPr>
+          <a:xfrm>
+            <a:off x="6438831" y="2029968"/>
+            <a:ext cx="4912015" cy="365760"/>
+          </a:xfrm>
+          <a:prstGeom prst="rect">
+            <a:avLst/>
+          </a:prstGeom>
+          <a:noFill/>
+          <a:ln/>
+        </p:spPr>
+        <p:txBody>
+          <a:bodyPr wrap="square" lIns="0" tIns="0" rIns="0" bIns="0" rtlCol="0" anchor="t"/>
+          <a:lstStyle/>
+          <a:p>
+            <a:pPr indent="0" marL="0">
+              <a:buNone/>
+            </a:pPr>
+            <a:r>
+              <a:rPr lang="en-US" sz="1700" b="1" dirty="0">
+                <a:solidFill>
+                  <a:srgbClr val="5A6B73"/>
+                </a:solidFill>
+                <a:latin typeface="Arial" pitchFamily="34" charset="0"/>
+                <a:ea typeface="Arial" pitchFamily="34" charset="-122"/>
+                <a:cs typeface="Arial" pitchFamily="34" charset="-120"/>
+              </a:rPr>
+              <a:t>Predecir: el aprendizaje automático</a:t>
+            </a:r>
+            <a:endParaRPr lang="en-US" sz="1700" dirty="0"/>
+          </a:p>
+        </p:txBody>
+      </p:sp>
+      <p:sp>
+        <p:nvSpPr>
+          <p:cNvPr id="7" name="Text"/>
+          <p:cNvSpPr txBox="1"/>
+          <p:nvPr/>
+        </p:nvSpPr>
+        <p:spPr>
+          <a:xfrm>
+            <a:off x="6438831" y="2560320"/>
+            <a:ext cx="4912015" cy="2800000"/>
+          </a:xfrm>
+          <a:prstGeom prst="rect">
+            <a:avLst/>
+          </a:prstGeom>
+          <a:noFill/>
+          <a:ln/>
+        </p:spPr>
+        <p:txBody>
+          <a:bodyPr wrap="square" lIns="0" tIns="0" rIns="0" bIns="0" rtlCol="0" anchor="t"/>
+          <a:lstStyle/>
+          <a:p>
+            <a:pPr indent="0" marL="0">
+              <a:lnSpc>
+                <a:spcPct val="110000"/>
+              </a:lnSpc>
+              <a:spcAft>
+                <a:spcPts val="800"/>
+              </a:spcAft>
+              <a:buNone/>
+            </a:pPr>
+            <a:r>
+              <a:rPr lang="en-US" sz="1300" dirty="0">
+                <a:solidFill>
+                  <a:srgbClr val="16262E"/>
+                </a:solidFill>
+                <a:latin typeface="Calibri" pitchFamily="34" charset="0"/>
+                <a:ea typeface="Calibri" pitchFamily="34" charset="-122"/>
+                <a:cs typeface="Calibri" pitchFamily="34" charset="-120"/>
+              </a:rPr>
+              <a:t>Quieres acertar el siguiente caso, aunque el modelo sea difícil de leer por dentro.</a:t>
+            </a:r>
+            <a:endParaRPr lang="en-US" sz="1300" dirty="0"/>
+          </a:p>
+          <a:p>
+            <a:pPr indent="0" marL="0">
+              <a:lnSpc>
+                <a:spcPct val="110000"/>
+              </a:lnSpc>
+              <a:spcAft>
+                <a:spcPts val="800"/>
+              </a:spcAft>
+              <a:buNone/>
+            </a:pPr>
+            <a:r>
+              <a:rPr lang="en-US" sz="1300" dirty="0">
+                <a:solidFill>
+                  <a:srgbClr val="16262E"/>
+                </a:solidFill>
+                <a:latin typeface="Calibri" pitchFamily="34" charset="0"/>
+                <a:ea typeface="Calibri" pitchFamily="34" charset="-122"/>
+                <a:cs typeface="Calibri" pitchFamily="34" charset="-120"/>
+              </a:rPr>
+              <a:t>La prueba ya no es el intervalo: separar datos de entrenamiento y de prueba, y medir el error fuera de la muestra.</a:t>
+            </a:r>
+            <a:endParaRPr lang="en-US" sz="1300" dirty="0"/>
+          </a:p>
+          <a:p>
+            <a:pPr indent="0" marL="0">
+              <a:lnSpc>
+                <a:spcPct val="110000"/>
+              </a:lnSpc>
+              <a:spcAft>
+                <a:spcPts val="800"/>
+              </a:spcAft>
+              <a:buNone/>
+            </a:pPr>
+            <a:r>
+              <a:rPr lang="en-US" sz="1300" dirty="0">
+                <a:solidFill>
+                  <a:srgbClr val="16262E"/>
+                </a:solidFill>
+                <a:latin typeface="Calibri" pitchFamily="34" charset="0"/>
+                <a:ea typeface="Calibri" pitchFamily="34" charset="-122"/>
+                <a:cs typeface="Calibri" pitchFamily="34" charset="-120"/>
+              </a:rPr>
+              <a:t>El riesgo que se cuida: memorizar el pasado en lugar de aprender el patrón. Se llama sobreajuste.</a:t>
+            </a:r>
+            <a:endParaRPr lang="en-US" sz="1300" dirty="0"/>
+          </a:p>
+        </p:txBody>
+      </p:sp>
+      <p:sp>
+        <p:nvSpPr>
+          <p:cNvPr id="10" name="Shape"/>
           <p:cNvSpPr/>
           <p:nvPr/>
         </p:nvSpPr>
         <p:spPr>
           <a:xfrm>
-            <a:off x="804672" y="2135124"/>
-            <a:ext cx="402336" cy="402336"/>
-          </a:xfrm>
-          <a:prstGeom prst="ellipse">
-            <a:avLst/>
+            <a:off x="566928" y="5824728"/>
+            <a:ext cx="11057839" cy="594360"/>
+          </a:xfrm>
+          <a:prstGeom prst="roundRect">
+            <a:avLst>
+              <a:gd name="adj" fmla="val 8235"/>
+            </a:avLst>
           </a:prstGeom>
           <a:solidFill>
-            <a:srgbClr val="2E7D7D"/>
+            <a:srgbClr val="F7E4D8"/>
           </a:solidFill>
           <a:ln w="12700">
             <a:solidFill>
-              <a:srgbClr val="2E7D7D"/>
+              <a:srgbClr val="F7E4D8"/>
             </a:solidFill>
             <a:prstDash val="solid"/>
           </a:ln>
@@ -10042,42 +14157,14 @@
       </p:sp>
       <p:sp>
         <p:nvSpPr>
-          <p:cNvPr id="7" name="Text 5"/>
-          <p:cNvSpPr txBox="1"/>
-          <p:nvPr/>
-        </p:nvSpPr>
-        <p:spPr>
-          <a:xfrm>
-            <a:off x="804672" y="2135124"/>
-            <a:ext cx="402336" cy="402336"/>
-          </a:xfrm>
-          <a:prstGeom prst="rect">
-            <a:avLst/>
-          </a:prstGeom>
-          <a:noFill/>
-          <a:ln/>
-        </p:spPr>
-        <p:txBody>
-          <a:bodyPr wrap="square" lIns="0" tIns="0" rIns="0" bIns="0" rtlCol="0" anchor="ctr"/>
-          <a:lstStyle/>
-          <a:p>
-            <a:pPr algn="ctr" indent="0" marL="0">
-              <a:buNone/>
-            </a:pPr>
-            <a:endParaRPr lang="en-US" sz="1200" dirty="0"/>
-          </a:p>
-        </p:txBody>
-      </p:sp>
-      <p:sp>
-        <p:nvSpPr>
-          <p:cNvPr id="8" name="Text 6"/>
-          <p:cNvSpPr txBox="1"/>
-          <p:nvPr/>
-        </p:nvSpPr>
-        <p:spPr>
-          <a:xfrm>
-            <a:off x="1426464" y="2084832"/>
-            <a:ext cx="9960559" cy="502920"/>
+          <p:cNvPr id="11" name="Text"/>
+          <p:cNvSpPr txBox="1"/>
+          <p:nvPr/>
+        </p:nvSpPr>
+        <p:spPr>
+          <a:xfrm>
+            <a:off x="804672" y="5824728"/>
+            <a:ext cx="10582351" cy="594360"/>
           </a:xfrm>
           <a:prstGeom prst="rect">
             <a:avLst/>
@@ -10096,42 +14183,145 @@
               <a:buNone/>
             </a:pPr>
             <a:r>
-              <a:rPr lang="en-US" sz="1450" dirty="0">
-                <a:solidFill>
-                  <a:srgbClr val="FFFFFF"/>
+              <a:rPr lang="en-US" sz="1300" dirty="0">
+                <a:solidFill>
+                  <a:srgbClr val="16262E"/>
                 </a:solidFill>
                 <a:latin typeface="Calibri" pitchFamily="34" charset="0"/>
                 <a:ea typeface="Calibri" pitchFamily="34" charset="-122"/>
                 <a:cs typeface="Calibri" pitchFamily="34" charset="-120"/>
               </a:rPr>
-              <a:t>La tabla que sacaste de tu documento normativo, con la verificación de las tres celdas marcada.</a:t>
-            </a:r>
-            <a:endParaRPr lang="en-US" sz="1450" dirty="0"/>
-          </a:p>
-        </p:txBody>
-      </p:sp>
-      <p:sp>
-        <p:nvSpPr>
-          <p:cNvPr id="9" name="Shape 7"/>
+              <a:t>Supervisado si hay respuesta correcta: regresión y clasificación. No supervisado si no la hay: el agrupamiento del viernes. Y por refuerzo si aprende de calificaciones: ese nombre vuelve en dos láminas.</a:t>
+            </a:r>
+            <a:endParaRPr lang="en-US" sz="1300" dirty="0"/>
+          </a:p>
+        </p:txBody>
+      </p:sp>
+    </p:spTree>
+  </p:cSld>
+  <p:clrMapOvr>
+    <a:masterClrMapping/>
+  </p:clrMapOvr>
+</p:sld>
+</file>
+
+<file path=ppt/slides/slide29.xml><?xml version="1.0" encoding="utf-8"?>
+<p:sld xmlns:a="http://schemas.openxmlformats.org/drawingml/2006/main" xmlns:r="http://schemas.openxmlformats.org/officeDocument/2006/relationships" xmlns:p="http://schemas.openxmlformats.org/presentationml/2006/main">
+  <p:cSld name="Familias DL">
+    <p:spTree>
+      <p:nvGrpSpPr>
+        <p:cNvPr id="1" name=""/>
+        <p:cNvGrpSpPr/>
+        <p:nvPr/>
+      </p:nvGrpSpPr>
+      <p:grpSpPr>
+        <a:xfrm>
+          <a:off x="0" y="0"/>
+          <a:ext cx="0" cy="0"/>
+          <a:chOff x="0" y="0"/>
+          <a:chExt cx="0" cy="0"/>
+        </a:xfrm>
+      </p:grpSpPr>
+      <p:sp>
+        <p:nvSpPr>
+          <p:cNvPr id="2" name="Text"/>
+          <p:cNvSpPr txBox="1"/>
+          <p:nvPr/>
+        </p:nvSpPr>
+        <p:spPr>
+          <a:xfrm>
+            <a:off x="566928" y="402336"/>
+            <a:ext cx="11057839" cy="749808"/>
+          </a:xfrm>
+          <a:prstGeom prst="rect">
+            <a:avLst/>
+          </a:prstGeom>
+          <a:noFill/>
+          <a:ln/>
+        </p:spPr>
+        <p:txBody>
+          <a:bodyPr wrap="square" lIns="0" tIns="0" rIns="0" bIns="0" rtlCol="0" anchor="t"/>
+          <a:lstStyle/>
+          <a:p>
+            <a:pPr algn="l" indent="0" marL="0">
+              <a:buNone/>
+            </a:pPr>
+            <a:r>
+              <a:rPr lang="en-US" sz="3200" b="1" dirty="0">
+                <a:solidFill>
+                  <a:srgbClr val="16262E"/>
+                </a:solidFill>
+                <a:latin typeface="Arial" pitchFamily="34" charset="0"/>
+                <a:ea typeface="Arial" pitchFamily="34" charset="-122"/>
+                <a:cs typeface="Arial" pitchFamily="34" charset="-120"/>
+              </a:rPr>
+              <a:t>Las familias del aprendizaje profundo</a:t>
+            </a:r>
+            <a:endParaRPr lang="en-US" sz="3200" dirty="0"/>
+          </a:p>
+        </p:txBody>
+      </p:sp>
+      <p:sp>
+        <p:nvSpPr>
+          <p:cNvPr id="3" name="Text"/>
+          <p:cNvSpPr txBox="1"/>
+          <p:nvPr/>
+        </p:nvSpPr>
+        <p:spPr>
+          <a:xfrm>
+            <a:off x="566928" y="1280160"/>
+            <a:ext cx="11057839" cy="731520"/>
+          </a:xfrm>
+          <a:prstGeom prst="rect">
+            <a:avLst/>
+          </a:prstGeom>
+          <a:noFill/>
+          <a:ln/>
+        </p:spPr>
+        <p:txBody>
+          <a:bodyPr wrap="square" lIns="0" tIns="0" rIns="0" bIns="0" rtlCol="0" anchor="t"/>
+          <a:lstStyle/>
+          <a:p>
+            <a:pPr indent="0" marL="0">
+              <a:buNone/>
+            </a:pPr>
+            <a:r>
+              <a:rPr lang="en-US" sz="1500" dirty="0">
+                <a:solidFill>
+                  <a:srgbClr val="5A6B73"/>
+                </a:solidFill>
+                <a:latin typeface="Calibri" pitchFamily="34" charset="0"/>
+                <a:ea typeface="Calibri" pitchFamily="34" charset="-122"/>
+                <a:cs typeface="Calibri" pitchFamily="34" charset="-120"/>
+              </a:rPr>
+              <a:t>Redes neuronales de muchas capas: funciones simples apiladas. Cada familia nació para una forma distinta del dato.</a:t>
+            </a:r>
+            <a:endParaRPr lang="en-US" sz="1500" dirty="0"/>
+          </a:p>
+        </p:txBody>
+      </p:sp>
+      <p:sp>
+        <p:nvSpPr>
+          <p:cNvPr id="4" name="Shape"/>
           <p:cNvSpPr/>
           <p:nvPr/>
         </p:nvSpPr>
         <p:spPr>
           <a:xfrm>
-            <a:off x="566928" y="2843784"/>
-            <a:ext cx="11057839" cy="649224"/>
+            <a:off x="566928" y="2011680"/>
+            <a:ext cx="2558720" cy="2700000"/>
           </a:xfrm>
           <a:prstGeom prst="roundRect">
             <a:avLst>
-              <a:gd name="adj" fmla="val 9859"/>
+              <a:gd name="adj" fmla="val 2998"/>
             </a:avLst>
           </a:prstGeom>
           <a:solidFill>
-            <a:srgbClr val="24404E"/>
+            <a:srgbClr val="F2F5F6"/>
           </a:solidFill>
           <a:ln w="12700">
             <a:solidFill>
-              <a:srgbClr val="24404E"/>
+              <a:srgbClr val="F2F5F6"/>
             </a:solidFill>
             <a:prstDash val="solid"/>
           </a:ln>
@@ -10139,24 +14329,107 @@
       </p:sp>
       <p:sp>
         <p:nvSpPr>
-          <p:cNvPr id="10" name="Shape 8"/>
+          <p:cNvPr id="5" name="Text"/>
+          <p:cNvSpPr txBox="1"/>
+          <p:nvPr/>
+        </p:nvSpPr>
+        <p:spPr>
+          <a:xfrm>
+            <a:off x="804672" y="2249424"/>
+            <a:ext cx="2083232" cy="583184"/>
+          </a:xfrm>
+          <a:prstGeom prst="rect">
+            <a:avLst/>
+          </a:prstGeom>
+          <a:noFill/>
+          <a:ln/>
+        </p:spPr>
+        <p:txBody>
+          <a:bodyPr wrap="square" lIns="0" tIns="0" rIns="0" bIns="0" rtlCol="0" anchor="t"/>
+          <a:lstStyle/>
+          <a:p>
+            <a:pPr indent="0" marL="0">
+              <a:buNone/>
+            </a:pPr>
+            <a:r>
+              <a:rPr lang="en-US" sz="1600" b="1" dirty="0">
+                <a:solidFill>
+                  <a:srgbClr val="16262E"/>
+                </a:solidFill>
+                <a:latin typeface="Arial" pitchFamily="34" charset="0"/>
+                <a:ea typeface="Arial" pitchFamily="34" charset="-122"/>
+                <a:cs typeface="Arial" pitchFamily="34" charset="-120"/>
+              </a:rPr>
+              <a:t>Tablas: redes densas</a:t>
+            </a:r>
+            <a:endParaRPr lang="en-US" sz="1600" dirty="0"/>
+          </a:p>
+        </p:txBody>
+      </p:sp>
+      <p:sp>
+        <p:nvSpPr>
+          <p:cNvPr id="6" name="Text"/>
+          <p:cNvSpPr txBox="1"/>
+          <p:nvPr/>
+        </p:nvSpPr>
+        <p:spPr>
+          <a:xfrm>
+            <a:off x="804672" y="2978912"/>
+            <a:ext cx="2083232" cy="1531776"/>
+          </a:xfrm>
+          <a:prstGeom prst="rect">
+            <a:avLst/>
+          </a:prstGeom>
+          <a:noFill/>
+          <a:ln/>
+        </p:spPr>
+        <p:txBody>
+          <a:bodyPr wrap="square" lIns="0" tIns="0" rIns="0" bIns="0" rtlCol="0" anchor="t"/>
+          <a:lstStyle/>
+          <a:p>
+            <a:pPr indent="0" marL="0">
+              <a:lnSpc>
+                <a:spcPct val="110000"/>
+              </a:lnSpc>
+              <a:buNone/>
+            </a:pPr>
+            <a:r>
+              <a:rPr lang="en-US" sz="1300" dirty="0">
+                <a:solidFill>
+                  <a:srgbClr val="16262E"/>
+                </a:solidFill>
+                <a:latin typeface="Calibri" pitchFamily="34" charset="0"/>
+                <a:ea typeface="Calibri" pitchFamily="34" charset="-122"/>
+                <a:cs typeface="Calibri" pitchFamily="34" charset="-120"/>
+              </a:rPr>
+              <a:t>Columnas y renglones, como tu padrón. Aquí las redes compiten con los árboles y los métodos de ensamble, y no siempre les ganan.</a:t>
+            </a:r>
+            <a:endParaRPr lang="en-US" sz="1300" dirty="0"/>
+          </a:p>
+        </p:txBody>
+      </p:sp>
+      <p:sp>
+        <p:nvSpPr>
+          <p:cNvPr id="7" name="Shape"/>
           <p:cNvSpPr/>
           <p:nvPr/>
         </p:nvSpPr>
         <p:spPr>
           <a:xfrm>
-            <a:off x="804672" y="2967228"/>
-            <a:ext cx="402336" cy="402336"/>
-          </a:xfrm>
-          <a:prstGeom prst="ellipse">
-            <a:avLst/>
+            <a:off x="3399968" y="2011680"/>
+            <a:ext cx="2558720" cy="2700000"/>
+          </a:xfrm>
+          <a:prstGeom prst="roundRect">
+            <a:avLst>
+              <a:gd name="adj" fmla="val 2998"/>
+            </a:avLst>
           </a:prstGeom>
           <a:solidFill>
-            <a:srgbClr val="2E7D7D"/>
+            <a:srgbClr val="F2F5F6"/>
           </a:solidFill>
           <a:ln w="12700">
             <a:solidFill>
-              <a:srgbClr val="2E7D7D"/>
+              <a:srgbClr val="F2F5F6"/>
             </a:solidFill>
             <a:prstDash val="solid"/>
           </a:ln>
@@ -10164,51 +14437,62 @@
       </p:sp>
       <p:sp>
         <p:nvSpPr>
-          <p:cNvPr id="11" name="Text 9"/>
-          <p:cNvSpPr txBox="1"/>
-          <p:nvPr/>
-        </p:nvSpPr>
-        <p:spPr>
-          <a:xfrm>
-            <a:off x="804672" y="2967228"/>
-            <a:ext cx="402336" cy="402336"/>
-          </a:xfrm>
-          <a:prstGeom prst="rect">
-            <a:avLst/>
-          </a:prstGeom>
-          <a:noFill/>
-          <a:ln/>
-        </p:spPr>
-        <p:txBody>
-          <a:bodyPr wrap="square" lIns="0" tIns="0" rIns="0" bIns="0" rtlCol="0" anchor="ctr"/>
-          <a:lstStyle/>
-          <a:p>
-            <a:pPr algn="ctr" indent="0" marL="0">
-              <a:buNone/>
-            </a:pPr>
-            <a:endParaRPr lang="en-US" sz="1200" dirty="0"/>
-          </a:p>
-        </p:txBody>
-      </p:sp>
-      <p:sp>
-        <p:nvSpPr>
-          <p:cNvPr id="12" name="Text 10"/>
-          <p:cNvSpPr txBox="1"/>
-          <p:nvPr/>
-        </p:nvSpPr>
-        <p:spPr>
-          <a:xfrm>
-            <a:off x="1426464" y="2916936"/>
-            <a:ext cx="9960559" cy="502920"/>
-          </a:xfrm>
-          <a:prstGeom prst="rect">
-            <a:avLst/>
-          </a:prstGeom>
-          <a:noFill/>
-          <a:ln/>
-        </p:spPr>
-        <p:txBody>
-          <a:bodyPr wrap="square" lIns="0" tIns="0" rIns="0" bIns="0" rtlCol="0" anchor="ctr"/>
+          <p:cNvPr id="8" name="Text"/>
+          <p:cNvSpPr txBox="1"/>
+          <p:nvPr/>
+        </p:nvSpPr>
+        <p:spPr>
+          <a:xfrm>
+            <a:off x="3637712" y="2249424"/>
+            <a:ext cx="2083232" cy="583184"/>
+          </a:xfrm>
+          <a:prstGeom prst="rect">
+            <a:avLst/>
+          </a:prstGeom>
+          <a:noFill/>
+          <a:ln/>
+        </p:spPr>
+        <p:txBody>
+          <a:bodyPr wrap="square" lIns="0" tIns="0" rIns="0" bIns="0" rtlCol="0" anchor="t"/>
+          <a:lstStyle/>
+          <a:p>
+            <a:pPr indent="0" marL="0">
+              <a:buNone/>
+            </a:pPr>
+            <a:r>
+              <a:rPr lang="en-US" sz="1600" b="1" dirty="0">
+                <a:solidFill>
+                  <a:srgbClr val="16262E"/>
+                </a:solidFill>
+                <a:latin typeface="Arial" pitchFamily="34" charset="0"/>
+                <a:ea typeface="Arial" pitchFamily="34" charset="-122"/>
+                <a:cs typeface="Arial" pitchFamily="34" charset="-120"/>
+              </a:rPr>
+              <a:t>Imagen: convolucionales</a:t>
+            </a:r>
+            <a:endParaRPr lang="en-US" sz="1600" dirty="0"/>
+          </a:p>
+        </p:txBody>
+      </p:sp>
+      <p:sp>
+        <p:nvSpPr>
+          <p:cNvPr id="9" name="Text"/>
+          <p:cNvSpPr txBox="1"/>
+          <p:nvPr/>
+        </p:nvSpPr>
+        <p:spPr>
+          <a:xfrm>
+            <a:off x="3637712" y="2978912"/>
+            <a:ext cx="2083232" cy="1531776"/>
+          </a:xfrm>
+          <a:prstGeom prst="rect">
+            <a:avLst/>
+          </a:prstGeom>
+          <a:noFill/>
+          <a:ln/>
+        </p:spPr>
+        <p:txBody>
+          <a:bodyPr wrap="square" lIns="0" tIns="0" rIns="0" bIns="0" rtlCol="0" anchor="t"/>
           <a:lstStyle/>
           <a:p>
             <a:pPr indent="0" marL="0">
@@ -10218,42 +14502,42 @@
               <a:buNone/>
             </a:pPr>
             <a:r>
-              <a:rPr lang="en-US" sz="1450" dirty="0">
-                <a:solidFill>
-                  <a:srgbClr val="FFFFFF"/>
+              <a:rPr lang="en-US" sz="1300" dirty="0">
+                <a:solidFill>
+                  <a:srgbClr val="16262E"/>
                 </a:solidFill>
                 <a:latin typeface="Calibri" pitchFamily="34" charset="0"/>
                 <a:ea typeface="Calibri" pitchFamily="34" charset="-122"/>
                 <a:cs typeface="Calibri" pitchFamily="34" charset="-120"/>
               </a:rPr>
-              <a:t>Tres prompts en tu biblioteca, cada uno con su versión inicial y su versión corregida.</a:t>
-            </a:r>
-            <a:endParaRPr lang="en-US" sz="1450" dirty="0"/>
-          </a:p>
-        </p:txBody>
-      </p:sp>
-      <p:sp>
-        <p:nvSpPr>
-          <p:cNvPr id="13" name="Shape 11"/>
+              <a:t>Detectan patrones locales: bordes, texturas, techos en una imagen satelital. Son las que leen cartografía y clasifican cultivos.</a:t>
+            </a:r>
+            <a:endParaRPr lang="en-US" sz="1300" dirty="0"/>
+          </a:p>
+        </p:txBody>
+      </p:sp>
+      <p:sp>
+        <p:nvSpPr>
+          <p:cNvPr id="10" name="Shape"/>
           <p:cNvSpPr/>
           <p:nvPr/>
         </p:nvSpPr>
         <p:spPr>
           <a:xfrm>
-            <a:off x="566928" y="3675888"/>
-            <a:ext cx="11057839" cy="649224"/>
+            <a:off x="6233008" y="2011680"/>
+            <a:ext cx="2558720" cy="2700000"/>
           </a:xfrm>
           <a:prstGeom prst="roundRect">
             <a:avLst>
-              <a:gd name="adj" fmla="val 9859"/>
+              <a:gd name="adj" fmla="val 2998"/>
             </a:avLst>
           </a:prstGeom>
           <a:solidFill>
-            <a:srgbClr val="24404E"/>
+            <a:srgbClr val="F2F5F6"/>
           </a:solidFill>
           <a:ln w="12700">
             <a:solidFill>
-              <a:srgbClr val="24404E"/>
+              <a:srgbClr val="F2F5F6"/>
             </a:solidFill>
             <a:prstDash val="solid"/>
           </a:ln>
@@ -10261,24 +14545,107 @@
       </p:sp>
       <p:sp>
         <p:nvSpPr>
-          <p:cNvPr id="14" name="Shape 12"/>
+          <p:cNvPr id="11" name="Text"/>
+          <p:cNvSpPr txBox="1"/>
+          <p:nvPr/>
+        </p:nvSpPr>
+        <p:spPr>
+          <a:xfrm>
+            <a:off x="6470752" y="2249424"/>
+            <a:ext cx="2083232" cy="583184"/>
+          </a:xfrm>
+          <a:prstGeom prst="rect">
+            <a:avLst/>
+          </a:prstGeom>
+          <a:noFill/>
+          <a:ln/>
+        </p:spPr>
+        <p:txBody>
+          <a:bodyPr wrap="square" lIns="0" tIns="0" rIns="0" bIns="0" rtlCol="0" anchor="t"/>
+          <a:lstStyle/>
+          <a:p>
+            <a:pPr indent="0" marL="0">
+              <a:buNone/>
+            </a:pPr>
+            <a:r>
+              <a:rPr lang="en-US" sz="1600" b="1" dirty="0">
+                <a:solidFill>
+                  <a:srgbClr val="16262E"/>
+                </a:solidFill>
+                <a:latin typeface="Arial" pitchFamily="34" charset="0"/>
+                <a:ea typeface="Arial" pitchFamily="34" charset="-122"/>
+                <a:cs typeface="Arial" pitchFamily="34" charset="-120"/>
+              </a:rPr>
+              <a:t>Secuencias: recurrentes</a:t>
+            </a:r>
+            <a:endParaRPr lang="en-US" sz="1600" dirty="0"/>
+          </a:p>
+        </p:txBody>
+      </p:sp>
+      <p:sp>
+        <p:nvSpPr>
+          <p:cNvPr id="12" name="Text"/>
+          <p:cNvSpPr txBox="1"/>
+          <p:nvPr/>
+        </p:nvSpPr>
+        <p:spPr>
+          <a:xfrm>
+            <a:off x="6470752" y="2978912"/>
+            <a:ext cx="2083232" cy="1531776"/>
+          </a:xfrm>
+          <a:prstGeom prst="rect">
+            <a:avLst/>
+          </a:prstGeom>
+          <a:noFill/>
+          <a:ln/>
+        </p:spPr>
+        <p:txBody>
+          <a:bodyPr wrap="square" lIns="0" tIns="0" rIns="0" bIns="0" rtlCol="0" anchor="t"/>
+          <a:lstStyle/>
+          <a:p>
+            <a:pPr indent="0" marL="0">
+              <a:lnSpc>
+                <a:spcPct val="110000"/>
+              </a:lnSpc>
+              <a:buNone/>
+            </a:pPr>
+            <a:r>
+              <a:rPr lang="en-US" sz="1300" dirty="0">
+                <a:solidFill>
+                  <a:srgbClr val="16262E"/>
+                </a:solidFill>
+                <a:latin typeface="Calibri" pitchFamily="34" charset="0"/>
+                <a:ea typeface="Calibri" pitchFamily="34" charset="-122"/>
+                <a:cs typeface="Calibri" pitchFamily="34" charset="-120"/>
+              </a:rPr>
+              <a:t>Leen en orden y van recordando. Sirven para series de tiempo y audio, y eran el estándar para texto hasta 2017.</a:t>
+            </a:r>
+            <a:endParaRPr lang="en-US" sz="1300" dirty="0"/>
+          </a:p>
+        </p:txBody>
+      </p:sp>
+      <p:sp>
+        <p:nvSpPr>
+          <p:cNvPr id="13" name="Shape"/>
           <p:cNvSpPr/>
           <p:nvPr/>
         </p:nvSpPr>
         <p:spPr>
           <a:xfrm>
-            <a:off x="804672" y="3799332"/>
-            <a:ext cx="402336" cy="402336"/>
-          </a:xfrm>
-          <a:prstGeom prst="ellipse">
-            <a:avLst/>
+            <a:off x="9066047" y="2011680"/>
+            <a:ext cx="2558720" cy="2700000"/>
+          </a:xfrm>
+          <a:prstGeom prst="roundRect">
+            <a:avLst>
+              <a:gd name="adj" fmla="val 2998"/>
+            </a:avLst>
           </a:prstGeom>
           <a:solidFill>
-            <a:srgbClr val="2E7D7D"/>
+            <a:srgbClr val="F7E4D8"/>
           </a:solidFill>
           <a:ln w="12700">
             <a:solidFill>
-              <a:srgbClr val="2E7D7D"/>
+              <a:srgbClr val="F7E4D8"/>
             </a:solidFill>
             <a:prstDash val="solid"/>
           </a:ln>
@@ -10286,51 +14653,62 @@
       </p:sp>
       <p:sp>
         <p:nvSpPr>
-          <p:cNvPr id="15" name="Text 13"/>
-          <p:cNvSpPr txBox="1"/>
-          <p:nvPr/>
-        </p:nvSpPr>
-        <p:spPr>
-          <a:xfrm>
-            <a:off x="804672" y="3799332"/>
-            <a:ext cx="402336" cy="402336"/>
-          </a:xfrm>
-          <a:prstGeom prst="rect">
-            <a:avLst/>
-          </a:prstGeom>
-          <a:noFill/>
-          <a:ln/>
-        </p:spPr>
-        <p:txBody>
-          <a:bodyPr wrap="square" lIns="0" tIns="0" rIns="0" bIns="0" rtlCol="0" anchor="ctr"/>
-          <a:lstStyle/>
-          <a:p>
-            <a:pPr algn="ctr" indent="0" marL="0">
-              <a:buNone/>
-            </a:pPr>
-            <a:endParaRPr lang="en-US" sz="1200" dirty="0"/>
-          </a:p>
-        </p:txBody>
-      </p:sp>
-      <p:sp>
-        <p:nvSpPr>
-          <p:cNvPr id="16" name="Text 14"/>
-          <p:cNvSpPr txBox="1"/>
-          <p:nvPr/>
-        </p:nvSpPr>
-        <p:spPr>
-          <a:xfrm>
-            <a:off x="1426464" y="3749040"/>
-            <a:ext cx="9960559" cy="502920"/>
-          </a:xfrm>
-          <a:prstGeom prst="rect">
-            <a:avLst/>
-          </a:prstGeom>
-          <a:noFill/>
-          <a:ln/>
-        </p:spPr>
-        <p:txBody>
-          <a:bodyPr wrap="square" lIns="0" tIns="0" rIns="0" bIns="0" rtlCol="0" anchor="ctr"/>
+          <p:cNvPr id="14" name="Text"/>
+          <p:cNvSpPr txBox="1"/>
+          <p:nvPr/>
+        </p:nvSpPr>
+        <p:spPr>
+          <a:xfrm>
+            <a:off x="9303791" y="2249424"/>
+            <a:ext cx="2083232" cy="583184"/>
+          </a:xfrm>
+          <a:prstGeom prst="rect">
+            <a:avLst/>
+          </a:prstGeom>
+          <a:noFill/>
+          <a:ln/>
+        </p:spPr>
+        <p:txBody>
+          <a:bodyPr wrap="square" lIns="0" tIns="0" rIns="0" bIns="0" rtlCol="0" anchor="t"/>
+          <a:lstStyle/>
+          <a:p>
+            <a:pPr indent="0" marL="0">
+              <a:buNone/>
+            </a:pPr>
+            <a:r>
+              <a:rPr lang="en-US" sz="1600" b="1" dirty="0">
+                <a:solidFill>
+                  <a:srgbClr val="16262E"/>
+                </a:solidFill>
+                <a:latin typeface="Arial" pitchFamily="34" charset="0"/>
+                <a:ea typeface="Arial" pitchFamily="34" charset="-122"/>
+                <a:cs typeface="Arial" pitchFamily="34" charset="-120"/>
+              </a:rPr>
+              <a:t>Lenguaje: transformers</a:t>
+            </a:r>
+            <a:endParaRPr lang="en-US" sz="1600" dirty="0"/>
+          </a:p>
+        </p:txBody>
+      </p:sp>
+      <p:sp>
+        <p:nvSpPr>
+          <p:cNvPr id="15" name="Text"/>
+          <p:cNvSpPr txBox="1"/>
+          <p:nvPr/>
+        </p:nvSpPr>
+        <p:spPr>
+          <a:xfrm>
+            <a:off x="9303791" y="2978912"/>
+            <a:ext cx="2083232" cy="1531776"/>
+          </a:xfrm>
+          <a:prstGeom prst="rect">
+            <a:avLst/>
+          </a:prstGeom>
+          <a:noFill/>
+          <a:ln/>
+        </p:spPr>
+        <p:txBody>
+          <a:bodyPr wrap="square" lIns="0" tIns="0" rIns="0" bIns="0" rtlCol="0" anchor="t"/>
           <a:lstStyle/>
           <a:p>
             <a:pPr indent="0" marL="0">
@@ -10340,42 +14718,42 @@
               <a:buNone/>
             </a:pPr>
             <a:r>
-              <a:rPr lang="en-US" sz="1450" dirty="0">
-                <a:solidFill>
-                  <a:srgbClr val="FFFFFF"/>
+              <a:rPr lang="en-US" sz="1300" dirty="0">
+                <a:solidFill>
+                  <a:srgbClr val="16262E"/>
                 </a:solidFill>
                 <a:latin typeface="Calibri" pitchFamily="34" charset="0"/>
                 <a:ea typeface="Calibri" pitchFamily="34" charset="-122"/>
                 <a:cs typeface="Calibri" pitchFamily="34" charset="-120"/>
               </a:rPr>
-              <a:t>Tu bitácora al día, incluyendo los errores que encontraste en el hilo de correo y en la transcripción.</a:t>
-            </a:r>
-            <a:endParaRPr lang="en-US" sz="1450" dirty="0"/>
-          </a:p>
-        </p:txBody>
-      </p:sp>
-      <p:sp>
-        <p:nvSpPr>
-          <p:cNvPr id="17" name="Shape 15"/>
+              <a:t>Cambiaron la lectura en orden por la atención que viste ayer: leen todo a la vez y se entrenan en paralelo. Por eso pudieron crecer tanto.</a:t>
+            </a:r>
+            <a:endParaRPr lang="en-US" sz="1300" dirty="0"/>
+          </a:p>
+        </p:txBody>
+      </p:sp>
+      <p:sp>
+        <p:nvSpPr>
+          <p:cNvPr id="16" name="Shape"/>
           <p:cNvSpPr/>
           <p:nvPr/>
         </p:nvSpPr>
         <p:spPr>
           <a:xfrm>
-            <a:off x="566928" y="4507992"/>
-            <a:ext cx="11057839" cy="649224"/>
+            <a:off x="566928" y="5193792"/>
+            <a:ext cx="11057839" cy="777240"/>
           </a:xfrm>
           <a:prstGeom prst="roundRect">
             <a:avLst>
-              <a:gd name="adj" fmla="val 9859"/>
+              <a:gd name="adj" fmla="val 8235"/>
             </a:avLst>
           </a:prstGeom>
           <a:solidFill>
-            <a:srgbClr val="24404E"/>
+            <a:srgbClr val="16262E"/>
           </a:solidFill>
           <a:ln w="12700">
             <a:solidFill>
-              <a:srgbClr val="24404E"/>
+              <a:srgbClr val="16262E"/>
             </a:solidFill>
             <a:prstDash val="solid"/>
           </a:ln>
@@ -10383,39 +14761,14 @@
       </p:sp>
       <p:sp>
         <p:nvSpPr>
-          <p:cNvPr id="18" name="Shape 16"/>
-          <p:cNvSpPr/>
-          <p:nvPr/>
-        </p:nvSpPr>
-        <p:spPr>
-          <a:xfrm>
-            <a:off x="804672" y="4631436"/>
-            <a:ext cx="402336" cy="402336"/>
-          </a:xfrm>
-          <a:prstGeom prst="ellipse">
-            <a:avLst/>
-          </a:prstGeom>
-          <a:solidFill>
-            <a:srgbClr val="2E7D7D"/>
-          </a:solidFill>
-          <a:ln w="12700">
-            <a:solidFill>
-              <a:srgbClr val="2E7D7D"/>
-            </a:solidFill>
-            <a:prstDash val="solid"/>
-          </a:ln>
-        </p:spPr>
-      </p:sp>
-      <p:sp>
-        <p:nvSpPr>
-          <p:cNvPr id="19" name="Text 17"/>
-          <p:cNvSpPr txBox="1"/>
-          <p:nvPr/>
-        </p:nvSpPr>
-        <p:spPr>
-          <a:xfrm>
-            <a:off x="804672" y="4631436"/>
-            <a:ext cx="402336" cy="402336"/>
+          <p:cNvPr id="17" name="Text"/>
+          <p:cNvSpPr txBox="1"/>
+          <p:nvPr/>
+        </p:nvSpPr>
+        <p:spPr>
+          <a:xfrm>
+            <a:off x="841248" y="5193792"/>
+            <a:ext cx="10509199" cy="777240"/>
           </a:xfrm>
           <a:prstGeom prst="rect">
             <a:avLst/>
@@ -10427,42 +14780,11 @@
           <a:bodyPr wrap="square" lIns="0" tIns="0" rIns="0" bIns="0" rtlCol="0" anchor="ctr"/>
           <a:lstStyle/>
           <a:p>
-            <a:pPr algn="ctr" indent="0" marL="0">
-              <a:buNone/>
-            </a:pPr>
-            <a:endParaRPr lang="en-US" sz="1200" dirty="0"/>
-          </a:p>
-        </p:txBody>
-      </p:sp>
-      <p:sp>
-        <p:nvSpPr>
-          <p:cNvPr id="20" name="Text 18"/>
-          <p:cNvSpPr txBox="1"/>
-          <p:nvPr/>
-        </p:nvSpPr>
-        <p:spPr>
-          <a:xfrm>
-            <a:off x="1426464" y="4581144"/>
-            <a:ext cx="9960559" cy="502920"/>
-          </a:xfrm>
-          <a:prstGeom prst="rect">
-            <a:avLst/>
-          </a:prstGeom>
-          <a:noFill/>
-          <a:ln/>
-        </p:spPr>
-        <p:txBody>
-          <a:bodyPr wrap="square" lIns="0" tIns="0" rIns="0" bIns="0" rtlCol="0" anchor="ctr"/>
-          <a:lstStyle/>
-          <a:p>
-            <a:pPr indent="0" marL="0">
-              <a:lnSpc>
-                <a:spcPct val="110000"/>
-              </a:lnSpc>
-              <a:buNone/>
-            </a:pPr>
-            <a:r>
-              <a:rPr lang="en-US" sz="1450" dirty="0">
+            <a:pPr indent="0" marL="0">
+              <a:buNone/>
+            </a:pPr>
+            <a:r>
+              <a:rPr lang="en-US" sz="1350" dirty="0">
                 <a:solidFill>
                   <a:srgbClr val="FFFFFF"/>
                 </a:solidFill>
@@ -10470,170 +14792,9 @@
                 <a:ea typeface="Calibri" pitchFamily="34" charset="-122"/>
                 <a:cs typeface="Calibri" pitchFamily="34" charset="-120"/>
               </a:rPr>
-              <a:t>Para el jueves no hay que preparar nada. Se trabaja en equipos de cuatro desde el primer minuto, así que llega puntual.</a:t>
-            </a:r>
-            <a:endParaRPr lang="en-US" sz="1450" dirty="0"/>
-          </a:p>
-        </p:txBody>
-      </p:sp>
-      <p:sp>
-        <p:nvSpPr>
-          <p:cNvPr id="21" name="Shape 19"/>
-          <p:cNvSpPr/>
-          <p:nvPr/>
-        </p:nvSpPr>
-        <p:spPr>
-          <a:xfrm>
-            <a:off x="566928" y="5340096"/>
-            <a:ext cx="11057839" cy="649224"/>
-          </a:xfrm>
-          <a:prstGeom prst="roundRect">
-            <a:avLst>
-              <a:gd name="adj" fmla="val 9859"/>
-            </a:avLst>
-          </a:prstGeom>
-          <a:solidFill>
-            <a:srgbClr val="24404E"/>
-          </a:solidFill>
-          <a:ln w="12700">
-            <a:solidFill>
-              <a:srgbClr val="24404E"/>
-            </a:solidFill>
-            <a:prstDash val="solid"/>
-          </a:ln>
-        </p:spPr>
-      </p:sp>
-      <p:sp>
-        <p:nvSpPr>
-          <p:cNvPr id="22" name="Shape 20"/>
-          <p:cNvSpPr/>
-          <p:nvPr/>
-        </p:nvSpPr>
-        <p:spPr>
-          <a:xfrm>
-            <a:off x="804672" y="5463540"/>
-            <a:ext cx="402336" cy="402336"/>
-          </a:xfrm>
-          <a:prstGeom prst="ellipse">
-            <a:avLst/>
-          </a:prstGeom>
-          <a:solidFill>
-            <a:srgbClr val="2E7D7D"/>
-          </a:solidFill>
-          <a:ln w="12700">
-            <a:solidFill>
-              <a:srgbClr val="2E7D7D"/>
-            </a:solidFill>
-            <a:prstDash val="solid"/>
-          </a:ln>
-        </p:spPr>
-      </p:sp>
-      <p:sp>
-        <p:nvSpPr>
-          <p:cNvPr id="23" name="Text 21"/>
-          <p:cNvSpPr txBox="1"/>
-          <p:nvPr/>
-        </p:nvSpPr>
-        <p:spPr>
-          <a:xfrm>
-            <a:off x="804672" y="5463540"/>
-            <a:ext cx="402336" cy="402336"/>
-          </a:xfrm>
-          <a:prstGeom prst="rect">
-            <a:avLst/>
-          </a:prstGeom>
-          <a:noFill/>
-          <a:ln/>
-        </p:spPr>
-        <p:txBody>
-          <a:bodyPr wrap="square" lIns="0" tIns="0" rIns="0" bIns="0" rtlCol="0" anchor="ctr"/>
-          <a:lstStyle/>
-          <a:p>
-            <a:pPr algn="ctr" indent="0" marL="0">
-              <a:buNone/>
-            </a:pPr>
-            <a:endParaRPr lang="en-US" sz="1200" dirty="0"/>
-          </a:p>
-        </p:txBody>
-      </p:sp>
-      <p:sp>
-        <p:nvSpPr>
-          <p:cNvPr id="24" name="Text 22"/>
-          <p:cNvSpPr txBox="1"/>
-          <p:nvPr/>
-        </p:nvSpPr>
-        <p:spPr>
-          <a:xfrm>
-            <a:off x="1426464" y="5413248"/>
-            <a:ext cx="9960559" cy="502920"/>
-          </a:xfrm>
-          <a:prstGeom prst="rect">
-            <a:avLst/>
-          </a:prstGeom>
-          <a:noFill/>
-          <a:ln/>
-        </p:spPr>
-        <p:txBody>
-          <a:bodyPr wrap="square" lIns="0" tIns="0" rIns="0" bIns="0" rtlCol="0" anchor="ctr"/>
-          <a:lstStyle/>
-          <a:p>
-            <a:pPr indent="0" marL="0">
-              <a:lnSpc>
-                <a:spcPct val="110000"/>
-              </a:lnSpc>
-              <a:buNone/>
-            </a:pPr>
-            <a:r>
-              <a:rPr lang="en-US" sz="1450" dirty="0">
-                <a:solidFill>
-                  <a:srgbClr val="FFFFFF"/>
-                </a:solidFill>
-                <a:latin typeface="Calibri" pitchFamily="34" charset="0"/>
-                <a:ea typeface="Calibri" pitchFamily="34" charset="-122"/>
-                <a:cs typeface="Calibri" pitchFamily="34" charset="-120"/>
-              </a:rPr>
-              <a:t>Recuerda: el material de cada sesión se publica la tarde anterior en github.com/xuxoramos/curso-inegi-gen-ai</a:t>
-            </a:r>
-            <a:endParaRPr lang="en-US" sz="1450" dirty="0"/>
-          </a:p>
-        </p:txBody>
-      </p:sp>
-      <p:sp>
-        <p:nvSpPr>
-          <p:cNvPr id="25" name="Text 23"/>
-          <p:cNvSpPr txBox="1"/>
-          <p:nvPr/>
-        </p:nvSpPr>
-        <p:spPr>
-          <a:xfrm>
-            <a:off x="566928" y="6172200"/>
-            <a:ext cx="11057839" cy="411480"/>
-          </a:xfrm>
-          <a:prstGeom prst="rect">
-            <a:avLst/>
-          </a:prstGeom>
-          <a:noFill/>
-          <a:ln/>
-        </p:spPr>
-        <p:txBody>
-          <a:bodyPr wrap="square" lIns="0" tIns="0" rIns="0" bIns="0" rtlCol="0" anchor="ctr"/>
-          <a:lstStyle/>
-          <a:p>
-            <a:pPr indent="0" marL="0">
-              <a:buNone/>
-            </a:pPr>
-            <a:r>
-              <a:rPr lang="en-US" sz="1300" i="1" dirty="0">
-                <a:solidFill>
-                  <a:srgbClr val="D7E7E7"/>
-                </a:solidFill>
-                <a:latin typeface="Calibri" pitchFamily="34" charset="0"/>
-                <a:ea typeface="Calibri" pitchFamily="34" charset="-122"/>
-                <a:cs typeface="Calibri" pitchFamily="34" charset="-120"/>
-              </a:rPr>
-              <a:t>Sesión 3, jueves 17 de septiembre: cómo detectar errores y el Laboratorio Práctico 1.</a:t>
-            </a:r>
-            <a:endParaRPr lang="en-US" sz="1300" dirty="0"/>
+              <a:t>Lo generativo no es otra arquitectura: es usar estas redes para producir contenido nuevo. Difusión para imagen, transformers para texto.</a:t>
+            </a:r>
+            <a:endParaRPr lang="en-US" sz="1350" dirty="0"/>
           </a:p>
         </p:txBody>
       </p:sp>
@@ -11214,6 +15375,691 @@
               <a:t>Por eso hoy aprendes a pedirle que te diga de dónde sacó cada cosa. Sin eso no puedes verificar nada.</a:t>
             </a:r>
             <a:endParaRPr lang="en-US" sz="1300" dirty="0"/>
+          </a:p>
+        </p:txBody>
+      </p:sp>
+    </p:spTree>
+  </p:cSld>
+  <p:clrMapOvr>
+    <a:masterClrMapping/>
+  </p:clrMapOvr>
+</p:sld>
+</file>
+
+<file path=ppt/slides/slide30.xml><?xml version="1.0" encoding="utf-8"?>
+<p:sld xmlns:a="http://schemas.openxmlformats.org/drawingml/2006/main" xmlns:r="http://schemas.openxmlformats.org/officeDocument/2006/relationships" xmlns:p="http://schemas.openxmlformats.org/presentationml/2006/main">
+  <p:cSld name="Pipeline LLM">
+    <p:spTree>
+      <p:nvGrpSpPr>
+        <p:cNvPr id="1" name=""/>
+        <p:cNvGrpSpPr/>
+        <p:nvPr/>
+      </p:nvGrpSpPr>
+      <p:grpSpPr>
+        <a:xfrm>
+          <a:off x="0" y="0"/>
+          <a:ext cx="0" cy="0"/>
+          <a:chOff x="0" y="0"/>
+          <a:chExt cx="0" cy="0"/>
+        </a:xfrm>
+      </p:grpSpPr>
+      <p:sp>
+        <p:nvSpPr>
+          <p:cNvPr id="2" name="Text"/>
+          <p:cNvSpPr txBox="1"/>
+          <p:nvPr/>
+        </p:nvSpPr>
+        <p:spPr>
+          <a:xfrm>
+            <a:off x="566928" y="402336"/>
+            <a:ext cx="11057839" cy="749808"/>
+          </a:xfrm>
+          <a:prstGeom prst="rect">
+            <a:avLst/>
+          </a:prstGeom>
+          <a:noFill/>
+          <a:ln/>
+        </p:spPr>
+        <p:txBody>
+          <a:bodyPr wrap="square" lIns="0" tIns="0" rIns="0" bIns="0" rtlCol="0" anchor="t"/>
+          <a:lstStyle/>
+          <a:p>
+            <a:pPr algn="l" indent="0" marL="0">
+              <a:buNone/>
+            </a:pPr>
+            <a:r>
+              <a:rPr lang="en-US" sz="3200" b="1" dirty="0">
+                <a:solidFill>
+                  <a:srgbClr val="16262E"/>
+                </a:solidFill>
+                <a:latin typeface="Arial" pitchFamily="34" charset="0"/>
+                <a:ea typeface="Arial" pitchFamily="34" charset="-122"/>
+                <a:cs typeface="Arial" pitchFamily="34" charset="-120"/>
+              </a:rPr>
+              <a:t>Del transformer a la herramienta que abres</a:t>
+            </a:r>
+            <a:endParaRPr lang="en-US" sz="3200" dirty="0"/>
+          </a:p>
+        </p:txBody>
+      </p:sp>
+      <p:sp>
+        <p:nvSpPr>
+          <p:cNvPr id="3" name="Text"/>
+          <p:cNvSpPr txBox="1"/>
+          <p:nvPr/>
+        </p:nvSpPr>
+        <p:spPr>
+          <a:xfrm>
+            <a:off x="566928" y="1280160"/>
+            <a:ext cx="11057839" cy="731520"/>
+          </a:xfrm>
+          <a:prstGeom prst="rect">
+            <a:avLst/>
+          </a:prstGeom>
+          <a:noFill/>
+          <a:ln/>
+        </p:spPr>
+        <p:txBody>
+          <a:bodyPr wrap="square" lIns="0" tIns="0" rIns="0" bIns="0" rtlCol="0" anchor="t"/>
+          <a:lstStyle/>
+          <a:p>
+            <a:pPr indent="0" marL="0">
+              <a:buNone/>
+            </a:pPr>
+            <a:r>
+              <a:rPr lang="en-US" sz="1500" dirty="0">
+                <a:solidFill>
+                  <a:srgbClr val="5A6B73"/>
+                </a:solidFill>
+                <a:latin typeface="Calibri" pitchFamily="34" charset="0"/>
+                <a:ea typeface="Calibri" pitchFamily="34" charset="-122"/>
+                <a:cs typeface="Calibri" pitchFamily="34" charset="-120"/>
+              </a:rPr>
+              <a:t>Tres pasos de entrenamiento, y cada uno explica algo que ya viste en el curso.</a:t>
+            </a:r>
+            <a:endParaRPr lang="en-US" sz="1500" dirty="0"/>
+          </a:p>
+        </p:txBody>
+      </p:sp>
+      <p:sp>
+        <p:nvSpPr>
+          <p:cNvPr id="4" name="Shape"/>
+          <p:cNvSpPr/>
+          <p:nvPr/>
+        </p:nvSpPr>
+        <p:spPr>
+          <a:xfrm>
+            <a:off x="566928" y="2011680"/>
+            <a:ext cx="3503066" cy="2750000"/>
+          </a:xfrm>
+          <a:prstGeom prst="roundRect">
+            <a:avLst>
+              <a:gd name="adj" fmla="val 2933"/>
+            </a:avLst>
+          </a:prstGeom>
+          <a:solidFill>
+            <a:srgbClr val="F2F5F6"/>
+          </a:solidFill>
+          <a:ln w="12700">
+            <a:solidFill>
+              <a:srgbClr val="F2F5F6"/>
+            </a:solidFill>
+            <a:prstDash val="solid"/>
+          </a:ln>
+        </p:spPr>
+      </p:sp>
+      <p:sp>
+        <p:nvSpPr>
+          <p:cNvPr id="5" name="Shape"/>
+          <p:cNvSpPr/>
+          <p:nvPr/>
+        </p:nvSpPr>
+        <p:spPr>
+          <a:xfrm>
+            <a:off x="804672" y="2231136"/>
+            <a:ext cx="420624" cy="420624"/>
+          </a:xfrm>
+          <a:prstGeom prst="ellipse">
+            <a:avLst/>
+          </a:prstGeom>
+          <a:solidFill>
+            <a:srgbClr val="2E7D7D"/>
+          </a:solidFill>
+          <a:ln w="12700">
+            <a:solidFill>
+              <a:srgbClr val="2E7D7D"/>
+            </a:solidFill>
+            <a:prstDash val="solid"/>
+          </a:ln>
+        </p:spPr>
+      </p:sp>
+      <p:sp>
+        <p:nvSpPr>
+          <p:cNvPr id="6" name="Text"/>
+          <p:cNvSpPr txBox="1"/>
+          <p:nvPr/>
+        </p:nvSpPr>
+        <p:spPr>
+          <a:xfrm>
+            <a:off x="804672" y="2231136"/>
+            <a:ext cx="420624" cy="420624"/>
+          </a:xfrm>
+          <a:prstGeom prst="rect">
+            <a:avLst/>
+          </a:prstGeom>
+          <a:noFill/>
+          <a:ln/>
+        </p:spPr>
+        <p:txBody>
+          <a:bodyPr wrap="square" lIns="0" tIns="0" rIns="0" bIns="0" rtlCol="0" anchor="ctr"/>
+          <a:lstStyle/>
+          <a:p>
+            <a:pPr algn="ctr" indent="0" marL="0">
+              <a:buNone/>
+            </a:pPr>
+            <a:r>
+              <a:rPr lang="en-US" sz="1400" b="1" dirty="0">
+                <a:solidFill>
+                  <a:srgbClr val="FFFFFF"/>
+                </a:solidFill>
+                <a:latin typeface="Arial" pitchFamily="34" charset="0"/>
+                <a:ea typeface="Arial" pitchFamily="34" charset="-122"/>
+                <a:cs typeface="Arial" pitchFamily="34" charset="-120"/>
+              </a:rPr>
+              <a:t>1</a:t>
+            </a:r>
+            <a:endParaRPr lang="en-US" sz="1400" dirty="0"/>
+          </a:p>
+        </p:txBody>
+      </p:sp>
+      <p:sp>
+        <p:nvSpPr>
+          <p:cNvPr id="7" name="Text"/>
+          <p:cNvSpPr txBox="1"/>
+          <p:nvPr/>
+        </p:nvSpPr>
+        <p:spPr>
+          <a:xfrm>
+            <a:off x="804672" y="2798064"/>
+            <a:ext cx="3027578" cy="583184"/>
+          </a:xfrm>
+          <a:prstGeom prst="rect">
+            <a:avLst/>
+          </a:prstGeom>
+          <a:noFill/>
+          <a:ln/>
+        </p:spPr>
+        <p:txBody>
+          <a:bodyPr wrap="square" lIns="0" tIns="0" rIns="0" bIns="0" rtlCol="0" anchor="t"/>
+          <a:lstStyle/>
+          <a:p>
+            <a:pPr indent="0" marL="0">
+              <a:buNone/>
+            </a:pPr>
+            <a:r>
+              <a:rPr lang="en-US" sz="1600" b="1" dirty="0">
+                <a:solidFill>
+                  <a:srgbClr val="16262E"/>
+                </a:solidFill>
+                <a:latin typeface="Arial" pitchFamily="34" charset="0"/>
+                <a:ea typeface="Arial" pitchFamily="34" charset="-122"/>
+                <a:cs typeface="Arial" pitchFamily="34" charset="-120"/>
+              </a:rPr>
+              <a:t>Preentrenamiento</a:t>
+            </a:r>
+            <a:endParaRPr lang="en-US" sz="1600" dirty="0"/>
+          </a:p>
+        </p:txBody>
+      </p:sp>
+      <p:sp>
+        <p:nvSpPr>
+          <p:cNvPr id="8" name="Text"/>
+          <p:cNvSpPr txBox="1"/>
+          <p:nvPr/>
+        </p:nvSpPr>
+        <p:spPr>
+          <a:xfrm>
+            <a:off x="804672" y="3455000"/>
+            <a:ext cx="3027578" cy="1260000"/>
+          </a:xfrm>
+          <a:prstGeom prst="rect">
+            <a:avLst/>
+          </a:prstGeom>
+          <a:noFill/>
+          <a:ln/>
+        </p:spPr>
+        <p:txBody>
+          <a:bodyPr wrap="square" lIns="0" tIns="0" rIns="0" bIns="0" rtlCol="0" anchor="t"/>
+          <a:lstStyle/>
+          <a:p>
+            <a:pPr indent="0" marL="0">
+              <a:lnSpc>
+                <a:spcPct val="110000"/>
+              </a:lnSpc>
+              <a:buNone/>
+            </a:pPr>
+            <a:r>
+              <a:rPr lang="en-US" sz="1300" dirty="0">
+                <a:solidFill>
+                  <a:srgbClr val="16262E"/>
+                </a:solidFill>
+                <a:latin typeface="Calibri" pitchFamily="34" charset="0"/>
+                <a:ea typeface="Calibri" pitchFamily="34" charset="-122"/>
+                <a:cs typeface="Calibri" pitchFamily="34" charset="-120"/>
+              </a:rPr>
+              <a:t>Lee una porción enorme de todo lo escrito con una sola tarea: predecir la palabra que sigue. De ahí sale lo que sabe y también lo que inventa.</a:t>
+            </a:r>
+            <a:endParaRPr lang="en-US" sz="1300" dirty="0"/>
+          </a:p>
+        </p:txBody>
+      </p:sp>
+      <p:sp>
+        <p:nvSpPr>
+          <p:cNvPr id="9" name="Shape"/>
+          <p:cNvSpPr/>
+          <p:nvPr/>
+        </p:nvSpPr>
+        <p:spPr>
+          <a:xfrm>
+            <a:off x="4344314" y="2011680"/>
+            <a:ext cx="3503066" cy="2750000"/>
+          </a:xfrm>
+          <a:prstGeom prst="roundRect">
+            <a:avLst>
+              <a:gd name="adj" fmla="val 2933"/>
+            </a:avLst>
+          </a:prstGeom>
+          <a:solidFill>
+            <a:srgbClr val="F2F5F6"/>
+          </a:solidFill>
+          <a:ln w="12700">
+            <a:solidFill>
+              <a:srgbClr val="F2F5F6"/>
+            </a:solidFill>
+            <a:prstDash val="solid"/>
+          </a:ln>
+        </p:spPr>
+      </p:sp>
+      <p:sp>
+        <p:nvSpPr>
+          <p:cNvPr id="10" name="Shape"/>
+          <p:cNvSpPr/>
+          <p:nvPr/>
+        </p:nvSpPr>
+        <p:spPr>
+          <a:xfrm>
+            <a:off x="4582058" y="2231136"/>
+            <a:ext cx="420624" cy="420624"/>
+          </a:xfrm>
+          <a:prstGeom prst="ellipse">
+            <a:avLst/>
+          </a:prstGeom>
+          <a:solidFill>
+            <a:srgbClr val="2E7D7D"/>
+          </a:solidFill>
+          <a:ln w="12700">
+            <a:solidFill>
+              <a:srgbClr val="2E7D7D"/>
+            </a:solidFill>
+            <a:prstDash val="solid"/>
+          </a:ln>
+        </p:spPr>
+      </p:sp>
+      <p:sp>
+        <p:nvSpPr>
+          <p:cNvPr id="11" name="Text"/>
+          <p:cNvSpPr txBox="1"/>
+          <p:nvPr/>
+        </p:nvSpPr>
+        <p:spPr>
+          <a:xfrm>
+            <a:off x="4582058" y="2231136"/>
+            <a:ext cx="420624" cy="420624"/>
+          </a:xfrm>
+          <a:prstGeom prst="rect">
+            <a:avLst/>
+          </a:prstGeom>
+          <a:noFill/>
+          <a:ln/>
+        </p:spPr>
+        <p:txBody>
+          <a:bodyPr wrap="square" lIns="0" tIns="0" rIns="0" bIns="0" rtlCol="0" anchor="ctr"/>
+          <a:lstStyle/>
+          <a:p>
+            <a:pPr algn="ctr" indent="0" marL="0">
+              <a:buNone/>
+            </a:pPr>
+            <a:r>
+              <a:rPr lang="en-US" sz="1400" b="1" dirty="0">
+                <a:solidFill>
+                  <a:srgbClr val="FFFFFF"/>
+                </a:solidFill>
+                <a:latin typeface="Arial" pitchFamily="34" charset="0"/>
+                <a:ea typeface="Arial" pitchFamily="34" charset="-122"/>
+                <a:cs typeface="Arial" pitchFamily="34" charset="-120"/>
+              </a:rPr>
+              <a:t>2</a:t>
+            </a:r>
+            <a:endParaRPr lang="en-US" sz="1400" dirty="0"/>
+          </a:p>
+        </p:txBody>
+      </p:sp>
+      <p:sp>
+        <p:nvSpPr>
+          <p:cNvPr id="12" name="Text"/>
+          <p:cNvSpPr txBox="1"/>
+          <p:nvPr/>
+        </p:nvSpPr>
+        <p:spPr>
+          <a:xfrm>
+            <a:off x="4582058" y="2798064"/>
+            <a:ext cx="3027578" cy="583184"/>
+          </a:xfrm>
+          <a:prstGeom prst="rect">
+            <a:avLst/>
+          </a:prstGeom>
+          <a:noFill/>
+          <a:ln/>
+        </p:spPr>
+        <p:txBody>
+          <a:bodyPr wrap="square" lIns="0" tIns="0" rIns="0" bIns="0" rtlCol="0" anchor="t"/>
+          <a:lstStyle/>
+          <a:p>
+            <a:pPr indent="0" marL="0">
+              <a:buNone/>
+            </a:pPr>
+            <a:r>
+              <a:rPr lang="en-US" sz="1600" b="1" dirty="0">
+                <a:solidFill>
+                  <a:srgbClr val="16262E"/>
+                </a:solidFill>
+                <a:latin typeface="Arial" pitchFamily="34" charset="0"/>
+                <a:ea typeface="Arial" pitchFamily="34" charset="-122"/>
+                <a:cs typeface="Arial" pitchFamily="34" charset="-120"/>
+              </a:rPr>
+              <a:t>Ajuste por instrucciones</a:t>
+            </a:r>
+            <a:endParaRPr lang="en-US" sz="1600" dirty="0"/>
+          </a:p>
+        </p:txBody>
+      </p:sp>
+      <p:sp>
+        <p:nvSpPr>
+          <p:cNvPr id="13" name="Text"/>
+          <p:cNvSpPr txBox="1"/>
+          <p:nvPr/>
+        </p:nvSpPr>
+        <p:spPr>
+          <a:xfrm>
+            <a:off x="4582058" y="3455000"/>
+            <a:ext cx="3027578" cy="1260000"/>
+          </a:xfrm>
+          <a:prstGeom prst="rect">
+            <a:avLst/>
+          </a:prstGeom>
+          <a:noFill/>
+          <a:ln/>
+        </p:spPr>
+        <p:txBody>
+          <a:bodyPr wrap="square" lIns="0" tIns="0" rIns="0" bIns="0" rtlCol="0" anchor="t"/>
+          <a:lstStyle/>
+          <a:p>
+            <a:pPr indent="0" marL="0">
+              <a:lnSpc>
+                <a:spcPct val="110000"/>
+              </a:lnSpc>
+              <a:buNone/>
+            </a:pPr>
+            <a:r>
+              <a:rPr lang="en-US" sz="1300" dirty="0">
+                <a:solidFill>
+                  <a:srgbClr val="16262E"/>
+                </a:solidFill>
+                <a:latin typeface="Calibri" pitchFamily="34" charset="0"/>
+                <a:ea typeface="Calibri" pitchFamily="34" charset="-122"/>
+                <a:cs typeface="Calibri" pitchFamily="34" charset="-120"/>
+              </a:rPr>
+              <a:t>Con miles de ejemplos aprende a seguir órdenes en lugar de solo continuar el texto. Aquí nace el prompt tal como lo escribes hoy.</a:t>
+            </a:r>
+            <a:endParaRPr lang="en-US" sz="1300" dirty="0"/>
+          </a:p>
+        </p:txBody>
+      </p:sp>
+      <p:sp>
+        <p:nvSpPr>
+          <p:cNvPr id="14" name="Shape"/>
+          <p:cNvSpPr/>
+          <p:nvPr/>
+        </p:nvSpPr>
+        <p:spPr>
+          <a:xfrm>
+            <a:off x="8121701" y="2011680"/>
+            <a:ext cx="3503066" cy="2750000"/>
+          </a:xfrm>
+          <a:prstGeom prst="roundRect">
+            <a:avLst>
+              <a:gd name="adj" fmla="val 2933"/>
+            </a:avLst>
+          </a:prstGeom>
+          <a:solidFill>
+            <a:srgbClr val="F2F5F6"/>
+          </a:solidFill>
+          <a:ln w="12700">
+            <a:solidFill>
+              <a:srgbClr val="F2F5F6"/>
+            </a:solidFill>
+            <a:prstDash val="solid"/>
+          </a:ln>
+        </p:spPr>
+      </p:sp>
+      <p:sp>
+        <p:nvSpPr>
+          <p:cNvPr id="15" name="Shape"/>
+          <p:cNvSpPr/>
+          <p:nvPr/>
+        </p:nvSpPr>
+        <p:spPr>
+          <a:xfrm>
+            <a:off x="8359445" y="2231136"/>
+            <a:ext cx="420624" cy="420624"/>
+          </a:xfrm>
+          <a:prstGeom prst="ellipse">
+            <a:avLst/>
+          </a:prstGeom>
+          <a:solidFill>
+            <a:srgbClr val="2E7D7D"/>
+          </a:solidFill>
+          <a:ln w="12700">
+            <a:solidFill>
+              <a:srgbClr val="2E7D7D"/>
+            </a:solidFill>
+            <a:prstDash val="solid"/>
+          </a:ln>
+        </p:spPr>
+      </p:sp>
+      <p:sp>
+        <p:nvSpPr>
+          <p:cNvPr id="16" name="Text"/>
+          <p:cNvSpPr txBox="1"/>
+          <p:nvPr/>
+        </p:nvSpPr>
+        <p:spPr>
+          <a:xfrm>
+            <a:off x="8359445" y="2231136"/>
+            <a:ext cx="420624" cy="420624"/>
+          </a:xfrm>
+          <a:prstGeom prst="rect">
+            <a:avLst/>
+          </a:prstGeom>
+          <a:noFill/>
+          <a:ln/>
+        </p:spPr>
+        <p:txBody>
+          <a:bodyPr wrap="square" lIns="0" tIns="0" rIns="0" bIns="0" rtlCol="0" anchor="ctr"/>
+          <a:lstStyle/>
+          <a:p>
+            <a:pPr algn="ctr" indent="0" marL="0">
+              <a:buNone/>
+            </a:pPr>
+            <a:r>
+              <a:rPr lang="en-US" sz="1400" b="1" dirty="0">
+                <a:solidFill>
+                  <a:srgbClr val="FFFFFF"/>
+                </a:solidFill>
+                <a:latin typeface="Arial" pitchFamily="34" charset="0"/>
+                <a:ea typeface="Arial" pitchFamily="34" charset="-122"/>
+                <a:cs typeface="Arial" pitchFamily="34" charset="-120"/>
+              </a:rPr>
+              <a:t>3</a:t>
+            </a:r>
+            <a:endParaRPr lang="en-US" sz="1400" dirty="0"/>
+          </a:p>
+        </p:txBody>
+      </p:sp>
+      <p:sp>
+        <p:nvSpPr>
+          <p:cNvPr id="17" name="Text"/>
+          <p:cNvSpPr txBox="1"/>
+          <p:nvPr/>
+        </p:nvSpPr>
+        <p:spPr>
+          <a:xfrm>
+            <a:off x="8359445" y="2798064"/>
+            <a:ext cx="3027578" cy="583184"/>
+          </a:xfrm>
+          <a:prstGeom prst="rect">
+            <a:avLst/>
+          </a:prstGeom>
+          <a:noFill/>
+          <a:ln/>
+        </p:spPr>
+        <p:txBody>
+          <a:bodyPr wrap="square" lIns="0" tIns="0" rIns="0" bIns="0" rtlCol="0" anchor="t"/>
+          <a:lstStyle/>
+          <a:p>
+            <a:pPr indent="0" marL="0">
+              <a:buNone/>
+            </a:pPr>
+            <a:r>
+              <a:rPr lang="en-US" sz="1600" b="1" dirty="0">
+                <a:solidFill>
+                  <a:srgbClr val="16262E"/>
+                </a:solidFill>
+                <a:latin typeface="Arial" pitchFamily="34" charset="0"/>
+                <a:ea typeface="Arial" pitchFamily="34" charset="-122"/>
+                <a:cs typeface="Arial" pitchFamily="34" charset="-120"/>
+              </a:rPr>
+              <a:t>Refuerzo con personas</a:t>
+            </a:r>
+            <a:endParaRPr lang="en-US" sz="1600" dirty="0"/>
+          </a:p>
+        </p:txBody>
+      </p:sp>
+      <p:sp>
+        <p:nvSpPr>
+          <p:cNvPr id="18" name="Text"/>
+          <p:cNvSpPr txBox="1"/>
+          <p:nvPr/>
+        </p:nvSpPr>
+        <p:spPr>
+          <a:xfrm>
+            <a:off x="8359445" y="3455000"/>
+            <a:ext cx="3027578" cy="1260000"/>
+          </a:xfrm>
+          <a:prstGeom prst="rect">
+            <a:avLst/>
+          </a:prstGeom>
+          <a:noFill/>
+          <a:ln/>
+        </p:spPr>
+        <p:txBody>
+          <a:bodyPr wrap="square" lIns="0" tIns="0" rIns="0" bIns="0" rtlCol="0" anchor="t"/>
+          <a:lstStyle/>
+          <a:p>
+            <a:pPr indent="0" marL="0">
+              <a:lnSpc>
+                <a:spcPct val="110000"/>
+              </a:lnSpc>
+              <a:buNone/>
+            </a:pPr>
+            <a:r>
+              <a:rPr lang="en-US" sz="1300" dirty="0">
+                <a:solidFill>
+                  <a:srgbClr val="16262E"/>
+                </a:solidFill>
+                <a:latin typeface="Calibri" pitchFamily="34" charset="0"/>
+                <a:ea typeface="Calibri" pitchFamily="34" charset="-122"/>
+                <a:cs typeface="Calibri" pitchFamily="34" charset="-120"/>
+              </a:rPr>
+              <a:t>Personas califican sus respuestas y aprende a preferir las mejor calificadas. Ahí nace la complacencia: el jueves la ves como el sesgo número tres.</a:t>
+            </a:r>
+            <a:endParaRPr lang="en-US" sz="1300" dirty="0"/>
+          </a:p>
+        </p:txBody>
+      </p:sp>
+      <p:sp>
+        <p:nvSpPr>
+          <p:cNvPr id="19" name="Shape"/>
+          <p:cNvSpPr/>
+          <p:nvPr/>
+        </p:nvSpPr>
+        <p:spPr>
+          <a:xfrm>
+            <a:off x="566928" y="5193792"/>
+            <a:ext cx="11057839" cy="777240"/>
+          </a:xfrm>
+          <a:prstGeom prst="roundRect">
+            <a:avLst>
+              <a:gd name="adj" fmla="val 8235"/>
+            </a:avLst>
+          </a:prstGeom>
+          <a:solidFill>
+            <a:srgbClr val="16262E"/>
+          </a:solidFill>
+          <a:ln w="12700">
+            <a:solidFill>
+              <a:srgbClr val="16262E"/>
+            </a:solidFill>
+            <a:prstDash val="solid"/>
+          </a:ln>
+        </p:spPr>
+      </p:sp>
+      <p:sp>
+        <p:nvSpPr>
+          <p:cNvPr id="20" name="Text"/>
+          <p:cNvSpPr txBox="1"/>
+          <p:nvPr/>
+        </p:nvSpPr>
+        <p:spPr>
+          <a:xfrm>
+            <a:off x="841248" y="5193792"/>
+            <a:ext cx="10509199" cy="777240"/>
+          </a:xfrm>
+          <a:prstGeom prst="rect">
+            <a:avLst/>
+          </a:prstGeom>
+          <a:noFill/>
+          <a:ln/>
+        </p:spPr>
+        <p:txBody>
+          <a:bodyPr wrap="square" lIns="0" tIns="0" rIns="0" bIns="0" rtlCol="0" anchor="ctr"/>
+          <a:lstStyle/>
+          <a:p>
+            <a:pPr indent="0" marL="0">
+              <a:buNone/>
+            </a:pPr>
+            <a:r>
+              <a:rPr lang="en-US" sz="1350" dirty="0">
+                <a:solidFill>
+                  <a:srgbClr val="FFFFFF"/>
+                </a:solidFill>
+                <a:latin typeface="Calibri" pitchFamily="34" charset="0"/>
+                <a:ea typeface="Calibri" pitchFamily="34" charset="-122"/>
+                <a:cs typeface="Calibri" pitchFamily="34" charset="-120"/>
+              </a:rPr>
+              <a:t>El camino completo, con referencias verificables, está en el anexo: sesion-01/Anexo_De_la_regresion_al_transformer.pptx. La charla termina aquí: 10:25, de vuelta.</a:t>
+            </a:r>
+            <a:endParaRPr lang="en-US" sz="1350" dirty="0"/>
           </a:p>
         </p:txBody>
       </p:sp>
@@ -11451,7 +16297,7 @@
                 <a:ea typeface="Calibri" pitchFamily="34" charset="-122"/>
                 <a:cs typeface="Calibri" pitchFamily="34" charset="-120"/>
               </a:rPr>
-              <a:t>9:10 a 9:35</a:t>
+              <a:t>9:27 a 9:40</a:t>
             </a:r>
             <a:endParaRPr lang="en-US" sz="1200" dirty="0"/>
           </a:p>
@@ -13562,7 +18408,7 @@
                 <a:ea typeface="Calibri" pitchFamily="34" charset="-122"/>
                 <a:cs typeface="Calibri" pitchFamily="34" charset="-120"/>
               </a:rPr>
-              <a:t>9:35 a 10:00</a:t>
+              <a:t>9:40 a 10:15</a:t>
             </a:r>
             <a:endParaRPr lang="en-US" sz="1200" dirty="0"/>
           </a:p>
@@ -15257,7 +20103,7 @@
                 <a:ea typeface="Arial" pitchFamily="34" charset="-122"/>
                 <a:cs typeface="Arial" pitchFamily="34" charset="-120"/>
               </a:rPr>
-              <a:t>25 minutos</a:t>
+              <a:t>20 minutos</a:t>
             </a:r>
             <a:endParaRPr lang="en-US" sz="1300" dirty="0"/>
           </a:p>
@@ -15296,7 +20142,7 @@
                 <a:ea typeface="Arial" pitchFamily="34" charset="-122"/>
                 <a:cs typeface="Arial" pitchFamily="34" charset="-120"/>
               </a:rPr>
-              <a:t>Arregla cuatro prompts mal escritos</a:t>
+              <a:t>Arregla tres prompts mal escritos</a:t>
             </a:r>
             <a:endParaRPr lang="en-US" sz="2900" dirty="0"/>
           </a:p>
@@ -15429,7 +20275,7 @@
                 <a:ea typeface="Calibri" pitchFamily="34" charset="-122"/>
                 <a:cs typeface="Calibri" pitchFamily="34" charset="-120"/>
               </a:rPr>
-              <a:t>El archivo trae ocho. Hoy hacemos cuatro: el 1, el 2, el 5 y el 8. Los otros quedan como práctica opcional.</a:t>
+              <a:t>El archivo trae ocho. Hoy hacemos tres: el 2, el 5 y el 8. Los demás quedan como práctica opcional.</a:t>
             </a:r>
             <a:endParaRPr lang="en-US" sz="1450" dirty="0"/>
           </a:p>
@@ -15828,7 +20674,7 @@
                 <a:ea typeface="Calibri" pitchFamily="34" charset="-122"/>
                 <a:cs typeface="Calibri" pitchFamily="34" charset="-120"/>
               </a:rPr>
-              <a:t>Ojo: un prompt más largo no es automáticamente mejor. En uno de los cuatro la respuesta correcta es no delegarle la tarea al modelo.</a:t>
+              <a:t>Ojo: un prompt más largo no es automáticamente mejor. En uno de los tres la respuesta correcta es no delegarle la tarea al modelo.</a:t>
             </a:r>
             <a:endParaRPr lang="en-US" sz="1450" dirty="0"/>
           </a:p>

--- a/sesion-02/Sesion_02_Copilot_y_Prompting.pptx
+++ b/sesion-02/Sesion_02_Copilot_y_Prompting.pptx
@@ -2115,7 +2115,7 @@
           <a:p>
             <a:r>
               <a:rPr lang="en-US" dirty="0"/>
-              <a:t>Pídeles que abran Word y verifiquen si Copilot les ofrece hacer referencia a archivos. Dos minutos. Quien no sepa en qué modo está no puede decidir qué información pegar.</a:t>
+              <a:t>Pídeles que abran Copilot Chat con su cuenta del Instituto y verifiquen que pueden adjuntar o referenciar un archivo de OneDrive. Dos minutos. Quien no sepa en qué modo está no puede decidir qué información pegar.</a:t>
             </a:r>
             <a:endParaRPr lang="en-US" dirty="0"/>
           </a:p>
@@ -16313,7 +16313,7 @@
 
 <file path=ppt/slides/slide5.xml><?xml version="1.0" encoding="utf-8"?>
 <p:sld xmlns:a="http://schemas.openxmlformats.org/drawingml/2006/main" xmlns:r="http://schemas.openxmlformats.org/officeDocument/2006/relationships" xmlns:p="http://schemas.openxmlformats.org/presentationml/2006/main">
-  <p:cSld name="Slide 5">
+  <p:cSld name="Copilot en el INEGI">
     <p:spTree>
       <p:nvGrpSpPr>
         <p:cNvPr id="1" name=""/>
@@ -16330,14 +16330,14 @@
       </p:grpSpPr>
       <p:sp>
         <p:nvSpPr>
-          <p:cNvPr id="2" name="Text 0"/>
+          <p:cNvPr id="2" name="Text"/>
           <p:cNvSpPr txBox="1"/>
           <p:nvPr/>
         </p:nvSpPr>
         <p:spPr>
           <a:xfrm>
             <a:off x="566928" y="402336"/>
-            <a:ext cx="9229039" cy="749808"/>
+            <a:ext cx="11057839" cy="749808"/>
           </a:xfrm>
           <a:prstGeom prst="rect">
             <a:avLst/>
@@ -16349,7 +16349,7 @@
           <a:bodyPr wrap="square" lIns="0" tIns="0" rIns="0" bIns="0" rtlCol="0" anchor="t"/>
           <a:lstStyle/>
           <a:p>
-            <a:pPr algn="l" indent="0" marL="0">
+            <a:pPr indent="0" marL="0">
               <a:buNone/>
             </a:pPr>
             <a:r>
@@ -16361,7 +16361,7 @@
                 <a:ea typeface="Arial" pitchFamily="34" charset="-122"/>
                 <a:cs typeface="Arial" pitchFamily="34" charset="-120"/>
               </a:rPr>
-              <a:t>Copilot no es una página. Son seis lugares</a:t>
+              <a:t>Copilot, en el INEGI, vive en un solo lugar</a:t>
             </a:r>
             <a:endParaRPr lang="en-US" sz="3200" dirty="0"/>
           </a:p>
@@ -16369,14 +16369,14 @@
       </p:sp>
       <p:sp>
         <p:nvSpPr>
-          <p:cNvPr id="3" name="Text 1"/>
+          <p:cNvPr id="3" name="Text"/>
           <p:cNvSpPr txBox="1"/>
           <p:nvPr/>
         </p:nvSpPr>
         <p:spPr>
           <a:xfrm>
             <a:off x="566928" y="1280160"/>
-            <a:ext cx="9960559" cy="365760"/>
+            <a:ext cx="11057839" cy="731520"/>
           </a:xfrm>
           <a:prstGeom prst="rect">
             <a:avLst/>
@@ -16400,7 +16400,7 @@
                 <a:ea typeface="Calibri" pitchFamily="34" charset="-122"/>
                 <a:cs typeface="Calibri" pitchFamily="34" charset="-120"/>
               </a:rPr>
-              <a:t>Cada uno sirve para algo distinto. Hoy vas a usar por lo menos tres.</a:t>
+              <a:t>No aparece dentro de Word, Excel, Outlook ni Teams. Lo que tienes es Copilot Chat con tu cuenta del Instituto, y alcanza para todo lo que hace este curso.</a:t>
             </a:r>
             <a:endParaRPr lang="en-US" sz="1500" dirty="0"/>
           </a:p>
@@ -16408,126 +16408,18 @@
       </p:sp>
       <p:sp>
         <p:nvSpPr>
-          <p:cNvPr id="4" name="Shape 2"/>
+          <p:cNvPr id="4" name="Shape"/>
           <p:cNvSpPr/>
           <p:nvPr/>
         </p:nvSpPr>
         <p:spPr>
           <a:xfrm>
-            <a:off x="566928" y="1937791"/>
-            <a:ext cx="3503066" cy="1916405"/>
+            <a:off x="566928" y="2011680"/>
+            <a:ext cx="3503066" cy="2750000"/>
           </a:xfrm>
           <a:prstGeom prst="roundRect">
             <a:avLst>
-              <a:gd name="adj" fmla="val 3817"/>
-            </a:avLst>
-          </a:prstGeom>
-          <a:solidFill>
-            <a:srgbClr val="D7E7E7"/>
-          </a:solidFill>
-          <a:ln w="12700">
-            <a:solidFill>
-              <a:srgbClr val="D7E7E7"/>
-            </a:solidFill>
-            <a:prstDash val="solid"/>
-          </a:ln>
-        </p:spPr>
-      </p:sp>
-      <p:sp>
-        <p:nvSpPr>
-          <p:cNvPr id="5" name="Text 3"/>
-          <p:cNvSpPr txBox="1"/>
-          <p:nvPr/>
-        </p:nvSpPr>
-        <p:spPr>
-          <a:xfrm>
-            <a:off x="804672" y="2175535"/>
-            <a:ext cx="3027578" cy="311099"/>
-          </a:xfrm>
-          <a:prstGeom prst="rect">
-            <a:avLst/>
-          </a:prstGeom>
-          <a:noFill/>
-          <a:ln/>
-        </p:spPr>
-        <p:txBody>
-          <a:bodyPr wrap="square" lIns="0" tIns="0" rIns="0" bIns="0" rtlCol="0" anchor="t"/>
-          <a:lstStyle/>
-          <a:p>
-            <a:pPr indent="0" marL="0">
-              <a:buNone/>
-            </a:pPr>
-            <a:r>
-              <a:rPr lang="en-US" sz="1552" b="1" dirty="0">
-                <a:solidFill>
-                  <a:srgbClr val="16262E"/>
-                </a:solidFill>
-                <a:latin typeface="Arial" pitchFamily="34" charset="0"/>
-                <a:ea typeface="Arial" pitchFamily="34" charset="-122"/>
-                <a:cs typeface="Arial" pitchFamily="34" charset="-120"/>
-              </a:rPr>
-              <a:t>En Word</a:t>
-            </a:r>
-            <a:endParaRPr lang="en-US" sz="1552" dirty="0"/>
-          </a:p>
-        </p:txBody>
-      </p:sp>
-      <p:sp>
-        <p:nvSpPr>
-          <p:cNvPr id="6" name="Text 4"/>
-          <p:cNvSpPr txBox="1"/>
-          <p:nvPr/>
-        </p:nvSpPr>
-        <p:spPr>
-          <a:xfrm>
-            <a:off x="804672" y="2632939"/>
-            <a:ext cx="3027578" cy="1020089"/>
-          </a:xfrm>
-          <a:prstGeom prst="rect">
-            <a:avLst/>
-          </a:prstGeom>
-          <a:noFill/>
-          <a:ln/>
-        </p:spPr>
-        <p:txBody>
-          <a:bodyPr wrap="square" lIns="0" tIns="0" rIns="0" bIns="0" rtlCol="0" anchor="t"/>
-          <a:lstStyle/>
-          <a:p>
-            <a:pPr indent="0" marL="0">
-              <a:lnSpc>
-                <a:spcPct val="110000"/>
-              </a:lnSpc>
-              <a:buNone/>
-            </a:pPr>
-            <a:r>
-              <a:rPr lang="en-US" sz="1261" dirty="0">
-                <a:solidFill>
-                  <a:srgbClr val="16262E"/>
-                </a:solidFill>
-                <a:latin typeface="Calibri" pitchFamily="34" charset="0"/>
-                <a:ea typeface="Calibri" pitchFamily="34" charset="-122"/>
-                <a:cs typeface="Calibri" pitchFamily="34" charset="-120"/>
-              </a:rPr>
-              <a:t>Resumir, extraer, reescribir y ajustar el tono de un documento que ya tienes abierto. Aquí vas a estar casi toda la sesión.</a:t>
-            </a:r>
-            <a:endParaRPr lang="en-US" sz="1261" dirty="0"/>
-          </a:p>
-        </p:txBody>
-      </p:sp>
-      <p:sp>
-        <p:nvSpPr>
-          <p:cNvPr id="7" name="Shape 5"/>
-          <p:cNvSpPr/>
-          <p:nvPr/>
-        </p:nvSpPr>
-        <p:spPr>
-          <a:xfrm>
-            <a:off x="4344314" y="1937791"/>
-            <a:ext cx="3503066" cy="1916405"/>
-          </a:xfrm>
-          <a:prstGeom prst="roundRect">
-            <a:avLst>
-              <a:gd name="adj" fmla="val 3817"/>
+              <a:gd name="adj" fmla="val 2933"/>
             </a:avLst>
           </a:prstGeom>
           <a:solidFill>
@@ -16543,53 +16435,117 @@
       </p:sp>
       <p:sp>
         <p:nvSpPr>
-          <p:cNvPr id="8" name="Text 6"/>
-          <p:cNvSpPr txBox="1"/>
-          <p:nvPr/>
-        </p:nvSpPr>
-        <p:spPr>
-          <a:xfrm>
-            <a:off x="4582058" y="2175535"/>
-            <a:ext cx="3027578" cy="311099"/>
-          </a:xfrm>
-          <a:prstGeom prst="rect">
-            <a:avLst/>
-          </a:prstGeom>
-          <a:noFill/>
-          <a:ln/>
-        </p:spPr>
-        <p:txBody>
-          <a:bodyPr wrap="square" lIns="0" tIns="0" rIns="0" bIns="0" rtlCol="0" anchor="t"/>
-          <a:lstStyle/>
-          <a:p>
-            <a:pPr indent="0" marL="0">
-              <a:buNone/>
-            </a:pPr>
-            <a:r>
-              <a:rPr lang="en-US" sz="1552" b="1" dirty="0">
-                <a:solidFill>
-                  <a:srgbClr val="16262E"/>
+          <p:cNvPr id="5" name="Shape"/>
+          <p:cNvSpPr/>
+          <p:nvPr/>
+        </p:nvSpPr>
+        <p:spPr>
+          <a:xfrm>
+            <a:off x="804672" y="2231136"/>
+            <a:ext cx="420624" cy="420624"/>
+          </a:xfrm>
+          <a:prstGeom prst="ellipse">
+            <a:avLst/>
+          </a:prstGeom>
+          <a:solidFill>
+            <a:srgbClr val="2E7D7D"/>
+          </a:solidFill>
+          <a:ln w="12700">
+            <a:solidFill>
+              <a:srgbClr val="2E7D7D"/>
+            </a:solidFill>
+            <a:prstDash val="solid"/>
+          </a:ln>
+        </p:spPr>
+      </p:sp>
+      <p:sp>
+        <p:nvSpPr>
+          <p:cNvPr id="6" name="Text"/>
+          <p:cNvSpPr txBox="1"/>
+          <p:nvPr/>
+        </p:nvSpPr>
+        <p:spPr>
+          <a:xfrm>
+            <a:off x="804672" y="2231136"/>
+            <a:ext cx="420624" cy="420624"/>
+          </a:xfrm>
+          <a:prstGeom prst="rect">
+            <a:avLst/>
+          </a:prstGeom>
+          <a:noFill/>
+          <a:ln/>
+        </p:spPr>
+        <p:txBody>
+          <a:bodyPr wrap="square" lIns="0" tIns="0" rIns="0" bIns="0" rtlCol="0" anchor="ctr"/>
+          <a:lstStyle/>
+          <a:p>
+            <a:pPr algn="ctr" indent="0" marL="0">
+              <a:buNone/>
+            </a:pPr>
+            <a:r>
+              <a:rPr lang="en-US" sz="1400" b="1" dirty="0">
+                <a:solidFill>
+                  <a:srgbClr val="FFFFFF"/>
                 </a:solidFill>
                 <a:latin typeface="Arial" pitchFamily="34" charset="0"/>
                 <a:ea typeface="Arial" pitchFamily="34" charset="-122"/>
                 <a:cs typeface="Arial" pitchFamily="34" charset="-120"/>
               </a:rPr>
-              <a:t>En Excel</a:t>
-            </a:r>
-            <a:endParaRPr lang="en-US" sz="1552" dirty="0"/>
-          </a:p>
-        </p:txBody>
-      </p:sp>
-      <p:sp>
-        <p:nvSpPr>
-          <p:cNvPr id="9" name="Text 7"/>
-          <p:cNvSpPr txBox="1"/>
-          <p:nvPr/>
-        </p:nvSpPr>
-        <p:spPr>
-          <a:xfrm>
-            <a:off x="4582058" y="2632939"/>
-            <a:ext cx="3027578" cy="1020089"/>
+              <a:t>1</a:t>
+            </a:r>
+            <a:endParaRPr lang="en-US" sz="1400" dirty="0"/>
+          </a:p>
+        </p:txBody>
+      </p:sp>
+      <p:sp>
+        <p:nvSpPr>
+          <p:cNvPr id="7" name="Text"/>
+          <p:cNvSpPr txBox="1"/>
+          <p:nvPr/>
+        </p:nvSpPr>
+        <p:spPr>
+          <a:xfrm>
+            <a:off x="804672" y="2798064"/>
+            <a:ext cx="3027578" cy="583184"/>
+          </a:xfrm>
+          <a:prstGeom prst="rect">
+            <a:avLst/>
+          </a:prstGeom>
+          <a:noFill/>
+          <a:ln/>
+        </p:spPr>
+        <p:txBody>
+          <a:bodyPr wrap="square" lIns="0" tIns="0" rIns="0" bIns="0" rtlCol="0" anchor="t"/>
+          <a:lstStyle/>
+          <a:p>
+            <a:pPr indent="0" marL="0">
+              <a:buNone/>
+            </a:pPr>
+            <a:r>
+              <a:rPr lang="en-US" sz="1600" b="1" dirty="0">
+                <a:solidFill>
+                  <a:srgbClr val="16262E"/>
+                </a:solidFill>
+                <a:latin typeface="Arial" pitchFamily="34" charset="0"/>
+                <a:ea typeface="Arial" pitchFamily="34" charset="-122"/>
+                <a:cs typeface="Arial" pitchFamily="34" charset="-120"/>
+              </a:rPr>
+              <a:t>Chat con archivos adjuntos</a:t>
+            </a:r>
+            <a:endParaRPr lang="en-US" sz="1600" dirty="0"/>
+          </a:p>
+        </p:txBody>
+      </p:sp>
+      <p:sp>
+        <p:nvSpPr>
+          <p:cNvPr id="8" name="Text"/>
+          <p:cNvSpPr txBox="1"/>
+          <p:nvPr/>
+        </p:nvSpPr>
+        <p:spPr>
+          <a:xfrm>
+            <a:off x="804672" y="3455000"/>
+            <a:ext cx="3027578" cy="1260000"/>
           </a:xfrm>
           <a:prstGeom prst="rect">
             <a:avLst/>
@@ -16608,7 +16564,7 @@
               <a:buNone/>
             </a:pPr>
             <a:r>
-              <a:rPr lang="en-US" sz="1261" dirty="0">
+              <a:rPr lang="en-US" sz="1300" dirty="0">
                 <a:solidFill>
                   <a:srgbClr val="16262E"/>
                 </a:solidFill>
@@ -16616,26 +16572,26 @@
                 <a:ea typeface="Calibri" pitchFamily="34" charset="-122"/>
                 <a:cs typeface="Calibri" pitchFamily="34" charset="-120"/>
               </a:rPr>
-              <a:t>Explicar fórmulas, proponer transformaciones y ordenar datos. Lo usas el viernes para la tabla comparativa.</a:t>
-            </a:r>
-            <a:endParaRPr lang="en-US" sz="1261" dirty="0"/>
-          </a:p>
-        </p:txBody>
-      </p:sp>
-      <p:sp>
-        <p:nvSpPr>
-          <p:cNvPr id="10" name="Shape 8"/>
+              <a:t>Sube el documento al chat y trabaja sobre él: resumir, extraer, comparar, reescribir. Así corren las prácticas del curso.</a:t>
+            </a:r>
+            <a:endParaRPr lang="en-US" sz="1300" dirty="0"/>
+          </a:p>
+        </p:txBody>
+      </p:sp>
+      <p:sp>
+        <p:nvSpPr>
+          <p:cNvPr id="9" name="Shape"/>
           <p:cNvSpPr/>
           <p:nvPr/>
         </p:nvSpPr>
         <p:spPr>
           <a:xfrm>
-            <a:off x="8121701" y="1937791"/>
-            <a:ext cx="3503066" cy="1916405"/>
+            <a:off x="4344314" y="2011680"/>
+            <a:ext cx="3503066" cy="2750000"/>
           </a:xfrm>
           <a:prstGeom prst="roundRect">
             <a:avLst>
-              <a:gd name="adj" fmla="val 3817"/>
+              <a:gd name="adj" fmla="val 2933"/>
             </a:avLst>
           </a:prstGeom>
           <a:solidFill>
@@ -16651,53 +16607,117 @@
       </p:sp>
       <p:sp>
         <p:nvSpPr>
-          <p:cNvPr id="11" name="Text 9"/>
-          <p:cNvSpPr txBox="1"/>
-          <p:nvPr/>
-        </p:nvSpPr>
-        <p:spPr>
-          <a:xfrm>
-            <a:off x="8359445" y="2175535"/>
-            <a:ext cx="3027578" cy="311099"/>
-          </a:xfrm>
-          <a:prstGeom prst="rect">
-            <a:avLst/>
-          </a:prstGeom>
-          <a:noFill/>
-          <a:ln/>
-        </p:spPr>
-        <p:txBody>
-          <a:bodyPr wrap="square" lIns="0" tIns="0" rIns="0" bIns="0" rtlCol="0" anchor="t"/>
-          <a:lstStyle/>
-          <a:p>
-            <a:pPr indent="0" marL="0">
-              <a:buNone/>
-            </a:pPr>
-            <a:r>
-              <a:rPr lang="en-US" sz="1552" b="1" dirty="0">
-                <a:solidFill>
-                  <a:srgbClr val="16262E"/>
+          <p:cNvPr id="10" name="Shape"/>
+          <p:cNvSpPr/>
+          <p:nvPr/>
+        </p:nvSpPr>
+        <p:spPr>
+          <a:xfrm>
+            <a:off x="4582058" y="2231136"/>
+            <a:ext cx="420624" cy="420624"/>
+          </a:xfrm>
+          <a:prstGeom prst="ellipse">
+            <a:avLst/>
+          </a:prstGeom>
+          <a:solidFill>
+            <a:srgbClr val="2E7D7D"/>
+          </a:solidFill>
+          <a:ln w="12700">
+            <a:solidFill>
+              <a:srgbClr val="2E7D7D"/>
+            </a:solidFill>
+            <a:prstDash val="solid"/>
+          </a:ln>
+        </p:spPr>
+      </p:sp>
+      <p:sp>
+        <p:nvSpPr>
+          <p:cNvPr id="11" name="Text"/>
+          <p:cNvSpPr txBox="1"/>
+          <p:nvPr/>
+        </p:nvSpPr>
+        <p:spPr>
+          <a:xfrm>
+            <a:off x="4582058" y="2231136"/>
+            <a:ext cx="420624" cy="420624"/>
+          </a:xfrm>
+          <a:prstGeom prst="rect">
+            <a:avLst/>
+          </a:prstGeom>
+          <a:noFill/>
+          <a:ln/>
+        </p:spPr>
+        <p:txBody>
+          <a:bodyPr wrap="square" lIns="0" tIns="0" rIns="0" bIns="0" rtlCol="0" anchor="ctr"/>
+          <a:lstStyle/>
+          <a:p>
+            <a:pPr algn="ctr" indent="0" marL="0">
+              <a:buNone/>
+            </a:pPr>
+            <a:r>
+              <a:rPr lang="en-US" sz="1400" b="1" dirty="0">
+                <a:solidFill>
+                  <a:srgbClr val="FFFFFF"/>
                 </a:solidFill>
                 <a:latin typeface="Arial" pitchFamily="34" charset="0"/>
                 <a:ea typeface="Arial" pitchFamily="34" charset="-122"/>
                 <a:cs typeface="Arial" pitchFamily="34" charset="-120"/>
               </a:rPr>
-              <a:t>En PowerPoint</a:t>
-            </a:r>
-            <a:endParaRPr lang="en-US" sz="1552" dirty="0"/>
-          </a:p>
-        </p:txBody>
-      </p:sp>
-      <p:sp>
-        <p:nvSpPr>
-          <p:cNvPr id="12" name="Text 10"/>
-          <p:cNvSpPr txBox="1"/>
-          <p:nvPr/>
-        </p:nvSpPr>
-        <p:spPr>
-          <a:xfrm>
-            <a:off x="8359445" y="2632939"/>
-            <a:ext cx="3027578" cy="1020089"/>
+              <a:t>2</a:t>
+            </a:r>
+            <a:endParaRPr lang="en-US" sz="1400" dirty="0"/>
+          </a:p>
+        </p:txBody>
+      </p:sp>
+      <p:sp>
+        <p:nvSpPr>
+          <p:cNvPr id="12" name="Text"/>
+          <p:cNvSpPr txBox="1"/>
+          <p:nvPr/>
+        </p:nvSpPr>
+        <p:spPr>
+          <a:xfrm>
+            <a:off x="4582058" y="2798064"/>
+            <a:ext cx="3027578" cy="583184"/>
+          </a:xfrm>
+          <a:prstGeom prst="rect">
+            <a:avLst/>
+          </a:prstGeom>
+          <a:noFill/>
+          <a:ln/>
+        </p:spPr>
+        <p:txBody>
+          <a:bodyPr wrap="square" lIns="0" tIns="0" rIns="0" bIns="0" rtlCol="0" anchor="t"/>
+          <a:lstStyle/>
+          <a:p>
+            <a:pPr indent="0" marL="0">
+              <a:buNone/>
+            </a:pPr>
+            <a:r>
+              <a:rPr lang="en-US" sz="1600" b="1" dirty="0">
+                <a:solidFill>
+                  <a:srgbClr val="16262E"/>
+                </a:solidFill>
+                <a:latin typeface="Arial" pitchFamily="34" charset="0"/>
+                <a:ea typeface="Arial" pitchFamily="34" charset="-122"/>
+                <a:cs typeface="Arial" pitchFamily="34" charset="-120"/>
+              </a:rPr>
+              <a:t>Acceso a tu OneDrive</a:t>
+            </a:r>
+            <a:endParaRPr lang="en-US" sz="1600" dirty="0"/>
+          </a:p>
+        </p:txBody>
+      </p:sp>
+      <p:sp>
+        <p:nvSpPr>
+          <p:cNvPr id="13" name="Text"/>
+          <p:cNvSpPr txBox="1"/>
+          <p:nvPr/>
+        </p:nvSpPr>
+        <p:spPr>
+          <a:xfrm>
+            <a:off x="4582058" y="3455000"/>
+            <a:ext cx="3027578" cy="1260000"/>
           </a:xfrm>
           <a:prstGeom prst="rect">
             <a:avLst/>
@@ -16716,7 +16736,7 @@
               <a:buNone/>
             </a:pPr>
             <a:r>
-              <a:rPr lang="en-US" sz="1261" dirty="0">
+              <a:rPr lang="en-US" sz="1300" dirty="0">
                 <a:solidFill>
                   <a:srgbClr val="16262E"/>
                 </a:solidFill>
@@ -16724,26 +16744,26 @@
                 <a:ea typeface="Calibri" pitchFamily="34" charset="-122"/>
                 <a:cs typeface="Calibri" pitchFamily="34" charset="-120"/>
               </a:rPr>
-              <a:t>Armar y reordenar láminas a partir de un documento. Uso ligero en estas dos semanas.</a:t>
-            </a:r>
-            <a:endParaRPr lang="en-US" sz="1261" dirty="0"/>
-          </a:p>
-        </p:txBody>
-      </p:sp>
-      <p:sp>
-        <p:nvSpPr>
-          <p:cNvPr id="13" name="Shape 11"/>
+              <a:t>Puede leer y referenciar los archivos de tu OneDrive institucional sin volverlos a subir. Lo comprobamos hoy en vivo.</a:t>
+            </a:r>
+            <a:endParaRPr lang="en-US" sz="1300" dirty="0"/>
+          </a:p>
+        </p:txBody>
+      </p:sp>
+      <p:sp>
+        <p:nvSpPr>
+          <p:cNvPr id="14" name="Shape"/>
           <p:cNvSpPr/>
           <p:nvPr/>
         </p:nvSpPr>
         <p:spPr>
           <a:xfrm>
-            <a:off x="566928" y="4128516"/>
-            <a:ext cx="3503066" cy="1916405"/>
+            <a:off x="8121701" y="2011680"/>
+            <a:ext cx="3503066" cy="2750000"/>
           </a:xfrm>
           <a:prstGeom prst="roundRect">
             <a:avLst>
-              <a:gd name="adj" fmla="val 3817"/>
+              <a:gd name="adj" fmla="val 2933"/>
             </a:avLst>
           </a:prstGeom>
           <a:solidFill>
@@ -16759,53 +16779,117 @@
       </p:sp>
       <p:sp>
         <p:nvSpPr>
-          <p:cNvPr id="14" name="Text 12"/>
-          <p:cNvSpPr txBox="1"/>
-          <p:nvPr/>
-        </p:nvSpPr>
-        <p:spPr>
-          <a:xfrm>
-            <a:off x="804672" y="4366260"/>
-            <a:ext cx="3027578" cy="311099"/>
-          </a:xfrm>
-          <a:prstGeom prst="rect">
-            <a:avLst/>
-          </a:prstGeom>
-          <a:noFill/>
-          <a:ln/>
-        </p:spPr>
-        <p:txBody>
-          <a:bodyPr wrap="square" lIns="0" tIns="0" rIns="0" bIns="0" rtlCol="0" anchor="t"/>
-          <a:lstStyle/>
-          <a:p>
-            <a:pPr indent="0" marL="0">
-              <a:buNone/>
-            </a:pPr>
-            <a:r>
-              <a:rPr lang="en-US" sz="1552" b="1" dirty="0">
-                <a:solidFill>
-                  <a:srgbClr val="16262E"/>
+          <p:cNvPr id="15" name="Shape"/>
+          <p:cNvSpPr/>
+          <p:nvPr/>
+        </p:nvSpPr>
+        <p:spPr>
+          <a:xfrm>
+            <a:off x="8359445" y="2231136"/>
+            <a:ext cx="420624" cy="420624"/>
+          </a:xfrm>
+          <a:prstGeom prst="ellipse">
+            <a:avLst/>
+          </a:prstGeom>
+          <a:solidFill>
+            <a:srgbClr val="2E7D7D"/>
+          </a:solidFill>
+          <a:ln w="12700">
+            <a:solidFill>
+              <a:srgbClr val="2E7D7D"/>
+            </a:solidFill>
+            <a:prstDash val="solid"/>
+          </a:ln>
+        </p:spPr>
+      </p:sp>
+      <p:sp>
+        <p:nvSpPr>
+          <p:cNvPr id="16" name="Text"/>
+          <p:cNvSpPr txBox="1"/>
+          <p:nvPr/>
+        </p:nvSpPr>
+        <p:spPr>
+          <a:xfrm>
+            <a:off x="8359445" y="2231136"/>
+            <a:ext cx="420624" cy="420624"/>
+          </a:xfrm>
+          <a:prstGeom prst="rect">
+            <a:avLst/>
+          </a:prstGeom>
+          <a:noFill/>
+          <a:ln/>
+        </p:spPr>
+        <p:txBody>
+          <a:bodyPr wrap="square" lIns="0" tIns="0" rIns="0" bIns="0" rtlCol="0" anchor="ctr"/>
+          <a:lstStyle/>
+          <a:p>
+            <a:pPr algn="ctr" indent="0" marL="0">
+              <a:buNone/>
+            </a:pPr>
+            <a:r>
+              <a:rPr lang="en-US" sz="1400" b="1" dirty="0">
+                <a:solidFill>
+                  <a:srgbClr val="FFFFFF"/>
                 </a:solidFill>
                 <a:latin typeface="Arial" pitchFamily="34" charset="0"/>
                 <a:ea typeface="Arial" pitchFamily="34" charset="-122"/>
                 <a:cs typeface="Arial" pitchFamily="34" charset="-120"/>
               </a:rPr>
-              <a:t>En Outlook</a:t>
-            </a:r>
-            <a:endParaRPr lang="en-US" sz="1552" dirty="0"/>
-          </a:p>
-        </p:txBody>
-      </p:sp>
-      <p:sp>
-        <p:nvSpPr>
-          <p:cNvPr id="15" name="Text 13"/>
-          <p:cNvSpPr txBox="1"/>
-          <p:nvPr/>
-        </p:nvSpPr>
-        <p:spPr>
-          <a:xfrm>
-            <a:off x="804672" y="4823663"/>
-            <a:ext cx="3027578" cy="1020089"/>
+              <a:t>3</a:t>
+            </a:r>
+            <a:endParaRPr lang="en-US" sz="1400" dirty="0"/>
+          </a:p>
+        </p:txBody>
+      </p:sp>
+      <p:sp>
+        <p:nvSpPr>
+          <p:cNvPr id="17" name="Text"/>
+          <p:cNvSpPr txBox="1"/>
+          <p:nvPr/>
+        </p:nvSpPr>
+        <p:spPr>
+          <a:xfrm>
+            <a:off x="8359445" y="2798064"/>
+            <a:ext cx="3027578" cy="583184"/>
+          </a:xfrm>
+          <a:prstGeom prst="rect">
+            <a:avLst/>
+          </a:prstGeom>
+          <a:noFill/>
+          <a:ln/>
+        </p:spPr>
+        <p:txBody>
+          <a:bodyPr wrap="square" lIns="0" tIns="0" rIns="0" bIns="0" rtlCol="0" anchor="t"/>
+          <a:lstStyle/>
+          <a:p>
+            <a:pPr indent="0" marL="0">
+              <a:buNone/>
+            </a:pPr>
+            <a:r>
+              <a:rPr lang="en-US" sz="1600" b="1" dirty="0">
+                <a:solidFill>
+                  <a:srgbClr val="16262E"/>
+                </a:solidFill>
+                <a:latin typeface="Arial" pitchFamily="34" charset="0"/>
+                <a:ea typeface="Arial" pitchFamily="34" charset="-122"/>
+                <a:cs typeface="Arial" pitchFamily="34" charset="-120"/>
+              </a:rPr>
+              <a:t>Outlook y Teams, sin asistente</a:t>
+            </a:r>
+            <a:endParaRPr lang="en-US" sz="1600" dirty="0"/>
+          </a:p>
+        </p:txBody>
+      </p:sp>
+      <p:sp>
+        <p:nvSpPr>
+          <p:cNvPr id="18" name="Text"/>
+          <p:cNvSpPr txBox="1"/>
+          <p:nvPr/>
+        </p:nvSpPr>
+        <p:spPr>
+          <a:xfrm>
+            <a:off x="8359445" y="3455000"/>
+            <a:ext cx="3027578" cy="1260000"/>
           </a:xfrm>
           <a:prstGeom prst="rect">
             <a:avLst/>
@@ -16824,7 +16908,7 @@
               <a:buNone/>
             </a:pPr>
             <a:r>
-              <a:rPr lang="en-US" sz="1261" dirty="0">
+              <a:rPr lang="en-US" sz="1300" dirty="0">
                 <a:solidFill>
                   <a:srgbClr val="16262E"/>
                 </a:solidFill>
@@ -16832,34 +16916,34 @@
                 <a:ea typeface="Calibri" pitchFamily="34" charset="-122"/>
                 <a:cs typeface="Calibri" pitchFamily="34" charset="-120"/>
               </a:rPr>
-              <a:t>Resumir hilos largos, sacar los compromisos y redactar respuestas. Con una trampa que ves después del receso.</a:t>
-            </a:r>
-            <a:endParaRPr lang="en-US" sz="1261" dirty="0"/>
-          </a:p>
-        </p:txBody>
-      </p:sp>
-      <p:sp>
-        <p:nvSpPr>
-          <p:cNvPr id="16" name="Shape 14"/>
+              <a:t>El correo y las reuniones siguen igual que siempre; lo que no hay es Copilot adentro. Esas prácticas se hacen adjuntando el archivo al chat.</a:t>
+            </a:r>
+            <a:endParaRPr lang="en-US" sz="1300" dirty="0"/>
+          </a:p>
+        </p:txBody>
+      </p:sp>
+      <p:sp>
+        <p:nvSpPr>
+          <p:cNvPr id="19" name="Shape"/>
           <p:cNvSpPr/>
           <p:nvPr/>
         </p:nvSpPr>
         <p:spPr>
           <a:xfrm>
-            <a:off x="4344314" y="4128516"/>
-            <a:ext cx="3503066" cy="1916405"/>
+            <a:off x="566928" y="5193792"/>
+            <a:ext cx="11057839" cy="777240"/>
           </a:xfrm>
           <a:prstGeom prst="roundRect">
             <a:avLst>
-              <a:gd name="adj" fmla="val 3817"/>
+              <a:gd name="adj" fmla="val 8235"/>
             </a:avLst>
           </a:prstGeom>
           <a:solidFill>
-            <a:srgbClr val="F2F5F6"/>
+            <a:srgbClr val="16262E"/>
           </a:solidFill>
           <a:ln w="12700">
             <a:solidFill>
-              <a:srgbClr val="F2F5F6"/>
+              <a:srgbClr val="16262E"/>
             </a:solidFill>
             <a:prstDash val="solid"/>
           </a:ln>
@@ -16867,62 +16951,23 @@
       </p:sp>
       <p:sp>
         <p:nvSpPr>
-          <p:cNvPr id="17" name="Text 15"/>
-          <p:cNvSpPr txBox="1"/>
-          <p:nvPr/>
-        </p:nvSpPr>
-        <p:spPr>
-          <a:xfrm>
-            <a:off x="4582058" y="4366260"/>
-            <a:ext cx="3027578" cy="311099"/>
-          </a:xfrm>
-          <a:prstGeom prst="rect">
-            <a:avLst/>
-          </a:prstGeom>
-          <a:noFill/>
-          <a:ln/>
-        </p:spPr>
-        <p:txBody>
-          <a:bodyPr wrap="square" lIns="0" tIns="0" rIns="0" bIns="0" rtlCol="0" anchor="t"/>
-          <a:lstStyle/>
-          <a:p>
-            <a:pPr indent="0" marL="0">
-              <a:buNone/>
-            </a:pPr>
-            <a:r>
-              <a:rPr lang="en-US" sz="1552" b="1" dirty="0">
-                <a:solidFill>
-                  <a:srgbClr val="16262E"/>
-                </a:solidFill>
-                <a:latin typeface="Arial" pitchFamily="34" charset="0"/>
-                <a:ea typeface="Arial" pitchFamily="34" charset="-122"/>
-                <a:cs typeface="Arial" pitchFamily="34" charset="-120"/>
-              </a:rPr>
-              <a:t>En Teams</a:t>
-            </a:r>
-            <a:endParaRPr lang="en-US" sz="1552" dirty="0"/>
-          </a:p>
-        </p:txBody>
-      </p:sp>
-      <p:sp>
-        <p:nvSpPr>
-          <p:cNvPr id="18" name="Text 16"/>
-          <p:cNvSpPr txBox="1"/>
-          <p:nvPr/>
-        </p:nvSpPr>
-        <p:spPr>
-          <a:xfrm>
-            <a:off x="4582058" y="4823663"/>
-            <a:ext cx="3027578" cy="1020089"/>
-          </a:xfrm>
-          <a:prstGeom prst="rect">
-            <a:avLst/>
-          </a:prstGeom>
-          <a:noFill/>
-          <a:ln/>
-        </p:spPr>
-        <p:txBody>
-          <a:bodyPr wrap="square" lIns="0" tIns="0" rIns="0" bIns="0" rtlCol="0" anchor="t"/>
+          <p:cNvPr id="20" name="Text"/>
+          <p:cNvSpPr txBox="1"/>
+          <p:nvPr/>
+        </p:nvSpPr>
+        <p:spPr>
+          <a:xfrm>
+            <a:off x="841248" y="5193792"/>
+            <a:ext cx="10509199" cy="777240"/>
+          </a:xfrm>
+          <a:prstGeom prst="rect">
+            <a:avLst/>
+          </a:prstGeom>
+          <a:noFill/>
+          <a:ln/>
+        </p:spPr>
+        <p:txBody>
+          <a:bodyPr wrap="square" lIns="0" tIns="0" rIns="0" bIns="0" rtlCol="0" anchor="ctr"/>
           <a:lstStyle/>
           <a:p>
             <a:pPr indent="0" marL="0">
@@ -16932,125 +16977,17 @@
               <a:buNone/>
             </a:pPr>
             <a:r>
-              <a:rPr lang="en-US" sz="1261" dirty="0">
-                <a:solidFill>
-                  <a:srgbClr val="16262E"/>
+              <a:rPr lang="en-US" sz="1350" dirty="0">
+                <a:solidFill>
+                  <a:srgbClr val="FFFFFF"/>
                 </a:solidFill>
                 <a:latin typeface="Calibri" pitchFamily="34" charset="0"/>
                 <a:ea typeface="Calibri" pitchFamily="34" charset="-122"/>
                 <a:cs typeface="Calibri" pitchFamily="34" charset="-120"/>
               </a:rPr>
-              <a:t>Sacar la minuta de una reunión a partir de la transcripción. Con otra trampa.</a:t>
-            </a:r>
-            <a:endParaRPr lang="en-US" sz="1261" dirty="0"/>
-          </a:p>
-        </p:txBody>
-      </p:sp>
-      <p:sp>
-        <p:nvSpPr>
-          <p:cNvPr id="19" name="Shape 17"/>
-          <p:cNvSpPr/>
-          <p:nvPr/>
-        </p:nvSpPr>
-        <p:spPr>
-          <a:xfrm>
-            <a:off x="8121701" y="4128516"/>
-            <a:ext cx="3503066" cy="1916405"/>
-          </a:xfrm>
-          <a:prstGeom prst="roundRect">
-            <a:avLst>
-              <a:gd name="adj" fmla="val 3817"/>
-            </a:avLst>
-          </a:prstGeom>
-          <a:solidFill>
-            <a:srgbClr val="F2F5F6"/>
-          </a:solidFill>
-          <a:ln w="12700">
-            <a:solidFill>
-              <a:srgbClr val="F2F5F6"/>
-            </a:solidFill>
-            <a:prstDash val="solid"/>
-          </a:ln>
-        </p:spPr>
-      </p:sp>
-      <p:sp>
-        <p:nvSpPr>
-          <p:cNvPr id="20" name="Text 18"/>
-          <p:cNvSpPr txBox="1"/>
-          <p:nvPr/>
-        </p:nvSpPr>
-        <p:spPr>
-          <a:xfrm>
-            <a:off x="8359445" y="4366260"/>
-            <a:ext cx="3027578" cy="311099"/>
-          </a:xfrm>
-          <a:prstGeom prst="rect">
-            <a:avLst/>
-          </a:prstGeom>
-          <a:noFill/>
-          <a:ln/>
-        </p:spPr>
-        <p:txBody>
-          <a:bodyPr wrap="square" lIns="0" tIns="0" rIns="0" bIns="0" rtlCol="0" anchor="t"/>
-          <a:lstStyle/>
-          <a:p>
-            <a:pPr indent="0" marL="0">
-              <a:buNone/>
-            </a:pPr>
-            <a:r>
-              <a:rPr lang="en-US" sz="1552" b="1" dirty="0">
-                <a:solidFill>
-                  <a:srgbClr val="16262E"/>
-                </a:solidFill>
-                <a:latin typeface="Arial" pitchFamily="34" charset="0"/>
-                <a:ea typeface="Arial" pitchFamily="34" charset="-122"/>
-                <a:cs typeface="Arial" pitchFamily="34" charset="-120"/>
-              </a:rPr>
-              <a:t>En el navegador</a:t>
-            </a:r>
-            <a:endParaRPr lang="en-US" sz="1552" dirty="0"/>
-          </a:p>
-        </p:txBody>
-      </p:sp>
-      <p:sp>
-        <p:nvSpPr>
-          <p:cNvPr id="21" name="Text 19"/>
-          <p:cNvSpPr txBox="1"/>
-          <p:nvPr/>
-        </p:nvSpPr>
-        <p:spPr>
-          <a:xfrm>
-            <a:off x="8359445" y="4823663"/>
-            <a:ext cx="3027578" cy="1020089"/>
-          </a:xfrm>
-          <a:prstGeom prst="rect">
-            <a:avLst/>
-          </a:prstGeom>
-          <a:noFill/>
-          <a:ln/>
-        </p:spPr>
-        <p:txBody>
-          <a:bodyPr wrap="square" lIns="0" tIns="0" rIns="0" bIns="0" rtlCol="0" anchor="t"/>
-          <a:lstStyle/>
-          <a:p>
-            <a:pPr indent="0" marL="0">
-              <a:lnSpc>
-                <a:spcPct val="110000"/>
-              </a:lnSpc>
-              <a:buNone/>
-            </a:pPr>
-            <a:r>
-              <a:rPr lang="en-US" sz="1261" dirty="0">
-                <a:solidFill>
-                  <a:srgbClr val="16262E"/>
-                </a:solidFill>
-                <a:latin typeface="Calibri" pitchFamily="34" charset="0"/>
-                <a:ea typeface="Calibri" pitchFamily="34" charset="-122"/>
-                <a:cs typeface="Calibri" pitchFamily="34" charset="-120"/>
-              </a:rPr>
-              <a:t>El chat general. Sirve para explorar, pero es el que menos sabe de tu trabajo.</a:t>
-            </a:r>
-            <a:endParaRPr lang="en-US" sz="1261" dirty="0"/>
+              <a:t>Donde un material del curso diga «Copilot en Word» o «dentro de Excel», léelo como «Copilot Chat con el archivo adjunto». La lámina que sigue trae los dos modos.</a:t>
+            </a:r>
+            <a:endParaRPr lang="en-US" sz="1350" dirty="0"/>
           </a:p>
         </p:txBody>
       </p:sp>
@@ -17283,7 +17220,7 @@
                 <a:ea typeface="Calibri" pitchFamily="34" charset="-122"/>
                 <a:cs typeface="Calibri" pitchFamily="34" charset="-120"/>
               </a:rPr>
-              <a:t>Copilot en Word</a:t>
+              <a:t>Copilot Chat</a:t>
             </a:r>
             <a:endParaRPr lang="en-US" sz="1250" dirty="0"/>
           </a:p>
@@ -17349,7 +17286,7 @@
                 <a:ea typeface="Calibri" pitchFamily="34" charset="-122"/>
                 <a:cs typeface="Calibri" pitchFamily="34" charset="-120"/>
               </a:rPr>
-              <a:t>Copilot en Excel</a:t>
+              <a:t>Con tu cuenta del INEGI</a:t>
             </a:r>
             <a:endParaRPr lang="en-US" sz="1250" dirty="0"/>
           </a:p>
@@ -17415,7 +17352,7 @@
                 <a:ea typeface="Calibri" pitchFamily="34" charset="-122"/>
                 <a:cs typeface="Calibri" pitchFamily="34" charset="-120"/>
               </a:rPr>
-              <a:t>Copilot en Outlook</a:t>
+              <a:t>Tus archivos de OneDrive</a:t>
             </a:r>
             <a:endParaRPr lang="en-US" sz="1250" dirty="0"/>
           </a:p>
@@ -17481,7 +17418,7 @@
                 <a:ea typeface="Calibri" pitchFamily="34" charset="-122"/>
                 <a:cs typeface="Calibri" pitchFamily="34" charset="-120"/>
               </a:rPr>
-              <a:t>Copilot en Teams</a:t>
+              <a:t>Documentos adjuntos</a:t>
             </a:r>
             <a:endParaRPr lang="en-US" sz="1250" dirty="0"/>
           </a:p>
@@ -17489,14 +17426,171 @@
       </p:sp>
       <p:sp>
         <p:nvSpPr>
-          <p:cNvPr id="14" name="Shape 12"/>
+          <p:cNvPr id="18" name="Text 16"/>
+          <p:cNvSpPr txBox="1"/>
+          <p:nvPr/>
+        </p:nvSpPr>
+        <p:spPr>
+          <a:xfrm>
+            <a:off x="841248" y="4206240"/>
+            <a:ext cx="5312015" cy="1371600"/>
+          </a:xfrm>
+          <a:prstGeom prst="rect">
+            <a:avLst/>
+          </a:prstGeom>
+          <a:noFill/>
+          <a:ln/>
+        </p:spPr>
+        <p:txBody>
+          <a:bodyPr wrap="square" lIns="0" tIns="0" rIns="0" bIns="0" rtlCol="0" anchor="t"/>
+          <a:lstStyle/>
+          <a:p>
+            <a:pPr indent="0" marL="0">
+              <a:lnSpc>
+                <a:spcPct val="114000"/>
+              </a:lnSpc>
+              <a:spcAft>
+                <a:spcPts val="600"/>
+              </a:spcAft>
+              <a:buNone/>
+            </a:pPr>
+            <a:r>
+              <a:rPr lang="en-US" sz="1300" dirty="0">
+                <a:solidFill>
+                  <a:srgbClr val="16262E"/>
+                </a:solidFill>
+                <a:latin typeface="Calibri" pitchFamily="34" charset="0"/>
+                <a:ea typeface="Calibri" pitchFamily="34" charset="-122"/>
+                <a:cs typeface="Calibri" pitchFamily="34" charset="-120"/>
+              </a:rPr>
+              <a:t>Con tu cuenta institucional quedas dentro del contrato: tus prompts y tus archivos no entrenan modelos.</a:t>
+            </a:r>
+            <a:endParaRPr lang="en-US" sz="1300" dirty="0"/>
+          </a:p>
+          <a:p>
+            <a:pPr indent="0" marL="0">
+              <a:lnSpc>
+                <a:spcPct val="114000"/>
+              </a:lnSpc>
+              <a:spcAft>
+                <a:spcPts val="600"/>
+              </a:spcAft>
+              <a:buNone/>
+            </a:pPr>
+            <a:r>
+              <a:rPr lang="en-US" sz="1300" dirty="0">
+                <a:solidFill>
+                  <a:srgbClr val="16262E"/>
+                </a:solidFill>
+                <a:latin typeface="Calibri" pitchFamily="34" charset="0"/>
+                <a:ea typeface="Calibri" pitchFamily="34" charset="-122"/>
+                <a:cs typeface="Calibri" pitchFamily="34" charset="-120"/>
+              </a:rPr>
+              <a:t>Copilot Chat lee lo que le adjuntas y tus archivos de OneDrive: ahí vive el contexto de tu trabajo.</a:t>
+            </a:r>
+            <a:endParaRPr lang="en-US" sz="1300" dirty="0"/>
+          </a:p>
+          <a:p>
+            <a:pPr indent="0" marL="0">
+              <a:lnSpc>
+                <a:spcPct val="114000"/>
+              </a:lnSpc>
+              <a:spcAft>
+                <a:spcPts val="600"/>
+              </a:spcAft>
+              <a:buNone/>
+            </a:pPr>
+            <a:r>
+              <a:rPr lang="en-US" sz="1300" dirty="0">
+                <a:solidFill>
+                  <a:srgbClr val="16262E"/>
+                </a:solidFill>
+                <a:latin typeface="Calibri" pitchFamily="34" charset="0"/>
+                <a:ea typeface="Calibri" pitchFamily="34" charset="-122"/>
+                <a:cs typeface="Calibri" pitchFamily="34" charset="-120"/>
+              </a:rPr>
+              <a:t>Es el único lugar donde puedes trabajar con información amarilla.</a:t>
+            </a:r>
+            <a:endParaRPr lang="en-US" sz="1300" dirty="0"/>
+          </a:p>
+        </p:txBody>
+      </p:sp>
+      <p:sp>
+        <p:nvSpPr>
+          <p:cNvPr id="19" name="Shape 17"/>
           <p:cNvSpPr/>
           <p:nvPr/>
         </p:nvSpPr>
         <p:spPr>
           <a:xfrm>
-            <a:off x="841248" y="3547872"/>
-            <a:ext cx="2573711" cy="457200"/>
+            <a:off x="6793343" y="1810512"/>
+            <a:ext cx="4831424" cy="3950208"/>
+          </a:xfrm>
+          <a:prstGeom prst="roundRect">
+            <a:avLst>
+              <a:gd name="adj" fmla="val 2778"/>
+            </a:avLst>
+          </a:prstGeom>
+          <a:solidFill>
+            <a:srgbClr val="F2F5F6"/>
+          </a:solidFill>
+          <a:ln w="19050">
+            <a:solidFill>
+              <a:srgbClr val="5A6B73"/>
+            </a:solidFill>
+            <a:prstDash val="dash"/>
+          </a:ln>
+        </p:spPr>
+      </p:sp>
+      <p:sp>
+        <p:nvSpPr>
+          <p:cNvPr id="20" name="Text 18"/>
+          <p:cNvSpPr txBox="1"/>
+          <p:nvPr/>
+        </p:nvSpPr>
+        <p:spPr>
+          <a:xfrm>
+            <a:off x="7067663" y="2029968"/>
+            <a:ext cx="4282784" cy="365760"/>
+          </a:xfrm>
+          <a:prstGeom prst="rect">
+            <a:avLst/>
+          </a:prstGeom>
+          <a:noFill/>
+          <a:ln/>
+        </p:spPr>
+        <p:txBody>
+          <a:bodyPr wrap="square" lIns="0" tIns="0" rIns="0" bIns="0" rtlCol="0" anchor="ctr"/>
+          <a:lstStyle/>
+          <a:p>
+            <a:pPr indent="0" marL="0">
+              <a:buNone/>
+            </a:pPr>
+            <a:r>
+              <a:rPr lang="en-US" sz="1700" b="1" dirty="0">
+                <a:solidFill>
+                  <a:srgbClr val="5A6B73"/>
+                </a:solidFill>
+                <a:latin typeface="Arial" pitchFamily="34" charset="0"/>
+                <a:ea typeface="Arial" pitchFamily="34" charset="-122"/>
+                <a:cs typeface="Arial" pitchFamily="34" charset="-120"/>
+              </a:rPr>
+              <a:t>Fuera del contrato</a:t>
+            </a:r>
+            <a:endParaRPr lang="en-US" sz="1700" dirty="0"/>
+          </a:p>
+        </p:txBody>
+      </p:sp>
+      <p:sp>
+        <p:nvSpPr>
+          <p:cNvPr id="21" name="Shape 19"/>
+          <p:cNvSpPr/>
+          <p:nvPr/>
+        </p:nvSpPr>
+        <p:spPr>
+          <a:xfrm>
+            <a:off x="7067663" y="2523744"/>
+            <a:ext cx="4282784" cy="457200"/>
           </a:xfrm>
           <a:prstGeom prst="roundRect">
             <a:avLst>
@@ -17516,14 +17610,14 @@
       </p:sp>
       <p:sp>
         <p:nvSpPr>
-          <p:cNvPr id="15" name="Text 13"/>
-          <p:cNvSpPr txBox="1"/>
-          <p:nvPr/>
-        </p:nvSpPr>
-        <p:spPr>
-          <a:xfrm>
-            <a:off x="987552" y="3547872"/>
-            <a:ext cx="2281103" cy="420624"/>
+          <p:cNvPr id="22" name="Text 20"/>
+          <p:cNvSpPr txBox="1"/>
+          <p:nvPr/>
+        </p:nvSpPr>
+        <p:spPr>
+          <a:xfrm>
+            <a:off x="7213967" y="2523744"/>
+            <a:ext cx="3990176" cy="420624"/>
           </a:xfrm>
           <a:prstGeom prst="rect">
             <a:avLst/>
@@ -17547,7 +17641,7 @@
                 <a:ea typeface="Calibri" pitchFamily="34" charset="-122"/>
                 <a:cs typeface="Calibri" pitchFamily="34" charset="-120"/>
               </a:rPr>
-              <a:t>SharePoint</a:t>
+              <a:t>Copilot sin tu cuenta</a:t>
             </a:r>
             <a:endParaRPr lang="en-US" sz="1250" dirty="0"/>
           </a:p>
@@ -17555,14 +17649,14 @@
       </p:sp>
       <p:sp>
         <p:nvSpPr>
-          <p:cNvPr id="16" name="Shape 14"/>
+          <p:cNvPr id="23" name="Shape 21"/>
           <p:cNvSpPr/>
           <p:nvPr/>
         </p:nvSpPr>
         <p:spPr>
           <a:xfrm>
-            <a:off x="3579551" y="3547872"/>
-            <a:ext cx="2573711" cy="457200"/>
+            <a:off x="7067663" y="3035808"/>
+            <a:ext cx="4282784" cy="457200"/>
           </a:xfrm>
           <a:prstGeom prst="roundRect">
             <a:avLst>
@@ -17582,14 +17676,14 @@
       </p:sp>
       <p:sp>
         <p:nvSpPr>
-          <p:cNvPr id="17" name="Text 15"/>
-          <p:cNvSpPr txBox="1"/>
-          <p:nvPr/>
-        </p:nvSpPr>
-        <p:spPr>
-          <a:xfrm>
-            <a:off x="3725855" y="3547872"/>
-            <a:ext cx="2281103" cy="420624"/>
+          <p:cNvPr id="24" name="Text 22"/>
+          <p:cNvSpPr txBox="1"/>
+          <p:nvPr/>
+        </p:nvSpPr>
+        <p:spPr>
+          <a:xfrm>
+            <a:off x="7213967" y="3035808"/>
+            <a:ext cx="3990176" cy="420624"/>
           </a:xfrm>
           <a:prstGeom prst="rect">
             <a:avLst/>
@@ -17613,7 +17707,7 @@
                 <a:ea typeface="Calibri" pitchFamily="34" charset="-122"/>
                 <a:cs typeface="Calibri" pitchFamily="34" charset="-120"/>
               </a:rPr>
-              <a:t>OneDrive</a:t>
+              <a:t>ChatGPT, Claude, Gemini</a:t>
             </a:r>
             <a:endParaRPr lang="en-US" sz="1250" dirty="0"/>
           </a:p>
@@ -17621,170 +17715,13 @@
       </p:sp>
       <p:sp>
         <p:nvSpPr>
-          <p:cNvPr id="18" name="Text 16"/>
-          <p:cNvSpPr txBox="1"/>
-          <p:nvPr/>
-        </p:nvSpPr>
-        <p:spPr>
-          <a:xfrm>
-            <a:off x="841248" y="4206240"/>
-            <a:ext cx="5312015" cy="1371600"/>
-          </a:xfrm>
-          <a:prstGeom prst="rect">
-            <a:avLst/>
-          </a:prstGeom>
-          <a:noFill/>
-          <a:ln/>
-        </p:spPr>
-        <p:txBody>
-          <a:bodyPr wrap="square" lIns="0" tIns="0" rIns="0" bIns="0" rtlCol="0" anchor="t"/>
-          <a:lstStyle/>
-          <a:p>
-            <a:pPr indent="0" marL="0">
-              <a:lnSpc>
-                <a:spcPct val="114000"/>
-              </a:lnSpc>
-              <a:spcAft>
-                <a:spcPts val="600"/>
-              </a:spcAft>
-              <a:buNone/>
-            </a:pPr>
-            <a:r>
-              <a:rPr lang="en-US" sz="1300" dirty="0">
-                <a:solidFill>
-                  <a:srgbClr val="16262E"/>
-                </a:solidFill>
-                <a:latin typeface="Calibri" pitchFamily="34" charset="0"/>
-                <a:ea typeface="Calibri" pitchFamily="34" charset="-122"/>
-                <a:cs typeface="Calibri" pitchFamily="34" charset="-120"/>
-              </a:rPr>
-              <a:t>Aquí Copilot puede leer tus correos, tus archivos de SharePoint y tus chats de Teams.</a:t>
-            </a:r>
-            <a:endParaRPr lang="en-US" sz="1300" dirty="0"/>
-          </a:p>
-          <a:p>
-            <a:pPr indent="0" marL="0">
-              <a:lnSpc>
-                <a:spcPct val="114000"/>
-              </a:lnSpc>
-              <a:spcAft>
-                <a:spcPts val="600"/>
-              </a:spcAft>
-              <a:buNone/>
-            </a:pPr>
-            <a:r>
-              <a:rPr lang="en-US" sz="1300" dirty="0">
-                <a:solidFill>
-                  <a:srgbClr val="16262E"/>
-                </a:solidFill>
-                <a:latin typeface="Calibri" pitchFamily="34" charset="0"/>
-                <a:ea typeface="Calibri" pitchFamily="34" charset="-122"/>
-                <a:cs typeface="Calibri" pitchFamily="34" charset="-120"/>
-              </a:rPr>
-              <a:t>Es donde aporta valor de verdad, porque conoce el contexto de tu trabajo.</a:t>
-            </a:r>
-            <a:endParaRPr lang="en-US" sz="1300" dirty="0"/>
-          </a:p>
-          <a:p>
-            <a:pPr indent="0" marL="0">
-              <a:lnSpc>
-                <a:spcPct val="114000"/>
-              </a:lnSpc>
-              <a:spcAft>
-                <a:spcPts val="600"/>
-              </a:spcAft>
-              <a:buNone/>
-            </a:pPr>
-            <a:r>
-              <a:rPr lang="en-US" sz="1300" dirty="0">
-                <a:solidFill>
-                  <a:srgbClr val="16262E"/>
-                </a:solidFill>
-                <a:latin typeface="Calibri" pitchFamily="34" charset="0"/>
-                <a:ea typeface="Calibri" pitchFamily="34" charset="-122"/>
-                <a:cs typeface="Calibri" pitchFamily="34" charset="-120"/>
-              </a:rPr>
-              <a:t>Es el único lugar donde puedes trabajar con información amarilla.</a:t>
-            </a:r>
-            <a:endParaRPr lang="en-US" sz="1300" dirty="0"/>
-          </a:p>
-        </p:txBody>
-      </p:sp>
-      <p:sp>
-        <p:nvSpPr>
-          <p:cNvPr id="19" name="Shape 17"/>
+          <p:cNvPr id="25" name="Shape 23"/>
           <p:cNvSpPr/>
           <p:nvPr/>
         </p:nvSpPr>
         <p:spPr>
           <a:xfrm>
-            <a:off x="6793343" y="1810512"/>
-            <a:ext cx="4831424" cy="3950208"/>
-          </a:xfrm>
-          <a:prstGeom prst="roundRect">
-            <a:avLst>
-              <a:gd name="adj" fmla="val 2778"/>
-            </a:avLst>
-          </a:prstGeom>
-          <a:solidFill>
-            <a:srgbClr val="F2F5F6"/>
-          </a:solidFill>
-          <a:ln w="19050">
-            <a:solidFill>
-              <a:srgbClr val="5A6B73"/>
-            </a:solidFill>
-            <a:prstDash val="dash"/>
-          </a:ln>
-        </p:spPr>
-      </p:sp>
-      <p:sp>
-        <p:nvSpPr>
-          <p:cNvPr id="20" name="Text 18"/>
-          <p:cNvSpPr txBox="1"/>
-          <p:nvPr/>
-        </p:nvSpPr>
-        <p:spPr>
-          <a:xfrm>
-            <a:off x="7067663" y="2029968"/>
-            <a:ext cx="4282784" cy="365760"/>
-          </a:xfrm>
-          <a:prstGeom prst="rect">
-            <a:avLst/>
-          </a:prstGeom>
-          <a:noFill/>
-          <a:ln/>
-        </p:spPr>
-        <p:txBody>
-          <a:bodyPr wrap="square" lIns="0" tIns="0" rIns="0" bIns="0" rtlCol="0" anchor="ctr"/>
-          <a:lstStyle/>
-          <a:p>
-            <a:pPr indent="0" marL="0">
-              <a:buNone/>
-            </a:pPr>
-            <a:r>
-              <a:rPr lang="en-US" sz="1700" b="1" dirty="0">
-                <a:solidFill>
-                  <a:srgbClr val="5A6B73"/>
-                </a:solidFill>
-                <a:latin typeface="Arial" pitchFamily="34" charset="0"/>
-                <a:ea typeface="Arial" pitchFamily="34" charset="-122"/>
-                <a:cs typeface="Arial" pitchFamily="34" charset="-120"/>
-              </a:rPr>
-              <a:t>Fuera del contrato</a:t>
-            </a:r>
-            <a:endParaRPr lang="en-US" sz="1700" dirty="0"/>
-          </a:p>
-        </p:txBody>
-      </p:sp>
-      <p:sp>
-        <p:nvSpPr>
-          <p:cNvPr id="21" name="Shape 19"/>
-          <p:cNvSpPr/>
-          <p:nvPr/>
-        </p:nvSpPr>
-        <p:spPr>
-          <a:xfrm>
-            <a:off x="7067663" y="2523744"/>
+            <a:off x="7067663" y="3547872"/>
             <a:ext cx="4282784" cy="457200"/>
           </a:xfrm>
           <a:prstGeom prst="roundRect">
@@ -17805,13 +17742,13 @@
       </p:sp>
       <p:sp>
         <p:nvSpPr>
-          <p:cNvPr id="22" name="Text 20"/>
-          <p:cNvSpPr txBox="1"/>
-          <p:nvPr/>
-        </p:nvSpPr>
-        <p:spPr>
-          <a:xfrm>
-            <a:off x="7213967" y="2523744"/>
+          <p:cNvPr id="26" name="Text 24"/>
+          <p:cNvSpPr txBox="1"/>
+          <p:nvPr/>
+        </p:nvSpPr>
+        <p:spPr>
+          <a:xfrm>
+            <a:off x="7213967" y="3547872"/>
             <a:ext cx="3990176" cy="420624"/>
           </a:xfrm>
           <a:prstGeom prst="rect">
@@ -17836,7 +17773,7 @@
                 <a:ea typeface="Calibri" pitchFamily="34" charset="-122"/>
                 <a:cs typeface="Calibri" pitchFamily="34" charset="-120"/>
               </a:rPr>
-              <a:t>Chat del navegador</a:t>
+              <a:t>Perplexity, You.com</a:t>
             </a:r>
             <a:endParaRPr lang="en-US" sz="1250" dirty="0"/>
           </a:p>
@@ -17844,13 +17781,13 @@
       </p:sp>
       <p:sp>
         <p:nvSpPr>
-          <p:cNvPr id="23" name="Shape 21"/>
+          <p:cNvPr id="27" name="Shape 25"/>
           <p:cNvSpPr/>
           <p:nvPr/>
         </p:nvSpPr>
         <p:spPr>
           <a:xfrm>
-            <a:off x="7067663" y="3035808"/>
+            <a:off x="7067663" y="4059936"/>
             <a:ext cx="4282784" cy="457200"/>
           </a:xfrm>
           <a:prstGeom prst="roundRect">
@@ -17871,138 +17808,6 @@
       </p:sp>
       <p:sp>
         <p:nvSpPr>
-          <p:cNvPr id="24" name="Text 22"/>
-          <p:cNvSpPr txBox="1"/>
-          <p:nvPr/>
-        </p:nvSpPr>
-        <p:spPr>
-          <a:xfrm>
-            <a:off x="7213967" y="3035808"/>
-            <a:ext cx="3990176" cy="420624"/>
-          </a:xfrm>
-          <a:prstGeom prst="rect">
-            <a:avLst/>
-          </a:prstGeom>
-          <a:noFill/>
-          <a:ln/>
-        </p:spPr>
-        <p:txBody>
-          <a:bodyPr wrap="square" lIns="0" tIns="0" rIns="0" bIns="0" rtlCol="0" anchor="ctr"/>
-          <a:lstStyle/>
-          <a:p>
-            <a:pPr algn="ctr" indent="0" marL="0">
-              <a:buNone/>
-            </a:pPr>
-            <a:r>
-              <a:rPr lang="en-US" sz="1250" b="1" dirty="0">
-                <a:solidFill>
-                  <a:srgbClr val="16262E"/>
-                </a:solidFill>
-                <a:latin typeface="Calibri" pitchFamily="34" charset="0"/>
-                <a:ea typeface="Calibri" pitchFamily="34" charset="-122"/>
-                <a:cs typeface="Calibri" pitchFamily="34" charset="-120"/>
-              </a:rPr>
-              <a:t>ChatGPT, Claude, Gemini</a:t>
-            </a:r>
-            <a:endParaRPr lang="en-US" sz="1250" dirty="0"/>
-          </a:p>
-        </p:txBody>
-      </p:sp>
-      <p:sp>
-        <p:nvSpPr>
-          <p:cNvPr id="25" name="Shape 23"/>
-          <p:cNvSpPr/>
-          <p:nvPr/>
-        </p:nvSpPr>
-        <p:spPr>
-          <a:xfrm>
-            <a:off x="7067663" y="3547872"/>
-            <a:ext cx="4282784" cy="457200"/>
-          </a:xfrm>
-          <a:prstGeom prst="roundRect">
-            <a:avLst>
-              <a:gd name="adj" fmla="val 50000"/>
-            </a:avLst>
-          </a:prstGeom>
-          <a:solidFill>
-            <a:srgbClr val="FFFFFF"/>
-          </a:solidFill>
-          <a:ln w="12700">
-            <a:solidFill>
-              <a:srgbClr val="FFFFFF"/>
-            </a:solidFill>
-            <a:prstDash val="solid"/>
-          </a:ln>
-        </p:spPr>
-      </p:sp>
-      <p:sp>
-        <p:nvSpPr>
-          <p:cNvPr id="26" name="Text 24"/>
-          <p:cNvSpPr txBox="1"/>
-          <p:nvPr/>
-        </p:nvSpPr>
-        <p:spPr>
-          <a:xfrm>
-            <a:off x="7213967" y="3547872"/>
-            <a:ext cx="3990176" cy="420624"/>
-          </a:xfrm>
-          <a:prstGeom prst="rect">
-            <a:avLst/>
-          </a:prstGeom>
-          <a:noFill/>
-          <a:ln/>
-        </p:spPr>
-        <p:txBody>
-          <a:bodyPr wrap="square" lIns="0" tIns="0" rIns="0" bIns="0" rtlCol="0" anchor="ctr"/>
-          <a:lstStyle/>
-          <a:p>
-            <a:pPr algn="ctr" indent="0" marL="0">
-              <a:buNone/>
-            </a:pPr>
-            <a:r>
-              <a:rPr lang="en-US" sz="1250" b="1" dirty="0">
-                <a:solidFill>
-                  <a:srgbClr val="16262E"/>
-                </a:solidFill>
-                <a:latin typeface="Calibri" pitchFamily="34" charset="0"/>
-                <a:ea typeface="Calibri" pitchFamily="34" charset="-122"/>
-                <a:cs typeface="Calibri" pitchFamily="34" charset="-120"/>
-              </a:rPr>
-              <a:t>Perplexity, You.com</a:t>
-            </a:r>
-            <a:endParaRPr lang="en-US" sz="1250" dirty="0"/>
-          </a:p>
-        </p:txBody>
-      </p:sp>
-      <p:sp>
-        <p:nvSpPr>
-          <p:cNvPr id="27" name="Shape 25"/>
-          <p:cNvSpPr/>
-          <p:nvPr/>
-        </p:nvSpPr>
-        <p:spPr>
-          <a:xfrm>
-            <a:off x="7067663" y="4059936"/>
-            <a:ext cx="4282784" cy="457200"/>
-          </a:xfrm>
-          <a:prstGeom prst="roundRect">
-            <a:avLst>
-              <a:gd name="adj" fmla="val 50000"/>
-            </a:avLst>
-          </a:prstGeom>
-          <a:solidFill>
-            <a:srgbClr val="FFFFFF"/>
-          </a:solidFill>
-          <a:ln w="12700">
-            <a:solidFill>
-              <a:srgbClr val="FFFFFF"/>
-            </a:solidFill>
-            <a:prstDash val="solid"/>
-          </a:ln>
-        </p:spPr>
-      </p:sp>
-      <p:sp>
-        <p:nvSpPr>
           <p:cNvPr id="28" name="Text 26"/>
           <p:cNvSpPr txBox="1"/>
           <p:nvPr/>
@@ -18168,7 +17973,7 @@
                 <a:ea typeface="Calibri" pitchFamily="34" charset="-122"/>
                 <a:cs typeface="Calibri" pitchFamily="34" charset="-120"/>
               </a:rPr>
-              <a:t>Lo primero de la práctica de hoy es que averigües en cuál de los dos modos estás trabajando tú.</a:t>
+              <a:t>La primera verificación de hoy: entra a Copilot Chat con tu cuenta del Instituto y confirma que puedes ver tus archivos de OneDrive.</a:t>
             </a:r>
             <a:endParaRPr lang="en-US" sz="1300" dirty="0"/>
           </a:p>
